--- a/fig/chapter4/多中心无监督异常流量检测方法.pptx
+++ b/fig/chapter4/多中心无监督异常流量检测方法.pptx
@@ -5,11 +5,10 @@
     <p:sldMasterId id="2147483710" r:id="rId1"/>
   </p:sldMasterIdLst>
   <p:notesMasterIdLst>
-    <p:notesMasterId r:id="rId4"/>
+    <p:notesMasterId r:id="rId3"/>
   </p:notesMasterIdLst>
   <p:sldIdLst>
     <p:sldId id="256" r:id="rId2"/>
-    <p:sldId id="257" r:id="rId3"/>
   </p:sldIdLst>
   <p:sldSz cx="9180513" cy="4895850"/>
   <p:notesSz cx="6858000" cy="9144000"/>
@@ -198,7 +197,7 @@
           <a:p>
             <a:fld id="{11A3D8E1-4345-4971-A742-21BAF41183C9}" type="datetimeFigureOut">
               <a:rPr lang="zh-CN" altLang="en-US" smtClean="0"/>
-              <a:t>2026/3/12</a:t>
+              <a:t>2026/3/17</a:t>
             </a:fld>
             <a:endParaRPr lang="zh-CN" altLang="en-US"/>
           </a:p>
@@ -596,7 +595,7 @@
           <a:p>
             <a:fld id="{7D68220C-5A5C-478F-B803-C4E547BB9071}" type="datetimeFigureOut">
               <a:rPr lang="zh-CN" altLang="en-US" smtClean="0"/>
-              <a:t>2026/3/12</a:t>
+              <a:t>2026/3/17</a:t>
             </a:fld>
             <a:endParaRPr lang="zh-CN" altLang="en-US"/>
           </a:p>
@@ -766,7 +765,7 @@
           <a:p>
             <a:fld id="{7D68220C-5A5C-478F-B803-C4E547BB9071}" type="datetimeFigureOut">
               <a:rPr lang="zh-CN" altLang="en-US" smtClean="0"/>
-              <a:t>2026/3/12</a:t>
+              <a:t>2026/3/17</a:t>
             </a:fld>
             <a:endParaRPr lang="zh-CN" altLang="en-US"/>
           </a:p>
@@ -946,7 +945,7 @@
           <a:p>
             <a:fld id="{7D68220C-5A5C-478F-B803-C4E547BB9071}" type="datetimeFigureOut">
               <a:rPr lang="zh-CN" altLang="en-US" smtClean="0"/>
-              <a:t>2026/3/12</a:t>
+              <a:t>2026/3/17</a:t>
             </a:fld>
             <a:endParaRPr lang="zh-CN" altLang="en-US"/>
           </a:p>
@@ -1116,7 +1115,7 @@
           <a:p>
             <a:fld id="{7D68220C-5A5C-478F-B803-C4E547BB9071}" type="datetimeFigureOut">
               <a:rPr lang="zh-CN" altLang="en-US" smtClean="0"/>
-              <a:t>2026/3/12</a:t>
+              <a:t>2026/3/17</a:t>
             </a:fld>
             <a:endParaRPr lang="zh-CN" altLang="en-US"/>
           </a:p>
@@ -1362,7 +1361,7 @@
           <a:p>
             <a:fld id="{7D68220C-5A5C-478F-B803-C4E547BB9071}" type="datetimeFigureOut">
               <a:rPr lang="zh-CN" altLang="en-US" smtClean="0"/>
-              <a:t>2026/3/12</a:t>
+              <a:t>2026/3/17</a:t>
             </a:fld>
             <a:endParaRPr lang="zh-CN" altLang="en-US"/>
           </a:p>
@@ -1594,7 +1593,7 @@
           <a:p>
             <a:fld id="{7D68220C-5A5C-478F-B803-C4E547BB9071}" type="datetimeFigureOut">
               <a:rPr lang="zh-CN" altLang="en-US" smtClean="0"/>
-              <a:t>2026/3/12</a:t>
+              <a:t>2026/3/17</a:t>
             </a:fld>
             <a:endParaRPr lang="zh-CN" altLang="en-US"/>
           </a:p>
@@ -1961,7 +1960,7 @@
           <a:p>
             <a:fld id="{7D68220C-5A5C-478F-B803-C4E547BB9071}" type="datetimeFigureOut">
               <a:rPr lang="zh-CN" altLang="en-US" smtClean="0"/>
-              <a:t>2026/3/12</a:t>
+              <a:t>2026/3/17</a:t>
             </a:fld>
             <a:endParaRPr lang="zh-CN" altLang="en-US"/>
           </a:p>
@@ -2079,7 +2078,7 @@
           <a:p>
             <a:fld id="{7D68220C-5A5C-478F-B803-C4E547BB9071}" type="datetimeFigureOut">
               <a:rPr lang="zh-CN" altLang="en-US" smtClean="0"/>
-              <a:t>2026/3/12</a:t>
+              <a:t>2026/3/17</a:t>
             </a:fld>
             <a:endParaRPr lang="zh-CN" altLang="en-US"/>
           </a:p>
@@ -2174,7 +2173,7 @@
           <a:p>
             <a:fld id="{7D68220C-5A5C-478F-B803-C4E547BB9071}" type="datetimeFigureOut">
               <a:rPr lang="zh-CN" altLang="en-US" smtClean="0"/>
-              <a:t>2026/3/12</a:t>
+              <a:t>2026/3/17</a:t>
             </a:fld>
             <a:endParaRPr lang="zh-CN" altLang="en-US"/>
           </a:p>
@@ -2451,7 +2450,7 @@
           <a:p>
             <a:fld id="{7D68220C-5A5C-478F-B803-C4E547BB9071}" type="datetimeFigureOut">
               <a:rPr lang="zh-CN" altLang="en-US" smtClean="0"/>
-              <a:t>2026/3/12</a:t>
+              <a:t>2026/3/17</a:t>
             </a:fld>
             <a:endParaRPr lang="zh-CN" altLang="en-US"/>
           </a:p>
@@ -2708,7 +2707,7 @@
           <a:p>
             <a:fld id="{7D68220C-5A5C-478F-B803-C4E547BB9071}" type="datetimeFigureOut">
               <a:rPr lang="zh-CN" altLang="en-US" smtClean="0"/>
-              <a:t>2026/3/12</a:t>
+              <a:t>2026/3/17</a:t>
             </a:fld>
             <a:endParaRPr lang="zh-CN" altLang="en-US"/>
           </a:p>
@@ -2921,7 +2920,7 @@
           <a:p>
             <a:fld id="{7D68220C-5A5C-478F-B803-C4E547BB9071}" type="datetimeFigureOut">
               <a:rPr lang="zh-CN" altLang="en-US" smtClean="0"/>
-              <a:t>2026/3/12</a:t>
+              <a:t>2026/3/17</a:t>
             </a:fld>
             <a:endParaRPr lang="zh-CN" altLang="en-US"/>
           </a:p>
@@ -3398,9 +3397,9 @@
         <p:grpSpPr>
           <a:xfrm>
             <a:off x="-15411" y="1243526"/>
-            <a:ext cx="1835687" cy="2268429"/>
+            <a:ext cx="1803699" cy="2262079"/>
             <a:chOff x="679401" y="758399"/>
-            <a:chExt cx="1751230" cy="2164063"/>
+            <a:chExt cx="1720713" cy="2158005"/>
           </a:xfrm>
         </p:grpSpPr>
         <p:sp>
@@ -3472,7 +3471,7 @@
           <p:spPr>
             <a:xfrm>
               <a:off x="679401" y="2643646"/>
-              <a:ext cx="1751230" cy="278816"/>
+              <a:ext cx="1720713" cy="272758"/>
             </a:xfrm>
             <a:prstGeom prst="rect">
               <a:avLst/>
@@ -5374,44 +5373,110 @@
           </a:fontRef>
         </p:style>
       </p:cxnSp>
-      <p:sp>
-        <p:nvSpPr>
-          <p:cNvPr id="189" name="文本框 188">
-            <a:extLst>
-              <a:ext uri="{FF2B5EF4-FFF2-40B4-BE49-F238E27FC236}">
-                <a16:creationId xmlns:a16="http://schemas.microsoft.com/office/drawing/2014/main" id="{C1EDC1DB-F8C4-484D-96B3-4E0CE1338F94}"/>
-              </a:ext>
-            </a:extLst>
-          </p:cNvPr>
-          <p:cNvSpPr txBox="1"/>
-          <p:nvPr/>
-        </p:nvSpPr>
-        <p:spPr>
-          <a:xfrm>
-            <a:off x="3121607" y="1602519"/>
-            <a:ext cx="849080" cy="292262"/>
-          </a:xfrm>
-          <a:prstGeom prst="rect">
-            <a:avLst/>
-          </a:prstGeom>
-          <a:noFill/>
-        </p:spPr>
-        <p:txBody>
-          <a:bodyPr wrap="none" rtlCol="0">
-            <a:spAutoFit/>
-          </a:bodyPr>
-          <a:lstStyle/>
-          <a:p>
-            <a:r>
-              <a:rPr lang="zh-CN" altLang="en-US" sz="1258" dirty="0">
-                <a:latin typeface="宋体" panose="02010600030101010101" pitchFamily="2" charset="-122"/>
-                <a:ea typeface="宋体" panose="02010600030101010101" pitchFamily="2" charset="-122"/>
-              </a:rPr>
-              <a:t>隐藏表示</a:t>
-            </a:r>
-          </a:p>
-        </p:txBody>
-      </p:sp>
+      <mc:AlternateContent xmlns:mc="http://schemas.openxmlformats.org/markup-compatibility/2006">
+        <mc:Choice xmlns:a14="http://schemas.microsoft.com/office/drawing/2010/main" Requires="a14">
+          <p:sp>
+            <p:nvSpPr>
+              <p:cNvPr id="189" name="文本框 188">
+                <a:extLst>
+                  <a:ext uri="{FF2B5EF4-FFF2-40B4-BE49-F238E27FC236}">
+                    <a16:creationId xmlns:a16="http://schemas.microsoft.com/office/drawing/2014/main" id="{C1EDC1DB-F8C4-484D-96B3-4E0CE1338F94}"/>
+                  </a:ext>
+                </a:extLst>
+              </p:cNvPr>
+              <p:cNvSpPr txBox="1"/>
+              <p:nvPr/>
+            </p:nvSpPr>
+            <p:spPr>
+              <a:xfrm>
+                <a:off x="2984746" y="1602576"/>
+                <a:ext cx="918841" cy="285912"/>
+              </a:xfrm>
+              <a:prstGeom prst="rect">
+                <a:avLst/>
+              </a:prstGeom>
+              <a:noFill/>
+            </p:spPr>
+            <p:txBody>
+              <a:bodyPr wrap="none" rtlCol="0">
+                <a:spAutoFit/>
+              </a:bodyPr>
+              <a:lstStyle/>
+              <a:p>
+                <a:r>
+                  <a:rPr lang="zh-CN" altLang="en-US" sz="1258" dirty="0">
+                    <a:latin typeface="宋体" panose="02010600030101010101" pitchFamily="2" charset="-122"/>
+                    <a:ea typeface="宋体" panose="02010600030101010101" pitchFamily="2" charset="-122"/>
+                  </a:rPr>
+                  <a:t>隐藏表示</a:t>
+                </a:r>
+                <a14:m>
+                  <m:oMath xmlns:m="http://schemas.openxmlformats.org/officeDocument/2006/math">
+                    <m:r>
+                      <m:rPr>
+                        <m:sty m:val="p"/>
+                      </m:rPr>
+                      <a:rPr lang="el-GR" altLang="zh-CN" sz="1258" i="1" smtClean="0">
+                        <a:latin typeface="Cambria Math" panose="02040503050406030204" pitchFamily="18" charset="0"/>
+                        <a:ea typeface="Cambria Math" panose="02040503050406030204" pitchFamily="18" charset="0"/>
+                      </a:rPr>
+                      <m:t>Ζ</m:t>
+                    </m:r>
+                  </m:oMath>
+                </a14:m>
+                <a:endParaRPr lang="zh-CN" altLang="en-US" sz="1258" dirty="0">
+                  <a:latin typeface="宋体" panose="02010600030101010101" pitchFamily="2" charset="-122"/>
+                  <a:ea typeface="宋体" panose="02010600030101010101" pitchFamily="2" charset="-122"/>
+                </a:endParaRPr>
+              </a:p>
+            </p:txBody>
+          </p:sp>
+        </mc:Choice>
+        <mc:Fallback>
+          <p:sp>
+            <p:nvSpPr>
+              <p:cNvPr id="189" name="文本框 188">
+                <a:extLst>
+                  <a:ext uri="{FF2B5EF4-FFF2-40B4-BE49-F238E27FC236}">
+                    <a16:creationId xmlns:a16="http://schemas.microsoft.com/office/drawing/2014/main" id="{C1EDC1DB-F8C4-484D-96B3-4E0CE1338F94}"/>
+                  </a:ext>
+                </a:extLst>
+              </p:cNvPr>
+              <p:cNvSpPr txBox="1">
+                <a:spLocks noRot="1" noChangeAspect="1" noMove="1" noResize="1" noEditPoints="1" noAdjustHandles="1" noChangeArrowheads="1" noChangeShapeType="1" noTextEdit="1"/>
+              </p:cNvSpPr>
+              <p:nvPr/>
+            </p:nvSpPr>
+            <p:spPr>
+              <a:xfrm>
+                <a:off x="2984746" y="1602576"/>
+                <a:ext cx="918841" cy="285912"/>
+              </a:xfrm>
+              <a:prstGeom prst="rect">
+                <a:avLst/>
+              </a:prstGeom>
+              <a:blipFill>
+                <a:blip r:embed="rId36"/>
+                <a:stretch>
+                  <a:fillRect l="-667" t="-2128" b="-14894"/>
+                </a:stretch>
+              </a:blipFill>
+            </p:spPr>
+            <p:txBody>
+              <a:bodyPr/>
+              <a:lstStyle/>
+              <a:p>
+                <a:r>
+                  <a:rPr lang="zh-CN" altLang="en-US">
+                    <a:noFill/>
+                  </a:rPr>
+                  <a:t> </a:t>
+                </a:r>
+              </a:p>
+            </p:txBody>
+          </p:sp>
+        </mc:Fallback>
+      </mc:AlternateContent>
       <p:sp>
         <p:nvSpPr>
           <p:cNvPr id="190" name="圆角矩形 33">
@@ -5506,8 +5571,8 @@
           </a:p>
         </p:txBody>
       </p:sp>
-      <mc:AlternateContent xmlns:mc="http://schemas.openxmlformats.org/markup-compatibility/2006">
-        <mc:Choice xmlns:a14="http://schemas.microsoft.com/office/drawing/2010/main" Requires="a14">
+      <mc:AlternateContent xmlns:mc="http://schemas.openxmlformats.org/markup-compatibility/2006" xmlns:a14="http://schemas.microsoft.com/office/drawing/2010/main">
+        <mc:Choice Requires="a14">
           <p:sp>
             <p:nvSpPr>
               <p:cNvPr id="193" name="文本框 192">
@@ -5705,7 +5770,7 @@
             </p:txBody>
           </p:sp>
         </mc:Choice>
-        <mc:Fallback>
+        <mc:Fallback xmlns="">
           <p:sp>
             <p:nvSpPr>
               <p:cNvPr id="193" name="文本框 192">
@@ -5729,7 +5794,7 @@
                 <a:avLst/>
               </a:prstGeom>
               <a:blipFill>
-                <a:blip r:embed="rId36"/>
+                <a:blip r:embed="rId37"/>
                 <a:stretch>
                   <a:fillRect/>
                 </a:stretch>
@@ -5887,8 +5952,8 @@
           </a:p>
         </p:txBody>
       </p:sp>
-      <mc:AlternateContent xmlns:mc="http://schemas.openxmlformats.org/markup-compatibility/2006">
-        <mc:Choice xmlns:a14="http://schemas.microsoft.com/office/drawing/2010/main" Requires="a14">
+      <mc:AlternateContent xmlns:mc="http://schemas.openxmlformats.org/markup-compatibility/2006" xmlns:a14="http://schemas.microsoft.com/office/drawing/2010/main">
+        <mc:Choice Requires="a14">
           <p:sp>
             <p:nvSpPr>
               <p:cNvPr id="202" name="文本框 201">
@@ -6082,7 +6147,7 @@
             </p:txBody>
           </p:sp>
         </mc:Choice>
-        <mc:Fallback>
+        <mc:Fallback xmlns="">
           <p:sp>
             <p:nvSpPr>
               <p:cNvPr id="202" name="文本框 201">
@@ -6106,7 +6171,7 @@
                 <a:avLst/>
               </a:prstGeom>
               <a:blipFill>
-                <a:blip r:embed="rId37"/>
+                <a:blip r:embed="rId38"/>
                 <a:stretch>
                   <a:fillRect b="-2041"/>
                 </a:stretch>
@@ -6691,7 +6756,7 @@
                   <a:avLst/>
                 </a:prstGeom>
                 <a:blipFill>
-                  <a:blip r:embed="rId38"/>
+                  <a:blip r:embed="rId39"/>
                   <a:stretch>
                     <a:fillRect l="-16129" t="-170455" b="-247727"/>
                   </a:stretch>
@@ -6836,40 +6901,109 @@
           </a:p>
         </p:txBody>
       </p:sp>
+      <mc:AlternateContent xmlns:mc="http://schemas.openxmlformats.org/markup-compatibility/2006">
+        <mc:Choice xmlns:a14="http://schemas.microsoft.com/office/drawing/2010/main" Requires="a14">
+          <p:sp>
+            <p:nvSpPr>
+              <p:cNvPr id="49" name="文本框 48">
+                <a:extLst>
+                  <a:ext uri="{FF2B5EF4-FFF2-40B4-BE49-F238E27FC236}">
+                    <a16:creationId xmlns:a16="http://schemas.microsoft.com/office/drawing/2014/main" id="{1F614933-75F9-4226-8D34-BF4501CA1CD3}"/>
+                  </a:ext>
+                </a:extLst>
+              </p:cNvPr>
+              <p:cNvSpPr txBox="1"/>
+              <p:nvPr/>
+            </p:nvSpPr>
+            <p:spPr>
+              <a:xfrm>
+                <a:off x="786849" y="565227"/>
+                <a:ext cx="436978" cy="369332"/>
+              </a:xfrm>
+              <a:prstGeom prst="rect">
+                <a:avLst/>
+              </a:prstGeom>
+              <a:noFill/>
+            </p:spPr>
+            <p:txBody>
+              <a:bodyPr wrap="none" rtlCol="0">
+                <a:spAutoFit/>
+              </a:bodyPr>
+              <a:lstStyle/>
+              <a:p>
+                <a14:m>
+                  <m:oMathPara xmlns:m="http://schemas.openxmlformats.org/officeDocument/2006/math">
+                    <m:oMathParaPr>
+                      <m:jc m:val="centerGroup"/>
+                    </m:oMathParaPr>
+                    <m:oMath xmlns:m="http://schemas.openxmlformats.org/officeDocument/2006/math">
+                      <m:r>
+                        <a:rPr lang="zh-CN" altLang="en-US" i="1" smtClean="0">
+                          <a:latin typeface="Cambria Math" panose="02040503050406030204" pitchFamily="18" charset="0"/>
+                          <a:ea typeface="宋体" panose="02010600030101010101" pitchFamily="2" charset="-122"/>
+                        </a:rPr>
+                        <m:t>𝜒</m:t>
+                      </m:r>
+                    </m:oMath>
+                  </m:oMathPara>
+                </a14:m>
+                <a:endParaRPr lang="zh-CN" altLang="en-US" dirty="0">
+                  <a:latin typeface="宋体" panose="02010600030101010101" pitchFamily="2" charset="-122"/>
+                  <a:ea typeface="宋体" panose="02010600030101010101" pitchFamily="2" charset="-122"/>
+                </a:endParaRPr>
+              </a:p>
+            </p:txBody>
+          </p:sp>
+        </mc:Choice>
+        <mc:Fallback>
+          <p:sp>
+            <p:nvSpPr>
+              <p:cNvPr id="49" name="文本框 48">
+                <a:extLst>
+                  <a:ext uri="{FF2B5EF4-FFF2-40B4-BE49-F238E27FC236}">
+                    <a16:creationId xmlns:a16="http://schemas.microsoft.com/office/drawing/2014/main" id="{1F614933-75F9-4226-8D34-BF4501CA1CD3}"/>
+                  </a:ext>
+                </a:extLst>
+              </p:cNvPr>
+              <p:cNvSpPr txBox="1">
+                <a:spLocks noRot="1" noChangeAspect="1" noMove="1" noResize="1" noEditPoints="1" noAdjustHandles="1" noChangeArrowheads="1" noChangeShapeType="1" noTextEdit="1"/>
+              </p:cNvSpPr>
+              <p:nvPr/>
+            </p:nvSpPr>
+            <p:spPr>
+              <a:xfrm>
+                <a:off x="786849" y="565227"/>
+                <a:ext cx="436978" cy="369332"/>
+              </a:xfrm>
+              <a:prstGeom prst="rect">
+                <a:avLst/>
+              </a:prstGeom>
+              <a:blipFill>
+                <a:blip r:embed="rId40"/>
+                <a:stretch>
+                  <a:fillRect b="-8333"/>
+                </a:stretch>
+              </a:blipFill>
+            </p:spPr>
+            <p:txBody>
+              <a:bodyPr/>
+              <a:lstStyle/>
+              <a:p>
+                <a:r>
+                  <a:rPr lang="zh-CN" altLang="en-US">
+                    <a:noFill/>
+                  </a:rPr>
+                  <a:t> </a:t>
+                </a:r>
+              </a:p>
+            </p:txBody>
+          </p:sp>
+        </mc:Fallback>
+      </mc:AlternateContent>
     </p:spTree>
     <p:extLst>
       <p:ext uri="{BB962C8B-B14F-4D97-AF65-F5344CB8AC3E}">
         <p14:creationId xmlns:p14="http://schemas.microsoft.com/office/powerpoint/2010/main" val="1417007552"/>
-      </p:ext>
-    </p:extLst>
-  </p:cSld>
-  <p:clrMapOvr>
-    <a:masterClrMapping/>
-  </p:clrMapOvr>
-</p:sld>
-</file>
-
-<file path=ppt/slides/slide2.xml><?xml version="1.0" encoding="utf-8"?>
-<p:sld xmlns:a="http://schemas.openxmlformats.org/drawingml/2006/main" xmlns:r="http://schemas.openxmlformats.org/officeDocument/2006/relationships" xmlns:p="http://schemas.openxmlformats.org/presentationml/2006/main">
-  <p:cSld>
-    <p:spTree>
-      <p:nvGrpSpPr>
-        <p:cNvPr id="1" name=""/>
-        <p:cNvGrpSpPr/>
-        <p:nvPr/>
-      </p:nvGrpSpPr>
-      <p:grpSpPr>
-        <a:xfrm>
-          <a:off x="0" y="0"/>
-          <a:ext cx="0" cy="0"/>
-          <a:chOff x="0" y="0"/>
-          <a:chExt cx="0" cy="0"/>
-        </a:xfrm>
-      </p:grpSpPr>
-    </p:spTree>
-    <p:extLst>
-      <p:ext uri="{BB962C8B-B14F-4D97-AF65-F5344CB8AC3E}">
-        <p14:creationId xmlns:p14="http://schemas.microsoft.com/office/powerpoint/2010/main" val="4149941671"/>
       </p:ext>
     </p:extLst>
   </p:cSld>

--- a/fig/chapter4/多中心无监督异常流量检测方法.pptx
+++ b/fig/chapter4/多中心无监督异常流量检测方法.pptx
@@ -197,7 +197,7 @@
           <a:p>
             <a:fld id="{11A3D8E1-4345-4971-A742-21BAF41183C9}" type="datetimeFigureOut">
               <a:rPr lang="zh-CN" altLang="en-US" smtClean="0"/>
-              <a:t>2026/3/17</a:t>
+              <a:t>2026/3/19</a:t>
             </a:fld>
             <a:endParaRPr lang="zh-CN" altLang="en-US"/>
           </a:p>
@@ -595,7 +595,7 @@
           <a:p>
             <a:fld id="{7D68220C-5A5C-478F-B803-C4E547BB9071}" type="datetimeFigureOut">
               <a:rPr lang="zh-CN" altLang="en-US" smtClean="0"/>
-              <a:t>2026/3/17</a:t>
+              <a:t>2026/3/19</a:t>
             </a:fld>
             <a:endParaRPr lang="zh-CN" altLang="en-US"/>
           </a:p>
@@ -765,7 +765,7 @@
           <a:p>
             <a:fld id="{7D68220C-5A5C-478F-B803-C4E547BB9071}" type="datetimeFigureOut">
               <a:rPr lang="zh-CN" altLang="en-US" smtClean="0"/>
-              <a:t>2026/3/17</a:t>
+              <a:t>2026/3/19</a:t>
             </a:fld>
             <a:endParaRPr lang="zh-CN" altLang="en-US"/>
           </a:p>
@@ -945,7 +945,7 @@
           <a:p>
             <a:fld id="{7D68220C-5A5C-478F-B803-C4E547BB9071}" type="datetimeFigureOut">
               <a:rPr lang="zh-CN" altLang="en-US" smtClean="0"/>
-              <a:t>2026/3/17</a:t>
+              <a:t>2026/3/19</a:t>
             </a:fld>
             <a:endParaRPr lang="zh-CN" altLang="en-US"/>
           </a:p>
@@ -1115,7 +1115,7 @@
           <a:p>
             <a:fld id="{7D68220C-5A5C-478F-B803-C4E547BB9071}" type="datetimeFigureOut">
               <a:rPr lang="zh-CN" altLang="en-US" smtClean="0"/>
-              <a:t>2026/3/17</a:t>
+              <a:t>2026/3/19</a:t>
             </a:fld>
             <a:endParaRPr lang="zh-CN" altLang="en-US"/>
           </a:p>
@@ -1361,7 +1361,7 @@
           <a:p>
             <a:fld id="{7D68220C-5A5C-478F-B803-C4E547BB9071}" type="datetimeFigureOut">
               <a:rPr lang="zh-CN" altLang="en-US" smtClean="0"/>
-              <a:t>2026/3/17</a:t>
+              <a:t>2026/3/19</a:t>
             </a:fld>
             <a:endParaRPr lang="zh-CN" altLang="en-US"/>
           </a:p>
@@ -1593,7 +1593,7 @@
           <a:p>
             <a:fld id="{7D68220C-5A5C-478F-B803-C4E547BB9071}" type="datetimeFigureOut">
               <a:rPr lang="zh-CN" altLang="en-US" smtClean="0"/>
-              <a:t>2026/3/17</a:t>
+              <a:t>2026/3/19</a:t>
             </a:fld>
             <a:endParaRPr lang="zh-CN" altLang="en-US"/>
           </a:p>
@@ -1960,7 +1960,7 @@
           <a:p>
             <a:fld id="{7D68220C-5A5C-478F-B803-C4E547BB9071}" type="datetimeFigureOut">
               <a:rPr lang="zh-CN" altLang="en-US" smtClean="0"/>
-              <a:t>2026/3/17</a:t>
+              <a:t>2026/3/19</a:t>
             </a:fld>
             <a:endParaRPr lang="zh-CN" altLang="en-US"/>
           </a:p>
@@ -2078,7 +2078,7 @@
           <a:p>
             <a:fld id="{7D68220C-5A5C-478F-B803-C4E547BB9071}" type="datetimeFigureOut">
               <a:rPr lang="zh-CN" altLang="en-US" smtClean="0"/>
-              <a:t>2026/3/17</a:t>
+              <a:t>2026/3/19</a:t>
             </a:fld>
             <a:endParaRPr lang="zh-CN" altLang="en-US"/>
           </a:p>
@@ -2173,7 +2173,7 @@
           <a:p>
             <a:fld id="{7D68220C-5A5C-478F-B803-C4E547BB9071}" type="datetimeFigureOut">
               <a:rPr lang="zh-CN" altLang="en-US" smtClean="0"/>
-              <a:t>2026/3/17</a:t>
+              <a:t>2026/3/19</a:t>
             </a:fld>
             <a:endParaRPr lang="zh-CN" altLang="en-US"/>
           </a:p>
@@ -2450,7 +2450,7 @@
           <a:p>
             <a:fld id="{7D68220C-5A5C-478F-B803-C4E547BB9071}" type="datetimeFigureOut">
               <a:rPr lang="zh-CN" altLang="en-US" smtClean="0"/>
-              <a:t>2026/3/17</a:t>
+              <a:t>2026/3/19</a:t>
             </a:fld>
             <a:endParaRPr lang="zh-CN" altLang="en-US"/>
           </a:p>
@@ -2707,7 +2707,7 @@
           <a:p>
             <a:fld id="{7D68220C-5A5C-478F-B803-C4E547BB9071}" type="datetimeFigureOut">
               <a:rPr lang="zh-CN" altLang="en-US" smtClean="0"/>
-              <a:t>2026/3/17</a:t>
+              <a:t>2026/3/19</a:t>
             </a:fld>
             <a:endParaRPr lang="zh-CN" altLang="en-US"/>
           </a:p>
@@ -2920,7 +2920,7 @@
           <a:p>
             <a:fld id="{7D68220C-5A5C-478F-B803-C4E547BB9071}" type="datetimeFigureOut">
               <a:rPr lang="zh-CN" altLang="en-US" smtClean="0"/>
-              <a:t>2026/3/17</a:t>
+              <a:t>2026/3/19</a:t>
             </a:fld>
             <a:endParaRPr lang="zh-CN" altLang="en-US"/>
           </a:p>
@@ -3339,22 +3339,19 @@
         </p:nvSpPr>
         <p:spPr>
           <a:xfrm>
-            <a:off x="4337642" y="56601"/>
-            <a:ext cx="4814251" cy="1602867"/>
+            <a:off x="4271992" y="217229"/>
+            <a:ext cx="4814251" cy="1541928"/>
           </a:xfrm>
           <a:prstGeom prst="roundRect">
-            <a:avLst/>
+            <a:avLst>
+              <a:gd name="adj" fmla="val 4380"/>
+            </a:avLst>
           </a:prstGeom>
           <a:solidFill>
             <a:srgbClr val="E7E3E4"/>
           </a:solidFill>
           <a:ln>
-            <a:solidFill>
-              <a:schemeClr val="accent1">
-                <a:lumMod val="40000"/>
-                <a:lumOff val="60000"/>
-              </a:schemeClr>
-            </a:solidFill>
+            <a:noFill/>
           </a:ln>
         </p:spPr>
         <p:style>
@@ -3382,346 +3379,6 @@
           </a:p>
         </p:txBody>
       </p:sp>
-      <p:grpSp>
-        <p:nvGrpSpPr>
-          <p:cNvPr id="29" name="组合 28">
-            <a:extLst>
-              <a:ext uri="{FF2B5EF4-FFF2-40B4-BE49-F238E27FC236}">
-                <a16:creationId xmlns:a16="http://schemas.microsoft.com/office/drawing/2014/main" id="{6C00D4A1-7072-469E-A5AB-033B07E11869}"/>
-              </a:ext>
-            </a:extLst>
-          </p:cNvPr>
-          <p:cNvGrpSpPr/>
-          <p:nvPr/>
-        </p:nvGrpSpPr>
-        <p:grpSpPr>
-          <a:xfrm>
-            <a:off x="-15411" y="1243526"/>
-            <a:ext cx="1803699" cy="2262079"/>
-            <a:chOff x="679401" y="758399"/>
-            <a:chExt cx="1720713" cy="2158005"/>
-          </a:xfrm>
-        </p:grpSpPr>
-        <p:sp>
-          <p:nvSpPr>
-            <p:cNvPr id="8" name="流程图: 磁盘 7">
-              <a:extLst>
-                <a:ext uri="{FF2B5EF4-FFF2-40B4-BE49-F238E27FC236}">
-                  <a16:creationId xmlns:a16="http://schemas.microsoft.com/office/drawing/2014/main" id="{33871DE3-BDE3-4EF8-B3E1-F08AB4E0BF43}"/>
-                </a:ext>
-              </a:extLst>
-            </p:cNvPr>
-            <p:cNvSpPr/>
-            <p:nvPr/>
-          </p:nvSpPr>
-          <p:spPr>
-            <a:xfrm>
-              <a:off x="756275" y="758399"/>
-              <a:ext cx="1479550" cy="1925187"/>
-            </a:xfrm>
-            <a:prstGeom prst="flowChartMagneticDisk">
-              <a:avLst/>
-            </a:prstGeom>
-            <a:solidFill>
-              <a:srgbClr val="FDE9A2"/>
-            </a:solidFill>
-            <a:ln>
-              <a:solidFill>
-                <a:srgbClr val="B29950"/>
-              </a:solidFill>
-            </a:ln>
-          </p:spPr>
-          <p:style>
-            <a:lnRef idx="2">
-              <a:schemeClr val="accent1">
-                <a:shade val="50000"/>
-              </a:schemeClr>
-            </a:lnRef>
-            <a:fillRef idx="1">
-              <a:schemeClr val="accent1"/>
-            </a:fillRef>
-            <a:effectRef idx="0">
-              <a:schemeClr val="accent1"/>
-            </a:effectRef>
-            <a:fontRef idx="minor">
-              <a:schemeClr val="lt1"/>
-            </a:fontRef>
-          </p:style>
-          <p:txBody>
-            <a:bodyPr rtlCol="0" anchor="ctr"/>
-            <a:lstStyle/>
-            <a:p>
-              <a:pPr algn="ctr"/>
-              <a:endParaRPr lang="zh-CN" altLang="en-US" sz="1894" b="1"/>
-            </a:p>
-          </p:txBody>
-        </p:sp>
-        <p:sp>
-          <p:nvSpPr>
-            <p:cNvPr id="10" name="文本框 9">
-              <a:extLst>
-                <a:ext uri="{FF2B5EF4-FFF2-40B4-BE49-F238E27FC236}">
-                  <a16:creationId xmlns:a16="http://schemas.microsoft.com/office/drawing/2014/main" id="{E5E4BC9D-AAE7-4BAE-8877-1FC360EA3526}"/>
-                </a:ext>
-              </a:extLst>
-            </p:cNvPr>
-            <p:cNvSpPr txBox="1"/>
-            <p:nvPr/>
-          </p:nvSpPr>
-          <p:spPr>
-            <a:xfrm>
-              <a:off x="679401" y="2643646"/>
-              <a:ext cx="1720713" cy="272758"/>
-            </a:xfrm>
-            <a:prstGeom prst="rect">
-              <a:avLst/>
-            </a:prstGeom>
-            <a:noFill/>
-          </p:spPr>
-          <p:txBody>
-            <a:bodyPr wrap="none" rtlCol="0">
-              <a:spAutoFit/>
-            </a:bodyPr>
-            <a:lstStyle/>
-            <a:p>
-              <a:r>
-                <a:rPr lang="zh-CN" altLang="en-US" sz="1258" dirty="0">
-                  <a:latin typeface="宋体" panose="02010600030101010101" pitchFamily="2" charset="-122"/>
-                  <a:ea typeface="宋体" panose="02010600030101010101" pitchFamily="2" charset="-122"/>
-                </a:rPr>
-                <a:t>原始网络输入与预处理</a:t>
-              </a:r>
-            </a:p>
-          </p:txBody>
-        </p:sp>
-        <p:sp>
-          <p:nvSpPr>
-            <p:cNvPr id="21" name="矩形: 圆角 20">
-              <a:extLst>
-                <a:ext uri="{FF2B5EF4-FFF2-40B4-BE49-F238E27FC236}">
-                  <a16:creationId xmlns:a16="http://schemas.microsoft.com/office/drawing/2014/main" id="{41EA6C93-341C-44EE-B52C-A22B9796FA90}"/>
-                </a:ext>
-              </a:extLst>
-            </p:cNvPr>
-            <p:cNvSpPr/>
-            <p:nvPr/>
-          </p:nvSpPr>
-          <p:spPr>
-            <a:xfrm>
-              <a:off x="965058" y="1427567"/>
-              <a:ext cx="1071349" cy="341194"/>
-            </a:xfrm>
-            <a:prstGeom prst="roundRect">
-              <a:avLst/>
-            </a:prstGeom>
-            <a:solidFill>
-              <a:srgbClr val="D1E4EF"/>
-            </a:solidFill>
-            <a:ln>
-              <a:solidFill>
-                <a:srgbClr val="CDBB7B"/>
-              </a:solidFill>
-            </a:ln>
-          </p:spPr>
-          <p:style>
-            <a:lnRef idx="2">
-              <a:schemeClr val="accent1">
-                <a:shade val="50000"/>
-              </a:schemeClr>
-            </a:lnRef>
-            <a:fillRef idx="1">
-              <a:schemeClr val="accent1"/>
-            </a:fillRef>
-            <a:effectRef idx="0">
-              <a:schemeClr val="accent1"/>
-            </a:effectRef>
-            <a:fontRef idx="minor">
-              <a:schemeClr val="lt1"/>
-            </a:fontRef>
-          </p:style>
-          <p:txBody>
-            <a:bodyPr rtlCol="0" anchor="ctr"/>
-            <a:lstStyle/>
-            <a:p>
-              <a:pPr algn="ctr"/>
-              <a:r>
-                <a:rPr lang="zh-CN" altLang="en-US" sz="1258" dirty="0">
-                  <a:solidFill>
-                    <a:schemeClr val="tx1"/>
-                  </a:solidFill>
-                  <a:latin typeface="宋体" panose="02010600030101010101" pitchFamily="2" charset="-122"/>
-                  <a:ea typeface="宋体" panose="02010600030101010101" pitchFamily="2" charset="-122"/>
-                </a:rPr>
-                <a:t>统计特征</a:t>
-              </a:r>
-            </a:p>
-          </p:txBody>
-        </p:sp>
-        <p:sp>
-          <p:nvSpPr>
-            <p:cNvPr id="22" name="矩形: 圆角 21">
-              <a:extLst>
-                <a:ext uri="{FF2B5EF4-FFF2-40B4-BE49-F238E27FC236}">
-                  <a16:creationId xmlns:a16="http://schemas.microsoft.com/office/drawing/2014/main" id="{1F2EC578-4D82-4633-A321-52AF9D598EB4}"/>
-                </a:ext>
-              </a:extLst>
-            </p:cNvPr>
-            <p:cNvSpPr/>
-            <p:nvPr/>
-          </p:nvSpPr>
-          <p:spPr>
-            <a:xfrm>
-              <a:off x="965056" y="1833979"/>
-              <a:ext cx="1071349" cy="341194"/>
-            </a:xfrm>
-            <a:prstGeom prst="roundRect">
-              <a:avLst/>
-            </a:prstGeom>
-            <a:solidFill>
-              <a:srgbClr val="E1EEC0"/>
-            </a:solidFill>
-            <a:ln>
-              <a:solidFill>
-                <a:srgbClr val="CDBB7B"/>
-              </a:solidFill>
-            </a:ln>
-          </p:spPr>
-          <p:style>
-            <a:lnRef idx="2">
-              <a:schemeClr val="accent1">
-                <a:shade val="50000"/>
-              </a:schemeClr>
-            </a:lnRef>
-            <a:fillRef idx="1">
-              <a:schemeClr val="accent1"/>
-            </a:fillRef>
-            <a:effectRef idx="0">
-              <a:schemeClr val="accent1"/>
-            </a:effectRef>
-            <a:fontRef idx="minor">
-              <a:schemeClr val="lt1"/>
-            </a:fontRef>
-          </p:style>
-          <p:txBody>
-            <a:bodyPr rtlCol="0" anchor="ctr"/>
-            <a:lstStyle/>
-            <a:p>
-              <a:pPr algn="ctr"/>
-              <a:r>
-                <a:rPr lang="zh-CN" altLang="en-US" sz="1258" dirty="0">
-                  <a:solidFill>
-                    <a:schemeClr val="tx1"/>
-                  </a:solidFill>
-                  <a:latin typeface="宋体" panose="02010600030101010101" pitchFamily="2" charset="-122"/>
-                  <a:ea typeface="宋体" panose="02010600030101010101" pitchFamily="2" charset="-122"/>
-                </a:rPr>
-                <a:t>时序特征</a:t>
-              </a:r>
-            </a:p>
-          </p:txBody>
-        </p:sp>
-        <p:sp>
-          <p:nvSpPr>
-            <p:cNvPr id="23" name="矩形: 圆角 22">
-              <a:extLst>
-                <a:ext uri="{FF2B5EF4-FFF2-40B4-BE49-F238E27FC236}">
-                  <a16:creationId xmlns:a16="http://schemas.microsoft.com/office/drawing/2014/main" id="{3AAAB9DD-CACF-443F-8507-040DD4506AAC}"/>
-                </a:ext>
-              </a:extLst>
-            </p:cNvPr>
-            <p:cNvSpPr/>
-            <p:nvPr/>
-          </p:nvSpPr>
-          <p:spPr>
-            <a:xfrm>
-              <a:off x="965056" y="2240392"/>
-              <a:ext cx="1071349" cy="341194"/>
-            </a:xfrm>
-            <a:prstGeom prst="roundRect">
-              <a:avLst/>
-            </a:prstGeom>
-            <a:solidFill>
-              <a:srgbClr val="FACD9C"/>
-            </a:solidFill>
-            <a:ln>
-              <a:solidFill>
-                <a:srgbClr val="CDBB7B"/>
-              </a:solidFill>
-            </a:ln>
-          </p:spPr>
-          <p:style>
-            <a:lnRef idx="2">
-              <a:schemeClr val="accent1">
-                <a:shade val="50000"/>
-              </a:schemeClr>
-            </a:lnRef>
-            <a:fillRef idx="1">
-              <a:schemeClr val="accent1"/>
-            </a:fillRef>
-            <a:effectRef idx="0">
-              <a:schemeClr val="accent1"/>
-            </a:effectRef>
-            <a:fontRef idx="minor">
-              <a:schemeClr val="lt1"/>
-            </a:fontRef>
-          </p:style>
-          <p:txBody>
-            <a:bodyPr rtlCol="0" anchor="ctr"/>
-            <a:lstStyle/>
-            <a:p>
-              <a:pPr algn="ctr"/>
-              <a:r>
-                <a:rPr lang="zh-CN" altLang="en-US" sz="1258" dirty="0">
-                  <a:solidFill>
-                    <a:schemeClr val="tx1"/>
-                  </a:solidFill>
-                  <a:latin typeface="宋体" panose="02010600030101010101" pitchFamily="2" charset="-122"/>
-                  <a:ea typeface="宋体" panose="02010600030101010101" pitchFamily="2" charset="-122"/>
-                </a:rPr>
-                <a:t>协议特征</a:t>
-              </a:r>
-            </a:p>
-          </p:txBody>
-        </p:sp>
-        <p:sp>
-          <p:nvSpPr>
-            <p:cNvPr id="24" name="文本框 23">
-              <a:extLst>
-                <a:ext uri="{FF2B5EF4-FFF2-40B4-BE49-F238E27FC236}">
-                  <a16:creationId xmlns:a16="http://schemas.microsoft.com/office/drawing/2014/main" id="{6A635131-0B55-40B5-8844-59134B524BF5}"/>
-                </a:ext>
-              </a:extLst>
-            </p:cNvPr>
-            <p:cNvSpPr txBox="1"/>
-            <p:nvPr/>
-          </p:nvSpPr>
-          <p:spPr>
-            <a:xfrm>
-              <a:off x="865108" y="954484"/>
-              <a:ext cx="1280623" cy="278816"/>
-            </a:xfrm>
-            <a:prstGeom prst="rect">
-              <a:avLst/>
-            </a:prstGeom>
-            <a:noFill/>
-          </p:spPr>
-          <p:txBody>
-            <a:bodyPr wrap="none" rtlCol="0">
-              <a:spAutoFit/>
-            </a:bodyPr>
-            <a:lstStyle/>
-            <a:p>
-              <a:r>
-                <a:rPr lang="zh-CN" altLang="en-US" sz="1258" dirty="0">
-                  <a:latin typeface="宋体" panose="02010600030101010101" pitchFamily="2" charset="-122"/>
-                  <a:ea typeface="宋体" panose="02010600030101010101" pitchFamily="2" charset="-122"/>
-                </a:rPr>
-                <a:t>高维、分布复杂</a:t>
-              </a:r>
-            </a:p>
-          </p:txBody>
-        </p:sp>
-      </p:grpSp>
       <p:sp>
         <p:nvSpPr>
           <p:cNvPr id="26" name="矩形: 圆角 25">
@@ -3736,19 +3393,17 @@
         </p:nvSpPr>
         <p:spPr>
           <a:xfrm>
-            <a:off x="1967255" y="394430"/>
-            <a:ext cx="2003432" cy="525218"/>
+            <a:off x="1901605" y="555057"/>
+            <a:ext cx="2178508" cy="525218"/>
           </a:xfrm>
           <a:prstGeom prst="roundRect">
             <a:avLst/>
           </a:prstGeom>
           <a:solidFill>
-            <a:srgbClr val="DFE6F2"/>
+            <a:srgbClr val="E7E3E4"/>
           </a:solidFill>
           <a:ln>
-            <a:solidFill>
-              <a:srgbClr val="8F9FAF"/>
-            </a:solidFill>
+            <a:noFill/>
           </a:ln>
         </p:spPr>
         <p:style>
@@ -3790,8 +3445,8 @@
         </p:nvSpPr>
         <p:spPr>
           <a:xfrm>
-            <a:off x="1980579" y="509247"/>
-            <a:ext cx="2040943" cy="285912"/>
+            <a:off x="1745636" y="679174"/>
+            <a:ext cx="2468133" cy="285912"/>
           </a:xfrm>
           <a:prstGeom prst="rect">
             <a:avLst/>
@@ -3799,11 +3454,32 @@
           <a:noFill/>
         </p:spPr>
         <p:txBody>
-          <a:bodyPr wrap="none" rtlCol="0">
+          <a:bodyPr wrap="square" rtlCol="0">
             <a:spAutoFit/>
           </a:bodyPr>
           <a:lstStyle/>
           <a:p>
+            <a:r>
+              <a:rPr lang="zh-CN" altLang="en-US" sz="1258" dirty="0">
+                <a:latin typeface="宋体" panose="02010600030101010101" pitchFamily="2" charset="-122"/>
+                <a:ea typeface="宋体" panose="02010600030101010101" pitchFamily="2" charset="-122"/>
+              </a:rPr>
+              <a:t>（</a:t>
+            </a:r>
+            <a:r>
+              <a:rPr lang="en-US" altLang="zh-CN" sz="1258" dirty="0">
+                <a:latin typeface="宋体" panose="02010600030101010101" pitchFamily="2" charset="-122"/>
+                <a:ea typeface="宋体" panose="02010600030101010101" pitchFamily="2" charset="-122"/>
+              </a:rPr>
+              <a:t>b</a:t>
+            </a:r>
+            <a:r>
+              <a:rPr lang="zh-CN" altLang="en-US" sz="1258" dirty="0">
+                <a:latin typeface="宋体" panose="02010600030101010101" pitchFamily="2" charset="-122"/>
+                <a:ea typeface="宋体" panose="02010600030101010101" pitchFamily="2" charset="-122"/>
+              </a:rPr>
+              <a:t>）</a:t>
+            </a:r>
             <a:r>
               <a:rPr lang="en-US" altLang="zh-CN" sz="1258" dirty="0">
                 <a:latin typeface="宋体" panose="02010600030101010101" pitchFamily="2" charset="-122"/>
@@ -3835,8 +3511,8 @@
         </p:nvSpPr>
         <p:spPr>
           <a:xfrm>
-            <a:off x="6106373" y="1363075"/>
-            <a:ext cx="1479892" cy="285912"/>
+            <a:off x="5690469" y="1757574"/>
+            <a:ext cx="2204450" cy="285912"/>
           </a:xfrm>
           <a:prstGeom prst="rect">
             <a:avLst/>
@@ -3849,6 +3525,34 @@
           </a:bodyPr>
           <a:lstStyle/>
           <a:p>
+            <a:r>
+              <a:rPr lang="zh-CN" altLang="en-US" sz="1258" dirty="0">
+                <a:latin typeface="宋体" panose="02010600030101010101" pitchFamily="2" charset="-122"/>
+                <a:ea typeface="宋体" panose="02010600030101010101" pitchFamily="2" charset="-122"/>
+              </a:rPr>
+              <a:t>（</a:t>
+            </a:r>
+            <a:r>
+              <a:rPr lang="en-US" altLang="zh-CN" sz="1258" dirty="0">
+                <a:latin typeface="宋体" panose="02010600030101010101" pitchFamily="2" charset="-122"/>
+                <a:ea typeface="宋体" panose="02010600030101010101" pitchFamily="2" charset="-122"/>
+              </a:rPr>
+              <a:t>d</a:t>
+            </a:r>
+            <a:r>
+              <a:rPr lang="zh-CN" altLang="en-US" sz="1258" dirty="0">
+                <a:latin typeface="宋体" panose="02010600030101010101" pitchFamily="2" charset="-122"/>
+                <a:ea typeface="宋体" panose="02010600030101010101" pitchFamily="2" charset="-122"/>
+              </a:rPr>
+              <a:t>）</a:t>
+            </a:r>
+            <a:r>
+              <a:rPr lang="en-US" altLang="zh-CN" sz="1258" dirty="0">
+                <a:latin typeface="宋体" panose="02010600030101010101" pitchFamily="2" charset="-122"/>
+                <a:ea typeface="宋体" panose="02010600030101010101" pitchFamily="2" charset="-122"/>
+              </a:rPr>
+              <a:t>ASDM</a:t>
+            </a:r>
             <a:r>
               <a:rPr lang="zh-CN" altLang="en-US" sz="1258" dirty="0">
                 <a:latin typeface="宋体" panose="02010600030101010101" pitchFamily="2" charset="-122"/>
@@ -3873,19 +3577,19 @@
         </p:nvSpPr>
         <p:spPr>
           <a:xfrm>
-            <a:off x="2223341" y="2035283"/>
-            <a:ext cx="4284631" cy="2803965"/>
+            <a:off x="2157691" y="2195910"/>
+            <a:ext cx="4284631" cy="2405749"/>
           </a:xfrm>
           <a:prstGeom prst="roundRect">
-            <a:avLst/>
+            <a:avLst>
+              <a:gd name="adj" fmla="val 615"/>
+            </a:avLst>
           </a:prstGeom>
           <a:solidFill>
-            <a:srgbClr val="F2F5FB"/>
+            <a:srgbClr val="D3E8ED"/>
           </a:solidFill>
           <a:ln>
-            <a:solidFill>
-              <a:srgbClr val="AEC1D9"/>
-            </a:solidFill>
+            <a:noFill/>
           </a:ln>
         </p:spPr>
         <p:style>
@@ -3913,174 +3617,125 @@
           </a:p>
         </p:txBody>
       </p:sp>
-      <p:grpSp>
-        <p:nvGrpSpPr>
-          <p:cNvPr id="160" name="组合 159">
+      <p:sp>
+        <p:nvSpPr>
+          <p:cNvPr id="157" name="圆角矩形 4">
             <a:extLst>
               <a:ext uri="{FF2B5EF4-FFF2-40B4-BE49-F238E27FC236}">
-                <a16:creationId xmlns:a16="http://schemas.microsoft.com/office/drawing/2014/main" id="{940DBF3A-8244-46C0-A62C-B1BAF7D9BF73}"/>
+                <a16:creationId xmlns:a16="http://schemas.microsoft.com/office/drawing/2014/main" id="{5814E12C-8415-48A7-8ABA-2522AE9CEC2A}"/>
               </a:ext>
             </a:extLst>
           </p:cNvPr>
-          <p:cNvGrpSpPr/>
+          <p:cNvSpPr/>
           <p:nvPr/>
-        </p:nvGrpSpPr>
-        <p:grpSpPr>
+        </p:nvSpPr>
+        <p:spPr>
           <a:xfrm>
-            <a:off x="2424122" y="2144502"/>
-            <a:ext cx="1659344" cy="889553"/>
-            <a:chOff x="3396328" y="2320119"/>
-            <a:chExt cx="1583001" cy="848627"/>
+            <a:off x="4634540" y="3597892"/>
+            <a:ext cx="1751777" cy="889553"/>
           </a:xfrm>
-        </p:grpSpPr>
-        <p:sp>
-          <p:nvSpPr>
-            <p:cNvPr id="113" name="椭圆 112">
-              <a:extLst>
-                <a:ext uri="{FF2B5EF4-FFF2-40B4-BE49-F238E27FC236}">
-                  <a16:creationId xmlns:a16="http://schemas.microsoft.com/office/drawing/2014/main" id="{4E1D7999-291B-428A-91EF-F978913D2405}"/>
-                </a:ext>
-              </a:extLst>
-            </p:cNvPr>
-            <p:cNvSpPr/>
-            <p:nvPr/>
-          </p:nvSpPr>
-          <p:spPr>
-            <a:xfrm>
-              <a:off x="3396328" y="2320119"/>
-              <a:ext cx="1583001" cy="848627"/>
-            </a:xfrm>
-            <a:prstGeom prst="ellipse">
-              <a:avLst/>
-            </a:prstGeom>
-            <a:solidFill>
-              <a:srgbClr val="D9EAD9"/>
-            </a:solidFill>
-            <a:ln>
+          <a:prstGeom prst="roundRect">
+            <a:avLst>
+              <a:gd name="adj" fmla="val 5082"/>
+            </a:avLst>
+          </a:prstGeom>
+          <a:solidFill>
+            <a:srgbClr val="DEE5C9"/>
+          </a:solidFill>
+          <a:ln>
+            <a:noFill/>
+          </a:ln>
+        </p:spPr>
+        <p:style>
+          <a:lnRef idx="2">
+            <a:schemeClr val="accent1">
+              <a:lumMod val="75000"/>
+            </a:schemeClr>
+          </a:lnRef>
+          <a:fillRef idx="1">
+            <a:schemeClr val="accent1"/>
+          </a:fillRef>
+          <a:effectRef idx="0">
+            <a:srgbClr val="FFFFFF"/>
+          </a:effectRef>
+          <a:fontRef idx="minor">
+            <a:schemeClr val="lt1"/>
+          </a:fontRef>
+        </p:style>
+        <p:txBody>
+          <a:bodyPr rtlCol="0" anchor="ctr"/>
+          <a:lstStyle/>
+          <a:p>
+            <a:pPr algn="ctr"/>
+            <a:endParaRPr lang="zh-CN" altLang="en-US" sz="1894" b="1"/>
+          </a:p>
+        </p:txBody>
+      </p:sp>
+      <mc:AlternateContent xmlns:mc="http://schemas.openxmlformats.org/markup-compatibility/2006" xmlns:a14="http://schemas.microsoft.com/office/drawing/2010/main">
+        <mc:Choice Requires="a14">
+          <p:sp>
+            <p:nvSpPr>
+              <p:cNvPr id="158" name="文本框 157">
+                <a:extLst>
+                  <a:ext uri="{FF2B5EF4-FFF2-40B4-BE49-F238E27FC236}">
+                    <a16:creationId xmlns:a16="http://schemas.microsoft.com/office/drawing/2014/main" id="{80E7983B-4DFE-46A1-9E50-1E63EB1A871A}"/>
+                  </a:ext>
+                </a:extLst>
+              </p:cNvPr>
+              <p:cNvSpPr txBox="1"/>
+              <p:nvPr/>
+            </p:nvSpPr>
+            <p:spPr>
+              <a:xfrm>
+                <a:off x="4971169" y="3630402"/>
+                <a:ext cx="1302256" cy="301165"/>
+              </a:xfrm>
+              <a:prstGeom prst="rect">
+                <a:avLst/>
+              </a:prstGeom>
               <a:noFill/>
-            </a:ln>
-          </p:spPr>
-          <p:style>
-            <a:lnRef idx="2">
-              <a:schemeClr val="accent1">
-                <a:shade val="50000"/>
-              </a:schemeClr>
-            </a:lnRef>
-            <a:fillRef idx="1">
-              <a:schemeClr val="accent1"/>
-            </a:fillRef>
-            <a:effectRef idx="0">
-              <a:schemeClr val="accent1"/>
-            </a:effectRef>
-            <a:fontRef idx="minor">
-              <a:schemeClr val="lt1"/>
-            </a:fontRef>
-          </p:style>
-          <p:txBody>
-            <a:bodyPr rtlCol="0" anchor="ctr"/>
-            <a:lstStyle/>
-            <a:p>
-              <a:pPr algn="ctr"/>
-              <a:endParaRPr lang="zh-CN" altLang="en-US" sz="1894" b="1"/>
-            </a:p>
-          </p:txBody>
-        </p:sp>
-        <mc:AlternateContent xmlns:mc="http://schemas.openxmlformats.org/markup-compatibility/2006" xmlns:a14="http://schemas.microsoft.com/office/drawing/2010/main">
-          <mc:Choice Requires="a14">
-            <p:sp>
-              <p:nvSpPr>
-                <p:cNvPr id="114" name="文本框 113">
-                  <a:extLst>
-                    <a:ext uri="{FF2B5EF4-FFF2-40B4-BE49-F238E27FC236}">
-                      <a16:creationId xmlns:a16="http://schemas.microsoft.com/office/drawing/2014/main" id="{14D51799-6207-4003-B348-02637270E6C7}"/>
-                    </a:ext>
-                  </a:extLst>
-                </p:cNvPr>
-                <p:cNvSpPr txBox="1"/>
-                <p:nvPr/>
-              </p:nvSpPr>
-              <p:spPr>
-                <a:xfrm>
-                  <a:off x="3496821" y="2493736"/>
-                  <a:ext cx="1454289" cy="466362"/>
-                </a:xfrm>
-                <a:prstGeom prst="rect">
-                  <a:avLst/>
-                </a:prstGeom>
-                <a:noFill/>
-                <a:ln>
-                  <a:noFill/>
-                </a:ln>
-              </p:spPr>
-              <p:txBody>
-                <a:bodyPr wrap="none" rtlCol="0">
-                  <a:spAutoFit/>
-                </a:bodyPr>
-                <a:lstStyle/>
-                <a:p>
-                  <a:pPr algn="ctr"/>
-                  <a:r>
-                    <a:rPr lang="zh-CN" altLang="en-US" sz="1258" dirty="0">
-                      <a:latin typeface="宋体" panose="02010600030101010101" pitchFamily="2" charset="-122"/>
-                      <a:ea typeface="宋体" panose="02010600030101010101" pitchFamily="2" charset="-122"/>
-                    </a:rPr>
-                    <a:t>聚类中心</a:t>
-                  </a:r>
-                  <a:endParaRPr lang="en-US" altLang="zh-CN" sz="1258" dirty="0">
+            </p:spPr>
+            <p:txBody>
+              <a:bodyPr wrap="none" rtlCol="0">
+                <a:spAutoFit/>
+              </a:bodyPr>
+              <a:lstStyle/>
+              <a:p>
+                <a:r>
+                  <a:rPr lang="zh-CN" altLang="en-US" sz="1258" dirty="0">
                     <a:latin typeface="宋体" panose="02010600030101010101" pitchFamily="2" charset="-122"/>
                     <a:ea typeface="宋体" panose="02010600030101010101" pitchFamily="2" charset="-122"/>
-                  </a:endParaRPr>
-                </a:p>
-                <a:p>
-                  <a:pPr algn="ctr"/>
-                  <a14:m>
-                    <m:oMathPara xmlns:m="http://schemas.openxmlformats.org/officeDocument/2006/math">
-                      <m:oMathParaPr>
-                        <m:jc m:val="centerGroup"/>
-                      </m:oMathParaPr>
-                      <m:oMath xmlns:m="http://schemas.openxmlformats.org/officeDocument/2006/math">
-                        <m:r>
-                          <a:rPr lang="zh-CN" altLang="en-US" sz="1258" i="1">
+                  </a:rPr>
+                  <a:t>软分配权重</a:t>
+                </a:r>
+                <a14:m>
+                  <m:oMath xmlns:m="http://schemas.openxmlformats.org/officeDocument/2006/math">
+                    <m:sSub>
+                      <m:sSubPr>
+                        <m:ctrlPr>
+                          <a:rPr lang="en-US" altLang="zh-CN" sz="1258" i="1">
                             <a:latin typeface="Cambria Math" panose="02040503050406030204" pitchFamily="18" charset="0"/>
                             <a:ea typeface="宋体" panose="02010600030101010101" pitchFamily="2" charset="-122"/>
                           </a:rPr>
-                          <m:t>𝜀</m:t>
-                        </m:r>
+                        </m:ctrlPr>
+                      </m:sSubPr>
+                      <m:e>
                         <m:r>
                           <a:rPr lang="en-US" altLang="zh-CN" sz="1258" i="1">
                             <a:latin typeface="Cambria Math" panose="02040503050406030204" pitchFamily="18" charset="0"/>
                             <a:ea typeface="宋体" panose="02010600030101010101" pitchFamily="2" charset="-122"/>
                           </a:rPr>
-                          <m:t>={</m:t>
+                          <m:t>𝛼</m:t>
                         </m:r>
-                        <m:sSub>
-                          <m:sSubPr>
-                            <m:ctrlPr>
-                              <a:rPr lang="en-US" altLang="zh-CN" sz="1258" i="1">
-                                <a:latin typeface="Cambria Math" panose="02040503050406030204" pitchFamily="18" charset="0"/>
-                                <a:ea typeface="宋体" panose="02010600030101010101" pitchFamily="2" charset="-122"/>
-                              </a:rPr>
-                            </m:ctrlPr>
-                          </m:sSubPr>
-                          <m:e>
-                            <m:r>
-                              <a:rPr lang="en-US" altLang="zh-CN" sz="1258" i="1">
-                                <a:latin typeface="Cambria Math" panose="02040503050406030204" pitchFamily="18" charset="0"/>
-                                <a:ea typeface="宋体" panose="02010600030101010101" pitchFamily="2" charset="-122"/>
-                              </a:rPr>
-                              <m:t>𝑒</m:t>
-                            </m:r>
-                          </m:e>
-                          <m:sub>
-                            <m:r>
-                              <a:rPr lang="en-US" altLang="zh-CN" sz="1258" i="1">
-                                <a:latin typeface="Cambria Math" panose="02040503050406030204" pitchFamily="18" charset="0"/>
-                                <a:ea typeface="宋体" panose="02010600030101010101" pitchFamily="2" charset="-122"/>
-                              </a:rPr>
-                              <m:t>1</m:t>
-                            </m:r>
-                          </m:sub>
-                        </m:sSub>
+                      </m:e>
+                      <m:sub>
+                        <m:r>
+                          <a:rPr lang="en-US" altLang="zh-CN" sz="1258" i="1">
+                            <a:latin typeface="Cambria Math" panose="02040503050406030204" pitchFamily="18" charset="0"/>
+                            <a:ea typeface="宋体" panose="02010600030101010101" pitchFamily="2" charset="-122"/>
+                          </a:rPr>
+                          <m:t>𝑖</m:t>
+                        </m:r>
                         <m:r>
                           <a:rPr lang="en-US" altLang="zh-CN" sz="1258" i="1">
                             <a:latin typeface="Cambria Math" panose="02040503050406030204" pitchFamily="18" charset="0"/>
@@ -4088,248 +3743,106 @@
                           </a:rPr>
                           <m:t>,</m:t>
                         </m:r>
-                        <m:sSub>
-                          <m:sSubPr>
-                            <m:ctrlPr>
-                              <a:rPr lang="en-US" altLang="zh-CN" sz="1258" i="1">
-                                <a:latin typeface="Cambria Math" panose="02040503050406030204" pitchFamily="18" charset="0"/>
-                                <a:ea typeface="宋体" panose="02010600030101010101" pitchFamily="2" charset="-122"/>
-                              </a:rPr>
-                            </m:ctrlPr>
-                          </m:sSubPr>
-                          <m:e>
-                            <m:r>
-                              <a:rPr lang="en-US" altLang="zh-CN" sz="1258" i="1">
-                                <a:latin typeface="Cambria Math" panose="02040503050406030204" pitchFamily="18" charset="0"/>
-                                <a:ea typeface="宋体" panose="02010600030101010101" pitchFamily="2" charset="-122"/>
-                              </a:rPr>
-                              <m:t>𝑒</m:t>
-                            </m:r>
-                          </m:e>
-                          <m:sub>
-                            <m:r>
-                              <a:rPr lang="en-US" altLang="zh-CN" sz="1258" i="1">
-                                <a:latin typeface="Cambria Math" panose="02040503050406030204" pitchFamily="18" charset="0"/>
-                                <a:ea typeface="宋体" panose="02010600030101010101" pitchFamily="2" charset="-122"/>
-                              </a:rPr>
-                              <m:t>2</m:t>
-                            </m:r>
-                          </m:sub>
-                        </m:sSub>
                         <m:r>
                           <a:rPr lang="en-US" altLang="zh-CN" sz="1258" i="1">
                             <a:latin typeface="Cambria Math" panose="02040503050406030204" pitchFamily="18" charset="0"/>
                             <a:ea typeface="宋体" panose="02010600030101010101" pitchFamily="2" charset="-122"/>
                           </a:rPr>
-                          <m:t>,…,</m:t>
+                          <m:t>𝑚</m:t>
                         </m:r>
-                        <m:sSub>
-                          <m:sSubPr>
-                            <m:ctrlPr>
-                              <a:rPr lang="en-US" altLang="zh-CN" sz="1258" i="1">
-                                <a:latin typeface="Cambria Math" panose="02040503050406030204" pitchFamily="18" charset="0"/>
-                                <a:ea typeface="宋体" panose="02010600030101010101" pitchFamily="2" charset="-122"/>
-                              </a:rPr>
-                            </m:ctrlPr>
-                          </m:sSubPr>
-                          <m:e>
-                            <m:r>
-                              <a:rPr lang="en-US" altLang="zh-CN" sz="1258" i="1">
-                                <a:latin typeface="Cambria Math" panose="02040503050406030204" pitchFamily="18" charset="0"/>
-                                <a:ea typeface="宋体" panose="02010600030101010101" pitchFamily="2" charset="-122"/>
-                              </a:rPr>
-                              <m:t>𝑒</m:t>
-                            </m:r>
-                          </m:e>
-                          <m:sub>
-                            <m:r>
-                              <a:rPr lang="en-US" altLang="zh-CN" sz="1258" i="1">
-                                <a:latin typeface="Cambria Math" panose="02040503050406030204" pitchFamily="18" charset="0"/>
-                                <a:ea typeface="宋体" panose="02010600030101010101" pitchFamily="2" charset="-122"/>
-                              </a:rPr>
-                              <m:t>𝑚</m:t>
-                            </m:r>
-                          </m:sub>
-                        </m:sSub>
-                        <m:r>
-                          <a:rPr lang="en-US" altLang="zh-CN" sz="1258" i="1">
-                            <a:latin typeface="Cambria Math" panose="02040503050406030204" pitchFamily="18" charset="0"/>
-                            <a:ea typeface="宋体" panose="02010600030101010101" pitchFamily="2" charset="-122"/>
-                          </a:rPr>
-                          <m:t>}</m:t>
-                        </m:r>
-                      </m:oMath>
-                    </m:oMathPara>
-                  </a14:m>
-                  <a:endParaRPr lang="zh-CN" altLang="en-US" sz="1258" dirty="0">
-                    <a:latin typeface="宋体" panose="02010600030101010101" pitchFamily="2" charset="-122"/>
-                    <a:ea typeface="宋体" panose="02010600030101010101" pitchFamily="2" charset="-122"/>
-                  </a:endParaRPr>
-                </a:p>
-              </p:txBody>
-            </p:sp>
-          </mc:Choice>
-          <mc:Fallback xmlns="">
-            <p:sp>
-              <p:nvSpPr>
-                <p:cNvPr id="114" name="文本框 113">
-                  <a:extLst>
-                    <a:ext uri="{FF2B5EF4-FFF2-40B4-BE49-F238E27FC236}">
-                      <a16:creationId xmlns:a16="http://schemas.microsoft.com/office/drawing/2014/main" id="{14D51799-6207-4003-B348-02637270E6C7}"/>
-                    </a:ext>
-                  </a:extLst>
-                </p:cNvPr>
-                <p:cNvSpPr txBox="1">
-                  <a:spLocks noRot="1" noChangeAspect="1" noMove="1" noResize="1" noEditPoints="1" noAdjustHandles="1" noChangeArrowheads="1" noChangeShapeType="1" noTextEdit="1"/>
-                </p:cNvSpPr>
-                <p:nvPr/>
-              </p:nvSpPr>
-              <p:spPr>
-                <a:xfrm>
-                  <a:off x="3496821" y="2493736"/>
-                  <a:ext cx="1454289" cy="466362"/>
-                </a:xfrm>
-                <a:prstGeom prst="rect">
-                  <a:avLst/>
-                </a:prstGeom>
-                <a:blipFill>
-                  <a:blip r:embed="rId32"/>
-                  <a:stretch>
-                    <a:fillRect b="-3750"/>
-                  </a:stretch>
-                </a:blipFill>
-                <a:ln>
-                  <a:noFill/>
-                </a:ln>
-              </p:spPr>
-              <p:txBody>
-                <a:bodyPr/>
-                <a:lstStyle/>
-                <a:p>
-                  <a:r>
-                    <a:rPr lang="zh-CN" altLang="en-US">
-                      <a:noFill/>
-                    </a:rPr>
-                    <a:t> </a:t>
-                  </a:r>
-                </a:p>
-              </p:txBody>
-            </p:sp>
-          </mc:Fallback>
-        </mc:AlternateContent>
-      </p:grpSp>
-      <p:grpSp>
-        <p:nvGrpSpPr>
-          <p:cNvPr id="161" name="组合 160">
-            <a:extLst>
-              <a:ext uri="{FF2B5EF4-FFF2-40B4-BE49-F238E27FC236}">
-                <a16:creationId xmlns:a16="http://schemas.microsoft.com/office/drawing/2014/main" id="{84331025-574C-4C25-95C2-B89B2EFD6818}"/>
-              </a:ext>
-            </a:extLst>
-          </p:cNvPr>
-          <p:cNvGrpSpPr/>
-          <p:nvPr/>
-        </p:nvGrpSpPr>
-        <p:grpSpPr>
-          <a:xfrm>
-            <a:off x="4632323" y="3437265"/>
-            <a:ext cx="1918176" cy="889553"/>
-            <a:chOff x="5272198" y="2320119"/>
-            <a:chExt cx="1829924" cy="848627"/>
-          </a:xfrm>
-        </p:grpSpPr>
-        <p:sp>
-          <p:nvSpPr>
-            <p:cNvPr id="157" name="圆角矩形 4">
-              <a:extLst>
-                <a:ext uri="{FF2B5EF4-FFF2-40B4-BE49-F238E27FC236}">
-                  <a16:creationId xmlns:a16="http://schemas.microsoft.com/office/drawing/2014/main" id="{5814E12C-8415-48A7-8ABA-2522AE9CEC2A}"/>
-                </a:ext>
-              </a:extLst>
-            </p:cNvPr>
-            <p:cNvSpPr/>
-            <p:nvPr/>
-          </p:nvSpPr>
-          <p:spPr>
-            <a:xfrm>
-              <a:off x="5336943" y="2320119"/>
-              <a:ext cx="1671181" cy="848627"/>
-            </a:xfrm>
-            <a:prstGeom prst="roundRect">
-              <a:avLst>
-                <a:gd name="adj" fmla="val 24586"/>
-              </a:avLst>
-            </a:prstGeom>
-            <a:solidFill>
-              <a:srgbClr val="B9C88D"/>
-            </a:solidFill>
-            <a:ln>
+                      </m:sub>
+                    </m:sSub>
+                  </m:oMath>
+                </a14:m>
+                <a:endParaRPr lang="en-US" altLang="zh-CN" sz="1258" dirty="0">
+                  <a:latin typeface="宋体" panose="02010600030101010101" pitchFamily="2" charset="-122"/>
+                  <a:ea typeface="宋体" panose="02010600030101010101" pitchFamily="2" charset="-122"/>
+                </a:endParaRPr>
+              </a:p>
+            </p:txBody>
+          </p:sp>
+        </mc:Choice>
+        <mc:Fallback xmlns="">
+          <p:sp>
+            <p:nvSpPr>
+              <p:cNvPr id="158" name="文本框 157">
+                <a:extLst>
+                  <a:ext uri="{FF2B5EF4-FFF2-40B4-BE49-F238E27FC236}">
+                    <a16:creationId xmlns:a16="http://schemas.microsoft.com/office/drawing/2014/main" id="{80E7983B-4DFE-46A1-9E50-1E63EB1A871A}"/>
+                  </a:ext>
+                </a:extLst>
+              </p:cNvPr>
+              <p:cNvSpPr txBox="1">
+                <a:spLocks noRot="1" noChangeAspect="1" noMove="1" noResize="1" noEditPoints="1" noAdjustHandles="1" noChangeArrowheads="1" noChangeShapeType="1" noTextEdit="1"/>
+              </p:cNvSpPr>
+              <p:nvPr/>
+            </p:nvSpPr>
+            <p:spPr>
+              <a:xfrm>
+                <a:off x="4971169" y="3630402"/>
+                <a:ext cx="1302256" cy="301165"/>
+              </a:xfrm>
+              <a:prstGeom prst="rect">
+                <a:avLst/>
+              </a:prstGeom>
+              <a:blipFill>
+                <a:blip r:embed="rId2"/>
+                <a:stretch>
+                  <a:fillRect l="-467" t="-4082" b="-8163"/>
+                </a:stretch>
+              </a:blipFill>
+            </p:spPr>
+            <p:txBody>
+              <a:bodyPr/>
+              <a:lstStyle/>
+              <a:p>
+                <a:r>
+                  <a:rPr lang="zh-CN" altLang="en-US">
+                    <a:noFill/>
+                  </a:rPr>
+                  <a:t> </a:t>
+                </a:r>
+              </a:p>
+            </p:txBody>
+          </p:sp>
+        </mc:Fallback>
+      </mc:AlternateContent>
+      <mc:AlternateContent xmlns:mc="http://schemas.openxmlformats.org/markup-compatibility/2006" xmlns:a14="http://schemas.microsoft.com/office/drawing/2010/main">
+        <mc:Choice Requires="a14">
+          <p:sp>
+            <p:nvSpPr>
+              <p:cNvPr id="159" name="文本框 158">
+                <a:extLst>
+                  <a:ext uri="{FF2B5EF4-FFF2-40B4-BE49-F238E27FC236}">
+                    <a16:creationId xmlns:a16="http://schemas.microsoft.com/office/drawing/2014/main" id="{D7C977CD-12D7-4AF0-8B4D-8BF354B3C052}"/>
+                  </a:ext>
+                </a:extLst>
+              </p:cNvPr>
+              <p:cNvSpPr txBox="1"/>
+              <p:nvPr/>
+            </p:nvSpPr>
+            <p:spPr>
+              <a:xfrm>
+                <a:off x="4566673" y="3924397"/>
+                <a:ext cx="1918176" cy="524055"/>
+              </a:xfrm>
+              <a:prstGeom prst="rect">
+                <a:avLst/>
+              </a:prstGeom>
               <a:noFill/>
-            </a:ln>
-          </p:spPr>
-          <p:style>
-            <a:lnRef idx="2">
-              <a:schemeClr val="accent1">
-                <a:lumMod val="75000"/>
-              </a:schemeClr>
-            </a:lnRef>
-            <a:fillRef idx="1">
-              <a:schemeClr val="accent1"/>
-            </a:fillRef>
-            <a:effectRef idx="0">
-              <a:srgbClr val="FFFFFF"/>
-            </a:effectRef>
-            <a:fontRef idx="minor">
-              <a:schemeClr val="lt1"/>
-            </a:fontRef>
-          </p:style>
-          <p:txBody>
-            <a:bodyPr rtlCol="0" anchor="ctr"/>
-            <a:lstStyle/>
-            <a:p>
-              <a:pPr algn="ctr"/>
-              <a:endParaRPr lang="zh-CN" altLang="en-US" sz="1894" b="1"/>
-            </a:p>
-          </p:txBody>
-        </p:sp>
-        <mc:AlternateContent xmlns:mc="http://schemas.openxmlformats.org/markup-compatibility/2006" xmlns:a14="http://schemas.microsoft.com/office/drawing/2010/main">
-          <mc:Choice Requires="a14">
-            <p:sp>
-              <p:nvSpPr>
-                <p:cNvPr id="158" name="文本框 157">
-                  <a:extLst>
-                    <a:ext uri="{FF2B5EF4-FFF2-40B4-BE49-F238E27FC236}">
-                      <a16:creationId xmlns:a16="http://schemas.microsoft.com/office/drawing/2014/main" id="{80E7983B-4DFE-46A1-9E50-1E63EB1A871A}"/>
-                    </a:ext>
-                  </a:extLst>
-                </p:cNvPr>
-                <p:cNvSpPr txBox="1"/>
-                <p:nvPr/>
-              </p:nvSpPr>
-              <p:spPr>
-                <a:xfrm>
-                  <a:off x="5658084" y="2351133"/>
-                  <a:ext cx="1242341" cy="287309"/>
-                </a:xfrm>
-                <a:prstGeom prst="rect">
-                  <a:avLst/>
-                </a:prstGeom>
-                <a:noFill/>
-              </p:spPr>
-              <p:txBody>
-                <a:bodyPr wrap="none" rtlCol="0">
-                  <a:spAutoFit/>
-                </a:bodyPr>
-                <a:lstStyle/>
-                <a:p>
-                  <a:r>
-                    <a:rPr lang="zh-CN" altLang="en-US" sz="1258" dirty="0">
-                      <a:latin typeface="宋体" panose="02010600030101010101" pitchFamily="2" charset="-122"/>
-                      <a:ea typeface="宋体" panose="02010600030101010101" pitchFamily="2" charset="-122"/>
-                    </a:rPr>
-                    <a:t>软分配权重</a:t>
-                  </a:r>
-                  <a14:m>
+            </p:spPr>
+            <p:txBody>
+              <a:bodyPr wrap="none" rtlCol="0">
+                <a:spAutoFit/>
+              </a:bodyPr>
+              <a:lstStyle/>
+              <a:p>
+                <a:pPr/>
+                <a14:m>
+                  <m:oMathPara xmlns:m="http://schemas.openxmlformats.org/officeDocument/2006/math">
+                    <m:oMathParaPr>
+                      <m:jc m:val="centerGroup"/>
+                    </m:oMathParaPr>
                     <m:oMath xmlns:m="http://schemas.openxmlformats.org/officeDocument/2006/math">
                       <m:sSub>
                         <m:sSubPr>
@@ -4373,834 +3886,678 @@
                           </m:r>
                         </m:sub>
                       </m:sSub>
+                      <m:r>
+                        <a:rPr lang="en-US" altLang="zh-CN" sz="1258" i="1">
+                          <a:latin typeface="Cambria Math" panose="02040503050406030204" pitchFamily="18" charset="0"/>
+                          <a:ea typeface="宋体" panose="02010600030101010101" pitchFamily="2" charset="-122"/>
+                        </a:rPr>
+                        <m:t>=</m:t>
+                      </m:r>
+                      <m:f>
+                        <m:fPr>
+                          <m:ctrlPr>
+                            <a:rPr lang="en-US" altLang="zh-CN" sz="1258" i="1">
+                              <a:latin typeface="Cambria Math" panose="02040503050406030204" pitchFamily="18" charset="0"/>
+                              <a:ea typeface="宋体" panose="02010600030101010101" pitchFamily="2" charset="-122"/>
+                            </a:rPr>
+                          </m:ctrlPr>
+                        </m:fPr>
+                        <m:num>
+                          <m:r>
+                            <a:rPr lang="en-US" altLang="zh-CN" sz="1258" i="1">
+                              <a:latin typeface="Cambria Math" panose="02040503050406030204" pitchFamily="18" charset="0"/>
+                              <a:ea typeface="宋体" panose="02010600030101010101" pitchFamily="2" charset="-122"/>
+                            </a:rPr>
+                            <m:t>𝑒𝑥𝑝</m:t>
+                          </m:r>
+                          <m:r>
+                            <a:rPr lang="en-US" altLang="zh-CN" sz="1258" i="1">
+                              <a:latin typeface="Cambria Math" panose="02040503050406030204" pitchFamily="18" charset="0"/>
+                              <a:ea typeface="宋体" panose="02010600030101010101" pitchFamily="2" charset="-122"/>
+                            </a:rPr>
+                            <m:t>(−</m:t>
+                          </m:r>
+                          <m:sSub>
+                            <m:sSubPr>
+                              <m:ctrlPr>
+                                <a:rPr lang="en-US" altLang="zh-CN" sz="1258" i="1">
+                                  <a:latin typeface="Cambria Math" panose="02040503050406030204" pitchFamily="18" charset="0"/>
+                                  <a:ea typeface="宋体" panose="02010600030101010101" pitchFamily="2" charset="-122"/>
+                                </a:rPr>
+                              </m:ctrlPr>
+                            </m:sSubPr>
+                            <m:e>
+                              <m:r>
+                                <a:rPr lang="en-US" altLang="zh-CN" sz="1258" i="1">
+                                  <a:latin typeface="Cambria Math" panose="02040503050406030204" pitchFamily="18" charset="0"/>
+                                  <a:ea typeface="宋体" panose="02010600030101010101" pitchFamily="2" charset="-122"/>
+                                </a:rPr>
+                                <m:t>𝑑</m:t>
+                              </m:r>
+                            </m:e>
+                            <m:sub>
+                              <m:r>
+                                <a:rPr lang="en-US" altLang="zh-CN" sz="1258" i="1">
+                                  <a:latin typeface="Cambria Math" panose="02040503050406030204" pitchFamily="18" charset="0"/>
+                                  <a:ea typeface="宋体" panose="02010600030101010101" pitchFamily="2" charset="-122"/>
+                                </a:rPr>
+                                <m:t>𝑖</m:t>
+                              </m:r>
+                              <m:r>
+                                <a:rPr lang="en-US" altLang="zh-CN" sz="1258" i="1">
+                                  <a:latin typeface="Cambria Math" panose="02040503050406030204" pitchFamily="18" charset="0"/>
+                                  <a:ea typeface="宋体" panose="02010600030101010101" pitchFamily="2" charset="-122"/>
+                                </a:rPr>
+                                <m:t>,</m:t>
+                              </m:r>
+                              <m:r>
+                                <a:rPr lang="en-US" altLang="zh-CN" sz="1258" i="1">
+                                  <a:latin typeface="Cambria Math" panose="02040503050406030204" pitchFamily="18" charset="0"/>
+                                  <a:ea typeface="宋体" panose="02010600030101010101" pitchFamily="2" charset="-122"/>
+                                </a:rPr>
+                                <m:t>𝑚</m:t>
+                              </m:r>
+                            </m:sub>
+                          </m:sSub>
+                          <m:r>
+                            <a:rPr lang="en-US" altLang="zh-CN" sz="1258" i="1">
+                              <a:latin typeface="Cambria Math" panose="02040503050406030204" pitchFamily="18" charset="0"/>
+                              <a:ea typeface="宋体" panose="02010600030101010101" pitchFamily="2" charset="-122"/>
+                            </a:rPr>
+                            <m:t>)</m:t>
+                          </m:r>
+                        </m:num>
+                        <m:den>
+                          <m:nary>
+                            <m:naryPr>
+                              <m:chr m:val="∑"/>
+                              <m:limLoc m:val="subSup"/>
+                              <m:ctrlPr>
+                                <a:rPr lang="en-US" altLang="zh-CN" sz="1258" i="1">
+                                  <a:latin typeface="Cambria Math" panose="02040503050406030204" pitchFamily="18" charset="0"/>
+                                  <a:ea typeface="宋体" panose="02010600030101010101" pitchFamily="2" charset="-122"/>
+                                </a:rPr>
+                              </m:ctrlPr>
+                            </m:naryPr>
+                            <m:sub>
+                              <m:r>
+                                <m:rPr>
+                                  <m:brk m:alnAt="25"/>
+                                </m:rPr>
+                                <a:rPr lang="en-US" altLang="zh-CN" sz="1258" i="1">
+                                  <a:latin typeface="Cambria Math" panose="02040503050406030204" pitchFamily="18" charset="0"/>
+                                  <a:ea typeface="宋体" panose="02010600030101010101" pitchFamily="2" charset="-122"/>
+                                </a:rPr>
+                                <m:t>𝑘</m:t>
+                              </m:r>
+                              <m:r>
+                                <a:rPr lang="en-US" altLang="zh-CN" sz="1258" i="1">
+                                  <a:latin typeface="Cambria Math" panose="02040503050406030204" pitchFamily="18" charset="0"/>
+                                  <a:ea typeface="宋体" panose="02010600030101010101" pitchFamily="2" charset="-122"/>
+                                </a:rPr>
+                                <m:t>=1</m:t>
+                              </m:r>
+                            </m:sub>
+                            <m:sup>
+                              <m:r>
+                                <a:rPr lang="en-US" altLang="zh-CN" sz="1258" i="1">
+                                  <a:latin typeface="Cambria Math" panose="02040503050406030204" pitchFamily="18" charset="0"/>
+                                  <a:ea typeface="宋体" panose="02010600030101010101" pitchFamily="2" charset="-122"/>
+                                </a:rPr>
+                                <m:t>𝑀</m:t>
+                              </m:r>
+                            </m:sup>
+                            <m:e>
+                              <m:r>
+                                <a:rPr lang="en-US" altLang="zh-CN" sz="1258" i="1">
+                                  <a:latin typeface="Cambria Math" panose="02040503050406030204" pitchFamily="18" charset="0"/>
+                                  <a:ea typeface="宋体" panose="02010600030101010101" pitchFamily="2" charset="-122"/>
+                                </a:rPr>
+                                <m:t>𝑒𝑥𝑝</m:t>
+                              </m:r>
+                              <m:r>
+                                <a:rPr lang="en-US" altLang="zh-CN" sz="1258" i="1">
+                                  <a:latin typeface="Cambria Math" panose="02040503050406030204" pitchFamily="18" charset="0"/>
+                                  <a:ea typeface="宋体" panose="02010600030101010101" pitchFamily="2" charset="-122"/>
+                                </a:rPr>
+                                <m:t>(−</m:t>
+                              </m:r>
+                              <m:sSub>
+                                <m:sSubPr>
+                                  <m:ctrlPr>
+                                    <a:rPr lang="en-US" altLang="zh-CN" sz="1258" i="1">
+                                      <a:latin typeface="Cambria Math" panose="02040503050406030204" pitchFamily="18" charset="0"/>
+                                      <a:ea typeface="宋体" panose="02010600030101010101" pitchFamily="2" charset="-122"/>
+                                    </a:rPr>
+                                  </m:ctrlPr>
+                                </m:sSubPr>
+                                <m:e>
+                                  <m:r>
+                                    <a:rPr lang="en-US" altLang="zh-CN" sz="1258" i="1">
+                                      <a:latin typeface="Cambria Math" panose="02040503050406030204" pitchFamily="18" charset="0"/>
+                                      <a:ea typeface="宋体" panose="02010600030101010101" pitchFamily="2" charset="-122"/>
+                                    </a:rPr>
+                                    <m:t>𝑑</m:t>
+                                  </m:r>
+                                </m:e>
+                                <m:sub>
+                                  <m:r>
+                                    <a:rPr lang="en-US" altLang="zh-CN" sz="1258" i="1">
+                                      <a:latin typeface="Cambria Math" panose="02040503050406030204" pitchFamily="18" charset="0"/>
+                                      <a:ea typeface="宋体" panose="02010600030101010101" pitchFamily="2" charset="-122"/>
+                                    </a:rPr>
+                                    <m:t>𝑖</m:t>
+                                  </m:r>
+                                  <m:r>
+                                    <a:rPr lang="en-US" altLang="zh-CN" sz="1258" i="1">
+                                      <a:latin typeface="Cambria Math" panose="02040503050406030204" pitchFamily="18" charset="0"/>
+                                      <a:ea typeface="宋体" panose="02010600030101010101" pitchFamily="2" charset="-122"/>
+                                    </a:rPr>
+                                    <m:t>,</m:t>
+                                  </m:r>
+                                  <m:r>
+                                    <a:rPr lang="en-US" altLang="zh-CN" sz="1258" i="1">
+                                      <a:latin typeface="Cambria Math" panose="02040503050406030204" pitchFamily="18" charset="0"/>
+                                      <a:ea typeface="宋体" panose="02010600030101010101" pitchFamily="2" charset="-122"/>
+                                    </a:rPr>
+                                    <m:t>𝑘</m:t>
+                                  </m:r>
+                                </m:sub>
+                              </m:sSub>
+                              <m:r>
+                                <a:rPr lang="en-US" altLang="zh-CN" sz="1258" i="1">
+                                  <a:latin typeface="Cambria Math" panose="02040503050406030204" pitchFamily="18" charset="0"/>
+                                  <a:ea typeface="宋体" panose="02010600030101010101" pitchFamily="2" charset="-122"/>
+                                </a:rPr>
+                                <m:t>)</m:t>
+                              </m:r>
+                            </m:e>
+                          </m:nary>
+                        </m:den>
+                      </m:f>
                     </m:oMath>
-                  </a14:m>
-                  <a:endParaRPr lang="en-US" altLang="zh-CN" sz="1258" dirty="0">
-                    <a:latin typeface="宋体" panose="02010600030101010101" pitchFamily="2" charset="-122"/>
-                    <a:ea typeface="宋体" panose="02010600030101010101" pitchFamily="2" charset="-122"/>
-                  </a:endParaRPr>
-                </a:p>
-              </p:txBody>
-            </p:sp>
-          </mc:Choice>
-          <mc:Fallback xmlns="">
-            <p:sp>
-              <p:nvSpPr>
-                <p:cNvPr id="158" name="文本框 157">
-                  <a:extLst>
-                    <a:ext uri="{FF2B5EF4-FFF2-40B4-BE49-F238E27FC236}">
-                      <a16:creationId xmlns:a16="http://schemas.microsoft.com/office/drawing/2014/main" id="{80E7983B-4DFE-46A1-9E50-1E63EB1A871A}"/>
-                    </a:ext>
-                  </a:extLst>
-                </p:cNvPr>
-                <p:cNvSpPr txBox="1">
-                  <a:spLocks noRot="1" noChangeAspect="1" noMove="1" noResize="1" noEditPoints="1" noAdjustHandles="1" noChangeArrowheads="1" noChangeShapeType="1" noTextEdit="1"/>
-                </p:cNvSpPr>
-                <p:nvPr/>
-              </p:nvSpPr>
-              <p:spPr>
-                <a:xfrm>
-                  <a:off x="5658084" y="2351133"/>
-                  <a:ext cx="1242341" cy="287309"/>
-                </a:xfrm>
-                <a:prstGeom prst="rect">
-                  <a:avLst/>
-                </a:prstGeom>
-                <a:blipFill>
-                  <a:blip r:embed="rId33"/>
-                  <a:stretch>
-                    <a:fillRect l="-467" t="-4000" b="-8000"/>
-                  </a:stretch>
-                </a:blipFill>
-              </p:spPr>
-              <p:txBody>
-                <a:bodyPr/>
-                <a:lstStyle/>
-                <a:p>
-                  <a:r>
-                    <a:rPr lang="zh-CN" altLang="en-US">
-                      <a:noFill/>
-                    </a:rPr>
-                    <a:t> </a:t>
-                  </a:r>
-                </a:p>
-              </p:txBody>
-            </p:sp>
-          </mc:Fallback>
-        </mc:AlternateContent>
-        <mc:AlternateContent xmlns:mc="http://schemas.openxmlformats.org/markup-compatibility/2006" xmlns:a14="http://schemas.microsoft.com/office/drawing/2010/main">
-          <mc:Choice Requires="a14">
-            <p:sp>
-              <p:nvSpPr>
-                <p:cNvPr id="159" name="文本框 158">
-                  <a:extLst>
-                    <a:ext uri="{FF2B5EF4-FFF2-40B4-BE49-F238E27FC236}">
-                      <a16:creationId xmlns:a16="http://schemas.microsoft.com/office/drawing/2014/main" id="{D7C977CD-12D7-4AF0-8B4D-8BF354B3C052}"/>
-                    </a:ext>
-                  </a:extLst>
-                </p:cNvPr>
-                <p:cNvSpPr txBox="1"/>
-                <p:nvPr/>
-              </p:nvSpPr>
-              <p:spPr>
-                <a:xfrm>
-                  <a:off x="5272198" y="2631602"/>
-                  <a:ext cx="1829924" cy="499945"/>
-                </a:xfrm>
-                <a:prstGeom prst="rect">
-                  <a:avLst/>
-                </a:prstGeom>
-                <a:noFill/>
-              </p:spPr>
-              <p:txBody>
-                <a:bodyPr wrap="none" rtlCol="0">
-                  <a:spAutoFit/>
-                </a:bodyPr>
-                <a:lstStyle/>
-                <a:p>
-                  <a:pPr/>
-                  <a14:m>
-                    <m:oMathPara xmlns:m="http://schemas.openxmlformats.org/officeDocument/2006/math">
-                      <m:oMathParaPr>
-                        <m:jc m:val="centerGroup"/>
-                      </m:oMathParaPr>
-                      <m:oMath xmlns:m="http://schemas.openxmlformats.org/officeDocument/2006/math">
-                        <m:sSub>
-                          <m:sSubPr>
-                            <m:ctrlPr>
-                              <a:rPr lang="en-US" altLang="zh-CN" sz="1258" i="1">
-                                <a:latin typeface="Cambria Math" panose="02040503050406030204" pitchFamily="18" charset="0"/>
-                                <a:ea typeface="宋体" panose="02010600030101010101" pitchFamily="2" charset="-122"/>
-                              </a:rPr>
-                            </m:ctrlPr>
-                          </m:sSubPr>
-                          <m:e>
-                            <m:r>
-                              <a:rPr lang="en-US" altLang="zh-CN" sz="1258" i="1">
-                                <a:latin typeface="Cambria Math" panose="02040503050406030204" pitchFamily="18" charset="0"/>
-                                <a:ea typeface="宋体" panose="02010600030101010101" pitchFamily="2" charset="-122"/>
-                              </a:rPr>
-                              <m:t>𝛼</m:t>
-                            </m:r>
-                          </m:e>
-                          <m:sub>
-                            <m:r>
-                              <a:rPr lang="en-US" altLang="zh-CN" sz="1258" i="1">
-                                <a:latin typeface="Cambria Math" panose="02040503050406030204" pitchFamily="18" charset="0"/>
-                                <a:ea typeface="宋体" panose="02010600030101010101" pitchFamily="2" charset="-122"/>
-                              </a:rPr>
-                              <m:t>𝑖</m:t>
-                            </m:r>
-                            <m:r>
-                              <a:rPr lang="en-US" altLang="zh-CN" sz="1258" i="1">
-                                <a:latin typeface="Cambria Math" panose="02040503050406030204" pitchFamily="18" charset="0"/>
-                                <a:ea typeface="宋体" panose="02010600030101010101" pitchFamily="2" charset="-122"/>
-                              </a:rPr>
-                              <m:t>,</m:t>
-                            </m:r>
-                            <m:r>
-                              <a:rPr lang="en-US" altLang="zh-CN" sz="1258" i="1">
-                                <a:latin typeface="Cambria Math" panose="02040503050406030204" pitchFamily="18" charset="0"/>
-                                <a:ea typeface="宋体" panose="02010600030101010101" pitchFamily="2" charset="-122"/>
-                              </a:rPr>
-                              <m:t>𝑚</m:t>
-                            </m:r>
-                          </m:sub>
-                        </m:sSub>
-                        <m:r>
-                          <a:rPr lang="en-US" altLang="zh-CN" sz="1258" i="1">
-                            <a:latin typeface="Cambria Math" panose="02040503050406030204" pitchFamily="18" charset="0"/>
-                            <a:ea typeface="宋体" panose="02010600030101010101" pitchFamily="2" charset="-122"/>
-                          </a:rPr>
-                          <m:t>=</m:t>
-                        </m:r>
-                        <m:f>
-                          <m:fPr>
-                            <m:ctrlPr>
-                              <a:rPr lang="en-US" altLang="zh-CN" sz="1258" i="1">
-                                <a:latin typeface="Cambria Math" panose="02040503050406030204" pitchFamily="18" charset="0"/>
-                                <a:ea typeface="宋体" panose="02010600030101010101" pitchFamily="2" charset="-122"/>
-                              </a:rPr>
-                            </m:ctrlPr>
-                          </m:fPr>
-                          <m:num>
-                            <m:r>
-                              <a:rPr lang="en-US" altLang="zh-CN" sz="1258" i="1">
-                                <a:latin typeface="Cambria Math" panose="02040503050406030204" pitchFamily="18" charset="0"/>
-                                <a:ea typeface="宋体" panose="02010600030101010101" pitchFamily="2" charset="-122"/>
-                              </a:rPr>
-                              <m:t>𝑒𝑥𝑝</m:t>
-                            </m:r>
-                            <m:r>
-                              <a:rPr lang="en-US" altLang="zh-CN" sz="1258" i="1">
-                                <a:latin typeface="Cambria Math" panose="02040503050406030204" pitchFamily="18" charset="0"/>
-                                <a:ea typeface="宋体" panose="02010600030101010101" pitchFamily="2" charset="-122"/>
-                              </a:rPr>
-                              <m:t>(−</m:t>
-                            </m:r>
-                            <m:sSub>
-                              <m:sSubPr>
-                                <m:ctrlPr>
-                                  <a:rPr lang="en-US" altLang="zh-CN" sz="1258" i="1">
-                                    <a:latin typeface="Cambria Math" panose="02040503050406030204" pitchFamily="18" charset="0"/>
-                                    <a:ea typeface="宋体" panose="02010600030101010101" pitchFamily="2" charset="-122"/>
-                                  </a:rPr>
-                                </m:ctrlPr>
-                              </m:sSubPr>
-                              <m:e>
-                                <m:r>
-                                  <a:rPr lang="en-US" altLang="zh-CN" sz="1258" i="1">
-                                    <a:latin typeface="Cambria Math" panose="02040503050406030204" pitchFamily="18" charset="0"/>
-                                    <a:ea typeface="宋体" panose="02010600030101010101" pitchFamily="2" charset="-122"/>
-                                  </a:rPr>
-                                  <m:t>𝑑</m:t>
-                                </m:r>
-                              </m:e>
-                              <m:sub>
-                                <m:r>
-                                  <a:rPr lang="en-US" altLang="zh-CN" sz="1258" i="1">
-                                    <a:latin typeface="Cambria Math" panose="02040503050406030204" pitchFamily="18" charset="0"/>
-                                    <a:ea typeface="宋体" panose="02010600030101010101" pitchFamily="2" charset="-122"/>
-                                  </a:rPr>
-                                  <m:t>𝑖</m:t>
-                                </m:r>
-                                <m:r>
-                                  <a:rPr lang="en-US" altLang="zh-CN" sz="1258" i="1">
-                                    <a:latin typeface="Cambria Math" panose="02040503050406030204" pitchFamily="18" charset="0"/>
-                                    <a:ea typeface="宋体" panose="02010600030101010101" pitchFamily="2" charset="-122"/>
-                                  </a:rPr>
-                                  <m:t>,</m:t>
-                                </m:r>
-                                <m:r>
-                                  <a:rPr lang="en-US" altLang="zh-CN" sz="1258" i="1">
-                                    <a:latin typeface="Cambria Math" panose="02040503050406030204" pitchFamily="18" charset="0"/>
-                                    <a:ea typeface="宋体" panose="02010600030101010101" pitchFamily="2" charset="-122"/>
-                                  </a:rPr>
-                                  <m:t>𝑚</m:t>
-                                </m:r>
-                              </m:sub>
-                            </m:sSub>
-                            <m:r>
-                              <a:rPr lang="en-US" altLang="zh-CN" sz="1258" i="1">
-                                <a:latin typeface="Cambria Math" panose="02040503050406030204" pitchFamily="18" charset="0"/>
-                                <a:ea typeface="宋体" panose="02010600030101010101" pitchFamily="2" charset="-122"/>
-                              </a:rPr>
-                              <m:t>)</m:t>
-                            </m:r>
-                          </m:num>
-                          <m:den>
-                            <m:nary>
-                              <m:naryPr>
-                                <m:chr m:val="∑"/>
-                                <m:limLoc m:val="subSup"/>
-                                <m:ctrlPr>
-                                  <a:rPr lang="en-US" altLang="zh-CN" sz="1258" i="1">
-                                    <a:latin typeface="Cambria Math" panose="02040503050406030204" pitchFamily="18" charset="0"/>
-                                    <a:ea typeface="宋体" panose="02010600030101010101" pitchFamily="2" charset="-122"/>
-                                  </a:rPr>
-                                </m:ctrlPr>
-                              </m:naryPr>
-                              <m:sub>
-                                <m:r>
-                                  <m:rPr>
-                                    <m:brk m:alnAt="25"/>
-                                  </m:rPr>
-                                  <a:rPr lang="en-US" altLang="zh-CN" sz="1258" i="1">
-                                    <a:latin typeface="Cambria Math" panose="02040503050406030204" pitchFamily="18" charset="0"/>
-                                    <a:ea typeface="宋体" panose="02010600030101010101" pitchFamily="2" charset="-122"/>
-                                  </a:rPr>
-                                  <m:t>𝑘</m:t>
-                                </m:r>
-                                <m:r>
-                                  <a:rPr lang="en-US" altLang="zh-CN" sz="1258" i="1">
-                                    <a:latin typeface="Cambria Math" panose="02040503050406030204" pitchFamily="18" charset="0"/>
-                                    <a:ea typeface="宋体" panose="02010600030101010101" pitchFamily="2" charset="-122"/>
-                                  </a:rPr>
-                                  <m:t>=1</m:t>
-                                </m:r>
-                              </m:sub>
-                              <m:sup>
-                                <m:r>
-                                  <a:rPr lang="en-US" altLang="zh-CN" sz="1258" i="1">
-                                    <a:latin typeface="Cambria Math" panose="02040503050406030204" pitchFamily="18" charset="0"/>
-                                    <a:ea typeface="宋体" panose="02010600030101010101" pitchFamily="2" charset="-122"/>
-                                  </a:rPr>
-                                  <m:t>𝑀</m:t>
-                                </m:r>
-                              </m:sup>
-                              <m:e>
-                                <m:r>
-                                  <a:rPr lang="en-US" altLang="zh-CN" sz="1258" i="1">
-                                    <a:latin typeface="Cambria Math" panose="02040503050406030204" pitchFamily="18" charset="0"/>
-                                    <a:ea typeface="宋体" panose="02010600030101010101" pitchFamily="2" charset="-122"/>
-                                  </a:rPr>
-                                  <m:t>𝑒𝑥𝑝</m:t>
-                                </m:r>
-                                <m:r>
-                                  <a:rPr lang="en-US" altLang="zh-CN" sz="1258" i="1">
-                                    <a:latin typeface="Cambria Math" panose="02040503050406030204" pitchFamily="18" charset="0"/>
-                                    <a:ea typeface="宋体" panose="02010600030101010101" pitchFamily="2" charset="-122"/>
-                                  </a:rPr>
-                                  <m:t>(−</m:t>
-                                </m:r>
-                                <m:sSub>
-                                  <m:sSubPr>
-                                    <m:ctrlPr>
-                                      <a:rPr lang="en-US" altLang="zh-CN" sz="1258" i="1">
-                                        <a:latin typeface="Cambria Math" panose="02040503050406030204" pitchFamily="18" charset="0"/>
-                                        <a:ea typeface="宋体" panose="02010600030101010101" pitchFamily="2" charset="-122"/>
-                                      </a:rPr>
-                                    </m:ctrlPr>
-                                  </m:sSubPr>
-                                  <m:e>
-                                    <m:r>
-                                      <a:rPr lang="en-US" altLang="zh-CN" sz="1258" i="1">
-                                        <a:latin typeface="Cambria Math" panose="02040503050406030204" pitchFamily="18" charset="0"/>
-                                        <a:ea typeface="宋体" panose="02010600030101010101" pitchFamily="2" charset="-122"/>
-                                      </a:rPr>
-                                      <m:t>𝑑</m:t>
-                                    </m:r>
-                                  </m:e>
-                                  <m:sub>
-                                    <m:r>
-                                      <a:rPr lang="en-US" altLang="zh-CN" sz="1258" i="1">
-                                        <a:latin typeface="Cambria Math" panose="02040503050406030204" pitchFamily="18" charset="0"/>
-                                        <a:ea typeface="宋体" panose="02010600030101010101" pitchFamily="2" charset="-122"/>
-                                      </a:rPr>
-                                      <m:t>𝑖</m:t>
-                                    </m:r>
-                                    <m:r>
-                                      <a:rPr lang="en-US" altLang="zh-CN" sz="1258" i="1">
-                                        <a:latin typeface="Cambria Math" panose="02040503050406030204" pitchFamily="18" charset="0"/>
-                                        <a:ea typeface="宋体" panose="02010600030101010101" pitchFamily="2" charset="-122"/>
-                                      </a:rPr>
-                                      <m:t>,</m:t>
-                                    </m:r>
-                                    <m:r>
-                                      <a:rPr lang="en-US" altLang="zh-CN" sz="1258" i="1">
-                                        <a:latin typeface="Cambria Math" panose="02040503050406030204" pitchFamily="18" charset="0"/>
-                                        <a:ea typeface="宋体" panose="02010600030101010101" pitchFamily="2" charset="-122"/>
-                                      </a:rPr>
-                                      <m:t>𝑘</m:t>
-                                    </m:r>
-                                  </m:sub>
-                                </m:sSub>
-                                <m:r>
-                                  <a:rPr lang="en-US" altLang="zh-CN" sz="1258" i="1">
-                                    <a:latin typeface="Cambria Math" panose="02040503050406030204" pitchFamily="18" charset="0"/>
-                                    <a:ea typeface="宋体" panose="02010600030101010101" pitchFamily="2" charset="-122"/>
-                                  </a:rPr>
-                                  <m:t>)</m:t>
-                                </m:r>
-                              </m:e>
-                            </m:nary>
-                          </m:den>
-                        </m:f>
-                      </m:oMath>
-                    </m:oMathPara>
-                  </a14:m>
-                  <a:endParaRPr lang="en-US" altLang="zh-CN" sz="1258" dirty="0">
-                    <a:latin typeface="宋体" panose="02010600030101010101" pitchFamily="2" charset="-122"/>
-                    <a:ea typeface="宋体" panose="02010600030101010101" pitchFamily="2" charset="-122"/>
-                  </a:endParaRPr>
-                </a:p>
-              </p:txBody>
-            </p:sp>
-          </mc:Choice>
-          <mc:Fallback xmlns="">
-            <p:sp>
-              <p:nvSpPr>
-                <p:cNvPr id="159" name="文本框 158">
-                  <a:extLst>
-                    <a:ext uri="{FF2B5EF4-FFF2-40B4-BE49-F238E27FC236}">
-                      <a16:creationId xmlns:a16="http://schemas.microsoft.com/office/drawing/2014/main" id="{D7C977CD-12D7-4AF0-8B4D-8BF354B3C052}"/>
-                    </a:ext>
-                  </a:extLst>
-                </p:cNvPr>
-                <p:cNvSpPr txBox="1">
-                  <a:spLocks noRot="1" noChangeAspect="1" noMove="1" noResize="1" noEditPoints="1" noAdjustHandles="1" noChangeArrowheads="1" noChangeShapeType="1" noTextEdit="1"/>
-                </p:cNvSpPr>
-                <p:nvPr/>
-              </p:nvSpPr>
-              <p:spPr>
-                <a:xfrm>
-                  <a:off x="5272198" y="2631602"/>
-                  <a:ext cx="1829924" cy="499945"/>
-                </a:xfrm>
-                <a:prstGeom prst="rect">
-                  <a:avLst/>
-                </a:prstGeom>
-                <a:blipFill>
-                  <a:blip r:embed="rId34"/>
-                  <a:stretch>
-                    <a:fillRect t="-10465" b="-77907"/>
-                  </a:stretch>
-                </a:blipFill>
-              </p:spPr>
-              <p:txBody>
-                <a:bodyPr/>
-                <a:lstStyle/>
-                <a:p>
-                  <a:r>
-                    <a:rPr lang="zh-CN" altLang="en-US">
-                      <a:noFill/>
-                    </a:rPr>
-                    <a:t> </a:t>
-                  </a:r>
-                </a:p>
-              </p:txBody>
-            </p:sp>
-          </mc:Fallback>
-        </mc:AlternateContent>
-      </p:grpSp>
-      <p:grpSp>
-        <p:nvGrpSpPr>
-          <p:cNvPr id="165" name="组合 164">
+                  </m:oMathPara>
+                </a14:m>
+                <a:endParaRPr lang="en-US" altLang="zh-CN" sz="1258" dirty="0">
+                  <a:latin typeface="宋体" panose="02010600030101010101" pitchFamily="2" charset="-122"/>
+                  <a:ea typeface="宋体" panose="02010600030101010101" pitchFamily="2" charset="-122"/>
+                </a:endParaRPr>
+              </a:p>
+            </p:txBody>
+          </p:sp>
+        </mc:Choice>
+        <mc:Fallback xmlns="">
+          <p:sp>
+            <p:nvSpPr>
+              <p:cNvPr id="159" name="文本框 158">
+                <a:extLst>
+                  <a:ext uri="{FF2B5EF4-FFF2-40B4-BE49-F238E27FC236}">
+                    <a16:creationId xmlns:a16="http://schemas.microsoft.com/office/drawing/2014/main" id="{D7C977CD-12D7-4AF0-8B4D-8BF354B3C052}"/>
+                  </a:ext>
+                </a:extLst>
+              </p:cNvPr>
+              <p:cNvSpPr txBox="1">
+                <a:spLocks noRot="1" noChangeAspect="1" noMove="1" noResize="1" noEditPoints="1" noAdjustHandles="1" noChangeArrowheads="1" noChangeShapeType="1" noTextEdit="1"/>
+              </p:cNvSpPr>
+              <p:nvPr/>
+            </p:nvSpPr>
+            <p:spPr>
+              <a:xfrm>
+                <a:off x="4566673" y="3924397"/>
+                <a:ext cx="1918176" cy="524055"/>
+              </a:xfrm>
+              <a:prstGeom prst="rect">
+                <a:avLst/>
+              </a:prstGeom>
+              <a:blipFill>
+                <a:blip r:embed="rId3"/>
+                <a:stretch>
+                  <a:fillRect t="-10465" b="-77907"/>
+                </a:stretch>
+              </a:blipFill>
+            </p:spPr>
+            <p:txBody>
+              <a:bodyPr/>
+              <a:lstStyle/>
+              <a:p>
+                <a:r>
+                  <a:rPr lang="zh-CN" altLang="en-US">
+                    <a:noFill/>
+                  </a:rPr>
+                  <a:t> </a:t>
+                </a:r>
+              </a:p>
+            </p:txBody>
+          </p:sp>
+        </mc:Fallback>
+      </mc:AlternateContent>
+      <p:sp>
+        <p:nvSpPr>
+          <p:cNvPr id="162" name="圆角矩形 16">
             <a:extLst>
               <a:ext uri="{FF2B5EF4-FFF2-40B4-BE49-F238E27FC236}">
-                <a16:creationId xmlns:a16="http://schemas.microsoft.com/office/drawing/2014/main" id="{FCC52FB6-D2CB-448B-B3FC-E1C9964DB802}"/>
+                <a16:creationId xmlns:a16="http://schemas.microsoft.com/office/drawing/2014/main" id="{EA50F659-CB91-44C9-AABE-195CFDA2AE3A}"/>
               </a:ext>
             </a:extLst>
           </p:cNvPr>
-          <p:cNvGrpSpPr/>
+          <p:cNvSpPr/>
           <p:nvPr/>
-        </p:nvGrpSpPr>
-        <p:grpSpPr>
+        </p:nvSpPr>
+        <p:spPr>
           <a:xfrm>
-            <a:off x="2317427" y="3395638"/>
+            <a:off x="2251777" y="3556265"/>
             <a:ext cx="1659344" cy="982452"/>
-            <a:chOff x="4224120" y="3440323"/>
-            <a:chExt cx="1583001" cy="1049067"/>
           </a:xfrm>
-        </p:grpSpPr>
-        <p:sp>
-          <p:nvSpPr>
-            <p:cNvPr id="162" name="圆角矩形 16">
-              <a:extLst>
-                <a:ext uri="{FF2B5EF4-FFF2-40B4-BE49-F238E27FC236}">
-                  <a16:creationId xmlns:a16="http://schemas.microsoft.com/office/drawing/2014/main" id="{EA50F659-CB91-44C9-AABE-195CFDA2AE3A}"/>
-                </a:ext>
-              </a:extLst>
-            </p:cNvPr>
-            <p:cNvSpPr/>
-            <p:nvPr/>
-          </p:nvSpPr>
-          <p:spPr>
-            <a:xfrm>
-              <a:off x="4224120" y="3440323"/>
-              <a:ext cx="1583001" cy="1049067"/>
-            </a:xfrm>
-            <a:prstGeom prst="roundRect">
-              <a:avLst>
-                <a:gd name="adj" fmla="val 24586"/>
-              </a:avLst>
-            </a:prstGeom>
-            <a:solidFill>
-              <a:srgbClr val="5CC5C0"/>
-            </a:solidFill>
-            <a:ln>
+          <a:prstGeom prst="roundRect">
+            <a:avLst>
+              <a:gd name="adj" fmla="val 5971"/>
+            </a:avLst>
+          </a:prstGeom>
+          <a:solidFill>
+            <a:srgbClr val="B5E5E3"/>
+          </a:solidFill>
+          <a:ln>
+            <a:noFill/>
+          </a:ln>
+        </p:spPr>
+        <p:style>
+          <a:lnRef idx="2">
+            <a:schemeClr val="accent1">
+              <a:lumMod val="75000"/>
+            </a:schemeClr>
+          </a:lnRef>
+          <a:fillRef idx="1">
+            <a:schemeClr val="accent1"/>
+          </a:fillRef>
+          <a:effectRef idx="0">
+            <a:srgbClr val="FFFFFF"/>
+          </a:effectRef>
+          <a:fontRef idx="minor">
+            <a:schemeClr val="lt1"/>
+          </a:fontRef>
+        </p:style>
+        <p:txBody>
+          <a:bodyPr rtlCol="0" anchor="ctr"/>
+          <a:lstStyle/>
+          <a:p>
+            <a:pPr algn="ctr"/>
+            <a:endParaRPr lang="zh-CN" altLang="en-US" sz="1894" b="1"/>
+          </a:p>
+        </p:txBody>
+      </p:sp>
+      <p:sp>
+        <p:nvSpPr>
+          <p:cNvPr id="163" name="文本框 162">
+            <a:extLst>
+              <a:ext uri="{FF2B5EF4-FFF2-40B4-BE49-F238E27FC236}">
+                <a16:creationId xmlns:a16="http://schemas.microsoft.com/office/drawing/2014/main" id="{1DBB8920-24D3-49A3-8EC1-E8E20C71F9F5}"/>
+              </a:ext>
+            </a:extLst>
+          </p:cNvPr>
+          <p:cNvSpPr txBox="1"/>
+          <p:nvPr/>
+        </p:nvSpPr>
+        <p:spPr>
+          <a:xfrm>
+            <a:off x="2342018" y="3591329"/>
+            <a:ext cx="1506819" cy="292262"/>
+          </a:xfrm>
+          <a:prstGeom prst="rect">
+            <a:avLst/>
+          </a:prstGeom>
+          <a:noFill/>
+        </p:spPr>
+        <p:txBody>
+          <a:bodyPr wrap="none" rtlCol="0">
+            <a:spAutoFit/>
+          </a:bodyPr>
+          <a:lstStyle/>
+          <a:p>
+            <a:r>
+              <a:rPr lang="zh-CN" altLang="en-US" sz="1258" dirty="0">
+                <a:latin typeface="宋体" panose="02010600030101010101" pitchFamily="2" charset="-122"/>
+                <a:ea typeface="宋体" panose="02010600030101010101" pitchFamily="2" charset="-122"/>
+              </a:rPr>
+              <a:t>聚类中心更新机制</a:t>
+            </a:r>
+          </a:p>
+        </p:txBody>
+      </p:sp>
+      <mc:AlternateContent xmlns:mc="http://schemas.openxmlformats.org/markup-compatibility/2006" xmlns:a14="http://schemas.microsoft.com/office/drawing/2010/main">
+        <mc:Choice Requires="a14">
+          <p:sp>
+            <p:nvSpPr>
+              <p:cNvPr id="164" name="文本框 163">
+                <a:extLst>
+                  <a:ext uri="{FF2B5EF4-FFF2-40B4-BE49-F238E27FC236}">
+                    <a16:creationId xmlns:a16="http://schemas.microsoft.com/office/drawing/2014/main" id="{94C85D1E-E9CF-40B8-8FA0-78E9C04C3A26}"/>
+                  </a:ext>
+                </a:extLst>
+              </p:cNvPr>
+              <p:cNvSpPr txBox="1"/>
+              <p:nvPr/>
+            </p:nvSpPr>
+            <p:spPr>
+              <a:xfrm>
+                <a:off x="2320056" y="3865994"/>
+                <a:ext cx="1477934" cy="553092"/>
+              </a:xfrm>
+              <a:prstGeom prst="rect">
+                <a:avLst/>
+              </a:prstGeom>
               <a:noFill/>
-            </a:ln>
-          </p:spPr>
-          <p:style>
-            <a:lnRef idx="2">
-              <a:schemeClr val="accent1">
-                <a:lumMod val="75000"/>
-              </a:schemeClr>
-            </a:lnRef>
-            <a:fillRef idx="1">
-              <a:schemeClr val="accent1"/>
-            </a:fillRef>
-            <a:effectRef idx="0">
-              <a:srgbClr val="FFFFFF"/>
-            </a:effectRef>
-            <a:fontRef idx="minor">
-              <a:schemeClr val="lt1"/>
-            </a:fontRef>
-          </p:style>
-          <p:txBody>
-            <a:bodyPr rtlCol="0" anchor="ctr"/>
-            <a:lstStyle/>
-            <a:p>
-              <a:pPr algn="ctr"/>
-              <a:endParaRPr lang="zh-CN" altLang="en-US" sz="1894" b="1"/>
-            </a:p>
-          </p:txBody>
-        </p:sp>
-        <p:sp>
-          <p:nvSpPr>
-            <p:cNvPr id="163" name="文本框 162">
-              <a:extLst>
-                <a:ext uri="{FF2B5EF4-FFF2-40B4-BE49-F238E27FC236}">
-                  <a16:creationId xmlns:a16="http://schemas.microsoft.com/office/drawing/2014/main" id="{1DBB8920-24D3-49A3-8EC1-E8E20C71F9F5}"/>
-                </a:ext>
-              </a:extLst>
-            </p:cNvPr>
-            <p:cNvSpPr txBox="1"/>
-            <p:nvPr/>
-          </p:nvSpPr>
-          <p:spPr>
-            <a:xfrm>
-              <a:off x="4310209" y="3477765"/>
-              <a:ext cx="1437493" cy="312079"/>
-            </a:xfrm>
-            <a:prstGeom prst="rect">
-              <a:avLst/>
-            </a:prstGeom>
-            <a:noFill/>
-          </p:spPr>
-          <p:txBody>
-            <a:bodyPr wrap="none" rtlCol="0">
-              <a:spAutoFit/>
-            </a:bodyPr>
-            <a:lstStyle/>
-            <a:p>
-              <a:r>
-                <a:rPr lang="zh-CN" altLang="en-US" sz="1258" dirty="0">
+            </p:spPr>
+            <p:txBody>
+              <a:bodyPr wrap="none" rtlCol="0">
+                <a:spAutoFit/>
+              </a:bodyPr>
+              <a:lstStyle/>
+              <a:p>
+                <a:pPr/>
+                <a14:m>
+                  <m:oMathPara xmlns:m="http://schemas.openxmlformats.org/officeDocument/2006/math">
+                    <m:oMathParaPr>
+                      <m:jc m:val="centerGroup"/>
+                    </m:oMathParaPr>
+                    <m:oMath xmlns:m="http://schemas.openxmlformats.org/officeDocument/2006/math">
+                      <m:sSub>
+                        <m:sSubPr>
+                          <m:ctrlPr>
+                            <a:rPr lang="en-US" altLang="zh-CN" sz="1258" i="1">
+                              <a:latin typeface="Cambria Math" panose="02040503050406030204" pitchFamily="18" charset="0"/>
+                            </a:rPr>
+                          </m:ctrlPr>
+                        </m:sSubPr>
+                        <m:e>
+                          <m:r>
+                            <a:rPr lang="en-US" altLang="zh-CN" sz="1258" i="1">
+                              <a:latin typeface="Cambria Math" panose="02040503050406030204" pitchFamily="18" charset="0"/>
+                            </a:rPr>
+                            <m:t>𝑒</m:t>
+                          </m:r>
+                        </m:e>
+                        <m:sub>
+                          <m:r>
+                            <a:rPr lang="en-US" altLang="zh-CN" sz="1258" i="1">
+                              <a:latin typeface="Cambria Math" panose="02040503050406030204" pitchFamily="18" charset="0"/>
+                            </a:rPr>
+                            <m:t>𝑚</m:t>
+                          </m:r>
+                        </m:sub>
+                      </m:sSub>
+                      <m:r>
+                        <a:rPr lang="en-US" altLang="zh-CN" sz="1258" i="1">
+                          <a:latin typeface="Cambria Math" panose="02040503050406030204" pitchFamily="18" charset="0"/>
+                          <a:ea typeface="Cambria Math" panose="02040503050406030204" pitchFamily="18" charset="0"/>
+                        </a:rPr>
+                        <m:t>←</m:t>
+                      </m:r>
+                      <m:f>
+                        <m:fPr>
+                          <m:ctrlPr>
+                            <a:rPr lang="en-US" altLang="zh-CN" sz="1258" i="1">
+                              <a:latin typeface="Cambria Math" panose="02040503050406030204" pitchFamily="18" charset="0"/>
+                              <a:ea typeface="Cambria Math" panose="02040503050406030204" pitchFamily="18" charset="0"/>
+                            </a:rPr>
+                          </m:ctrlPr>
+                        </m:fPr>
+                        <m:num>
+                          <m:nary>
+                            <m:naryPr>
+                              <m:chr m:val="∑"/>
+                              <m:limLoc m:val="subSup"/>
+                              <m:ctrlPr>
+                                <a:rPr lang="en-US" altLang="zh-CN" sz="1258" i="1">
+                                  <a:latin typeface="Cambria Math" panose="02040503050406030204" pitchFamily="18" charset="0"/>
+                                  <a:ea typeface="Cambria Math" panose="02040503050406030204" pitchFamily="18" charset="0"/>
+                                </a:rPr>
+                              </m:ctrlPr>
+                            </m:naryPr>
+                            <m:sub>
+                              <m:r>
+                                <m:rPr>
+                                  <m:brk m:alnAt="25"/>
+                                </m:rPr>
+                                <a:rPr lang="en-US" altLang="zh-CN" sz="1258" i="1">
+                                  <a:latin typeface="Cambria Math" panose="02040503050406030204" pitchFamily="18" charset="0"/>
+                                  <a:ea typeface="Cambria Math" panose="02040503050406030204" pitchFamily="18" charset="0"/>
+                                </a:rPr>
+                                <m:t>𝑖</m:t>
+                              </m:r>
+                              <m:r>
+                                <a:rPr lang="en-US" altLang="zh-CN" sz="1258" i="1">
+                                  <a:latin typeface="Cambria Math" panose="02040503050406030204" pitchFamily="18" charset="0"/>
+                                  <a:ea typeface="Cambria Math" panose="02040503050406030204" pitchFamily="18" charset="0"/>
+                                </a:rPr>
+                                <m:t>=1</m:t>
+                              </m:r>
+                            </m:sub>
+                            <m:sup>
+                              <m:r>
+                                <a:rPr lang="en-US" altLang="zh-CN" sz="1258" i="1">
+                                  <a:latin typeface="Cambria Math" panose="02040503050406030204" pitchFamily="18" charset="0"/>
+                                  <a:ea typeface="Cambria Math" panose="02040503050406030204" pitchFamily="18" charset="0"/>
+                                </a:rPr>
+                                <m:t>𝑁</m:t>
+                              </m:r>
+                            </m:sup>
+                            <m:e>
+                              <m:sSub>
+                                <m:sSubPr>
+                                  <m:ctrlPr>
+                                    <a:rPr lang="en-US" altLang="zh-CN" sz="1258" i="1">
+                                      <a:latin typeface="Cambria Math" panose="02040503050406030204" pitchFamily="18" charset="0"/>
+                                      <a:ea typeface="Cambria Math" panose="02040503050406030204" pitchFamily="18" charset="0"/>
+                                    </a:rPr>
+                                  </m:ctrlPr>
+                                </m:sSubPr>
+                                <m:e>
+                                  <m:r>
+                                    <a:rPr lang="en-US" altLang="zh-CN" sz="1258" i="1">
+                                      <a:latin typeface="Cambria Math" panose="02040503050406030204" pitchFamily="18" charset="0"/>
+                                      <a:ea typeface="Cambria Math" panose="02040503050406030204" pitchFamily="18" charset="0"/>
+                                    </a:rPr>
+                                    <m:t>𝛼</m:t>
+                                  </m:r>
+                                </m:e>
+                                <m:sub>
+                                  <m:r>
+                                    <a:rPr lang="en-US" altLang="zh-CN" sz="1258" i="1">
+                                      <a:latin typeface="Cambria Math" panose="02040503050406030204" pitchFamily="18" charset="0"/>
+                                      <a:ea typeface="Cambria Math" panose="02040503050406030204" pitchFamily="18" charset="0"/>
+                                    </a:rPr>
+                                    <m:t>𝑖</m:t>
+                                  </m:r>
+                                  <m:r>
+                                    <a:rPr lang="en-US" altLang="zh-CN" sz="1258" i="1">
+                                      <a:latin typeface="Cambria Math" panose="02040503050406030204" pitchFamily="18" charset="0"/>
+                                      <a:ea typeface="Cambria Math" panose="02040503050406030204" pitchFamily="18" charset="0"/>
+                                    </a:rPr>
+                                    <m:t>,</m:t>
+                                  </m:r>
+                                  <m:r>
+                                    <a:rPr lang="en-US" altLang="zh-CN" sz="1258" i="1">
+                                      <a:latin typeface="Cambria Math" panose="02040503050406030204" pitchFamily="18" charset="0"/>
+                                      <a:ea typeface="Cambria Math" panose="02040503050406030204" pitchFamily="18" charset="0"/>
+                                    </a:rPr>
+                                    <m:t>𝑚</m:t>
+                                  </m:r>
+                                </m:sub>
+                              </m:sSub>
+                              <m:sSub>
+                                <m:sSubPr>
+                                  <m:ctrlPr>
+                                    <a:rPr lang="en-US" altLang="zh-CN" sz="1258" i="1">
+                                      <a:latin typeface="Cambria Math" panose="02040503050406030204" pitchFamily="18" charset="0"/>
+                                      <a:ea typeface="Cambria Math" panose="02040503050406030204" pitchFamily="18" charset="0"/>
+                                    </a:rPr>
+                                  </m:ctrlPr>
+                                </m:sSubPr>
+                                <m:e>
+                                  <m:r>
+                                    <a:rPr lang="en-US" altLang="zh-CN" sz="1258" i="1">
+                                      <a:latin typeface="Cambria Math" panose="02040503050406030204" pitchFamily="18" charset="0"/>
+                                      <a:ea typeface="Cambria Math" panose="02040503050406030204" pitchFamily="18" charset="0"/>
+                                    </a:rPr>
+                                    <m:t>𝑥</m:t>
+                                  </m:r>
+                                </m:e>
+                                <m:sub>
+                                  <m:r>
+                                    <a:rPr lang="en-US" altLang="zh-CN" sz="1258" i="1">
+                                      <a:latin typeface="Cambria Math" panose="02040503050406030204" pitchFamily="18" charset="0"/>
+                                      <a:ea typeface="Cambria Math" panose="02040503050406030204" pitchFamily="18" charset="0"/>
+                                    </a:rPr>
+                                    <m:t>𝑖</m:t>
+                                  </m:r>
+                                </m:sub>
+                              </m:sSub>
+                            </m:e>
+                          </m:nary>
+                        </m:num>
+                        <m:den>
+                          <m:nary>
+                            <m:naryPr>
+                              <m:chr m:val="∑"/>
+                              <m:limLoc m:val="subSup"/>
+                              <m:ctrlPr>
+                                <a:rPr lang="en-US" altLang="zh-CN" sz="1258" i="1">
+                                  <a:latin typeface="Cambria Math" panose="02040503050406030204" pitchFamily="18" charset="0"/>
+                                  <a:ea typeface="Cambria Math" panose="02040503050406030204" pitchFamily="18" charset="0"/>
+                                </a:rPr>
+                              </m:ctrlPr>
+                            </m:naryPr>
+                            <m:sub>
+                              <m:r>
+                                <m:rPr>
+                                  <m:brk m:alnAt="25"/>
+                                </m:rPr>
+                                <a:rPr lang="en-US" altLang="zh-CN" sz="1258" i="1">
+                                  <a:latin typeface="Cambria Math" panose="02040503050406030204" pitchFamily="18" charset="0"/>
+                                  <a:ea typeface="Cambria Math" panose="02040503050406030204" pitchFamily="18" charset="0"/>
+                                </a:rPr>
+                                <m:t>𝑖</m:t>
+                              </m:r>
+                              <m:r>
+                                <a:rPr lang="en-US" altLang="zh-CN" sz="1258" i="1">
+                                  <a:latin typeface="Cambria Math" panose="02040503050406030204" pitchFamily="18" charset="0"/>
+                                  <a:ea typeface="Cambria Math" panose="02040503050406030204" pitchFamily="18" charset="0"/>
+                                </a:rPr>
+                                <m:t>=1</m:t>
+                              </m:r>
+                            </m:sub>
+                            <m:sup>
+                              <m:r>
+                                <a:rPr lang="en-US" altLang="zh-CN" sz="1258" i="1">
+                                  <a:latin typeface="Cambria Math" panose="02040503050406030204" pitchFamily="18" charset="0"/>
+                                  <a:ea typeface="Cambria Math" panose="02040503050406030204" pitchFamily="18" charset="0"/>
+                                </a:rPr>
+                                <m:t>𝑁</m:t>
+                              </m:r>
+                            </m:sup>
+                            <m:e>
+                              <m:sSub>
+                                <m:sSubPr>
+                                  <m:ctrlPr>
+                                    <a:rPr lang="en-US" altLang="zh-CN" sz="1258" i="1">
+                                      <a:latin typeface="Cambria Math" panose="02040503050406030204" pitchFamily="18" charset="0"/>
+                                      <a:ea typeface="Cambria Math" panose="02040503050406030204" pitchFamily="18" charset="0"/>
+                                    </a:rPr>
+                                  </m:ctrlPr>
+                                </m:sSubPr>
+                                <m:e>
+                                  <m:r>
+                                    <a:rPr lang="en-US" altLang="zh-CN" sz="1258" i="1">
+                                      <a:latin typeface="Cambria Math" panose="02040503050406030204" pitchFamily="18" charset="0"/>
+                                      <a:ea typeface="Cambria Math" panose="02040503050406030204" pitchFamily="18" charset="0"/>
+                                    </a:rPr>
+                                    <m:t>𝛼</m:t>
+                                  </m:r>
+                                </m:e>
+                                <m:sub>
+                                  <m:r>
+                                    <a:rPr lang="en-US" altLang="zh-CN" sz="1258" i="1">
+                                      <a:latin typeface="Cambria Math" panose="02040503050406030204" pitchFamily="18" charset="0"/>
+                                      <a:ea typeface="Cambria Math" panose="02040503050406030204" pitchFamily="18" charset="0"/>
+                                    </a:rPr>
+                                    <m:t>𝑖</m:t>
+                                  </m:r>
+                                  <m:r>
+                                    <a:rPr lang="en-US" altLang="zh-CN" sz="1258" i="1">
+                                      <a:latin typeface="Cambria Math" panose="02040503050406030204" pitchFamily="18" charset="0"/>
+                                      <a:ea typeface="Cambria Math" panose="02040503050406030204" pitchFamily="18" charset="0"/>
+                                    </a:rPr>
+                                    <m:t>,</m:t>
+                                  </m:r>
+                                  <m:r>
+                                    <a:rPr lang="en-US" altLang="zh-CN" sz="1258" i="1">
+                                      <a:latin typeface="Cambria Math" panose="02040503050406030204" pitchFamily="18" charset="0"/>
+                                      <a:ea typeface="Cambria Math" panose="02040503050406030204" pitchFamily="18" charset="0"/>
+                                    </a:rPr>
+                                    <m:t>𝑚</m:t>
+                                  </m:r>
+                                </m:sub>
+                              </m:sSub>
+                            </m:e>
+                          </m:nary>
+                        </m:den>
+                      </m:f>
+                    </m:oMath>
+                  </m:oMathPara>
+                </a14:m>
+                <a:endParaRPr lang="zh-CN" altLang="en-US" sz="1258" dirty="0">
                   <a:latin typeface="宋体" panose="02010600030101010101" pitchFamily="2" charset="-122"/>
                   <a:ea typeface="宋体" panose="02010600030101010101" pitchFamily="2" charset="-122"/>
-                </a:rPr>
-                <a:t>聚类中心更新机制</a:t>
-              </a:r>
-            </a:p>
-          </p:txBody>
-        </p:sp>
-        <mc:AlternateContent xmlns:mc="http://schemas.openxmlformats.org/markup-compatibility/2006" xmlns:a14="http://schemas.microsoft.com/office/drawing/2010/main">
-          <mc:Choice Requires="a14">
-            <p:sp>
-              <p:nvSpPr>
-                <p:cNvPr id="164" name="文本框 163">
-                  <a:extLst>
-                    <a:ext uri="{FF2B5EF4-FFF2-40B4-BE49-F238E27FC236}">
-                      <a16:creationId xmlns:a16="http://schemas.microsoft.com/office/drawing/2014/main" id="{94C85D1E-E9CF-40B8-8FA0-78E9C04C3A26}"/>
-                    </a:ext>
-                  </a:extLst>
-                </p:cNvPr>
-                <p:cNvSpPr txBox="1"/>
-                <p:nvPr/>
-              </p:nvSpPr>
-              <p:spPr>
-                <a:xfrm>
-                  <a:off x="4289258" y="3771053"/>
-                  <a:ext cx="1409937" cy="590594"/>
-                </a:xfrm>
-                <a:prstGeom prst="rect">
-                  <a:avLst/>
-                </a:prstGeom>
-                <a:noFill/>
-              </p:spPr>
-              <p:txBody>
-                <a:bodyPr wrap="none" rtlCol="0">
-                  <a:spAutoFit/>
-                </a:bodyPr>
-                <a:lstStyle/>
-                <a:p>
-                  <a:pPr/>
-                  <a14:m>
-                    <m:oMathPara xmlns:m="http://schemas.openxmlformats.org/officeDocument/2006/math">
-                      <m:oMathParaPr>
-                        <m:jc m:val="centerGroup"/>
-                      </m:oMathParaPr>
-                      <m:oMath xmlns:m="http://schemas.openxmlformats.org/officeDocument/2006/math">
-                        <m:sSub>
-                          <m:sSubPr>
-                            <m:ctrlPr>
-                              <a:rPr lang="en-US" altLang="zh-CN" sz="1258" i="1">
-                                <a:latin typeface="Cambria Math" panose="02040503050406030204" pitchFamily="18" charset="0"/>
-                              </a:rPr>
-                            </m:ctrlPr>
-                          </m:sSubPr>
-                          <m:e>
-                            <m:r>
-                              <a:rPr lang="en-US" altLang="zh-CN" sz="1258" i="1">
-                                <a:latin typeface="Cambria Math" panose="02040503050406030204" pitchFamily="18" charset="0"/>
-                              </a:rPr>
-                              <m:t>𝑒</m:t>
-                            </m:r>
-                          </m:e>
-                          <m:sub>
-                            <m:r>
-                              <a:rPr lang="en-US" altLang="zh-CN" sz="1258" i="1">
-                                <a:latin typeface="Cambria Math" panose="02040503050406030204" pitchFamily="18" charset="0"/>
-                              </a:rPr>
-                              <m:t>𝑚</m:t>
-                            </m:r>
-                          </m:sub>
-                        </m:sSub>
-                        <m:r>
-                          <a:rPr lang="en-US" altLang="zh-CN" sz="1258" i="1">
-                            <a:latin typeface="Cambria Math" panose="02040503050406030204" pitchFamily="18" charset="0"/>
-                            <a:ea typeface="Cambria Math" panose="02040503050406030204" pitchFamily="18" charset="0"/>
-                          </a:rPr>
-                          <m:t>←</m:t>
-                        </m:r>
-                        <m:f>
-                          <m:fPr>
-                            <m:ctrlPr>
-                              <a:rPr lang="en-US" altLang="zh-CN" sz="1258" i="1">
-                                <a:latin typeface="Cambria Math" panose="02040503050406030204" pitchFamily="18" charset="0"/>
-                                <a:ea typeface="Cambria Math" panose="02040503050406030204" pitchFamily="18" charset="0"/>
-                              </a:rPr>
-                            </m:ctrlPr>
-                          </m:fPr>
-                          <m:num>
-                            <m:nary>
-                              <m:naryPr>
-                                <m:chr m:val="∑"/>
-                                <m:limLoc m:val="subSup"/>
-                                <m:ctrlPr>
-                                  <a:rPr lang="en-US" altLang="zh-CN" sz="1258" i="1">
-                                    <a:latin typeface="Cambria Math" panose="02040503050406030204" pitchFamily="18" charset="0"/>
-                                    <a:ea typeface="Cambria Math" panose="02040503050406030204" pitchFamily="18" charset="0"/>
-                                  </a:rPr>
-                                </m:ctrlPr>
-                              </m:naryPr>
-                              <m:sub>
-                                <m:r>
-                                  <m:rPr>
-                                    <m:brk m:alnAt="25"/>
-                                  </m:rPr>
-                                  <a:rPr lang="en-US" altLang="zh-CN" sz="1258" i="1">
-                                    <a:latin typeface="Cambria Math" panose="02040503050406030204" pitchFamily="18" charset="0"/>
-                                    <a:ea typeface="Cambria Math" panose="02040503050406030204" pitchFamily="18" charset="0"/>
-                                  </a:rPr>
-                                  <m:t>𝑖</m:t>
-                                </m:r>
-                                <m:r>
-                                  <a:rPr lang="en-US" altLang="zh-CN" sz="1258" i="1">
-                                    <a:latin typeface="Cambria Math" panose="02040503050406030204" pitchFamily="18" charset="0"/>
-                                    <a:ea typeface="Cambria Math" panose="02040503050406030204" pitchFamily="18" charset="0"/>
-                                  </a:rPr>
-                                  <m:t>=1</m:t>
-                                </m:r>
-                              </m:sub>
-                              <m:sup>
-                                <m:r>
-                                  <a:rPr lang="en-US" altLang="zh-CN" sz="1258" i="1">
-                                    <a:latin typeface="Cambria Math" panose="02040503050406030204" pitchFamily="18" charset="0"/>
-                                    <a:ea typeface="Cambria Math" panose="02040503050406030204" pitchFamily="18" charset="0"/>
-                                  </a:rPr>
-                                  <m:t>𝑁</m:t>
-                                </m:r>
-                              </m:sup>
-                              <m:e>
-                                <m:sSub>
-                                  <m:sSubPr>
-                                    <m:ctrlPr>
-                                      <a:rPr lang="en-US" altLang="zh-CN" sz="1258" i="1">
-                                        <a:latin typeface="Cambria Math" panose="02040503050406030204" pitchFamily="18" charset="0"/>
-                                        <a:ea typeface="Cambria Math" panose="02040503050406030204" pitchFamily="18" charset="0"/>
-                                      </a:rPr>
-                                    </m:ctrlPr>
-                                  </m:sSubPr>
-                                  <m:e>
-                                    <m:r>
-                                      <a:rPr lang="en-US" altLang="zh-CN" sz="1258" i="1">
-                                        <a:latin typeface="Cambria Math" panose="02040503050406030204" pitchFamily="18" charset="0"/>
-                                        <a:ea typeface="Cambria Math" panose="02040503050406030204" pitchFamily="18" charset="0"/>
-                                      </a:rPr>
-                                      <m:t>𝛼</m:t>
-                                    </m:r>
-                                  </m:e>
-                                  <m:sub>
-                                    <m:r>
-                                      <a:rPr lang="en-US" altLang="zh-CN" sz="1258" i="1">
-                                        <a:latin typeface="Cambria Math" panose="02040503050406030204" pitchFamily="18" charset="0"/>
-                                        <a:ea typeface="Cambria Math" panose="02040503050406030204" pitchFamily="18" charset="0"/>
-                                      </a:rPr>
-                                      <m:t>𝑖</m:t>
-                                    </m:r>
-                                    <m:r>
-                                      <a:rPr lang="en-US" altLang="zh-CN" sz="1258" i="1">
-                                        <a:latin typeface="Cambria Math" panose="02040503050406030204" pitchFamily="18" charset="0"/>
-                                        <a:ea typeface="Cambria Math" panose="02040503050406030204" pitchFamily="18" charset="0"/>
-                                      </a:rPr>
-                                      <m:t>,</m:t>
-                                    </m:r>
-                                    <m:r>
-                                      <a:rPr lang="en-US" altLang="zh-CN" sz="1258" i="1">
-                                        <a:latin typeface="Cambria Math" panose="02040503050406030204" pitchFamily="18" charset="0"/>
-                                        <a:ea typeface="Cambria Math" panose="02040503050406030204" pitchFamily="18" charset="0"/>
-                                      </a:rPr>
-                                      <m:t>𝑚</m:t>
-                                    </m:r>
-                                  </m:sub>
-                                </m:sSub>
-                                <m:sSub>
-                                  <m:sSubPr>
-                                    <m:ctrlPr>
-                                      <a:rPr lang="en-US" altLang="zh-CN" sz="1258" i="1">
-                                        <a:latin typeface="Cambria Math" panose="02040503050406030204" pitchFamily="18" charset="0"/>
-                                        <a:ea typeface="Cambria Math" panose="02040503050406030204" pitchFamily="18" charset="0"/>
-                                      </a:rPr>
-                                    </m:ctrlPr>
-                                  </m:sSubPr>
-                                  <m:e>
-                                    <m:r>
-                                      <a:rPr lang="en-US" altLang="zh-CN" sz="1258" i="1">
-                                        <a:latin typeface="Cambria Math" panose="02040503050406030204" pitchFamily="18" charset="0"/>
-                                        <a:ea typeface="Cambria Math" panose="02040503050406030204" pitchFamily="18" charset="0"/>
-                                      </a:rPr>
-                                      <m:t>𝑥</m:t>
-                                    </m:r>
-                                  </m:e>
-                                  <m:sub>
-                                    <m:r>
-                                      <a:rPr lang="en-US" altLang="zh-CN" sz="1258" i="1">
-                                        <a:latin typeface="Cambria Math" panose="02040503050406030204" pitchFamily="18" charset="0"/>
-                                        <a:ea typeface="Cambria Math" panose="02040503050406030204" pitchFamily="18" charset="0"/>
-                                      </a:rPr>
-                                      <m:t>𝑖</m:t>
-                                    </m:r>
-                                  </m:sub>
-                                </m:sSub>
-                              </m:e>
-                            </m:nary>
-                          </m:num>
-                          <m:den>
-                            <m:nary>
-                              <m:naryPr>
-                                <m:chr m:val="∑"/>
-                                <m:limLoc m:val="subSup"/>
-                                <m:ctrlPr>
-                                  <a:rPr lang="en-US" altLang="zh-CN" sz="1258" i="1">
-                                    <a:latin typeface="Cambria Math" panose="02040503050406030204" pitchFamily="18" charset="0"/>
-                                    <a:ea typeface="Cambria Math" panose="02040503050406030204" pitchFamily="18" charset="0"/>
-                                  </a:rPr>
-                                </m:ctrlPr>
-                              </m:naryPr>
-                              <m:sub>
-                                <m:r>
-                                  <m:rPr>
-                                    <m:brk m:alnAt="25"/>
-                                  </m:rPr>
-                                  <a:rPr lang="en-US" altLang="zh-CN" sz="1258" i="1">
-                                    <a:latin typeface="Cambria Math" panose="02040503050406030204" pitchFamily="18" charset="0"/>
-                                    <a:ea typeface="Cambria Math" panose="02040503050406030204" pitchFamily="18" charset="0"/>
-                                  </a:rPr>
-                                  <m:t>𝑖</m:t>
-                                </m:r>
-                                <m:r>
-                                  <a:rPr lang="en-US" altLang="zh-CN" sz="1258" i="1">
-                                    <a:latin typeface="Cambria Math" panose="02040503050406030204" pitchFamily="18" charset="0"/>
-                                    <a:ea typeface="Cambria Math" panose="02040503050406030204" pitchFamily="18" charset="0"/>
-                                  </a:rPr>
-                                  <m:t>=1</m:t>
-                                </m:r>
-                              </m:sub>
-                              <m:sup>
-                                <m:r>
-                                  <a:rPr lang="en-US" altLang="zh-CN" sz="1258" i="1">
-                                    <a:latin typeface="Cambria Math" panose="02040503050406030204" pitchFamily="18" charset="0"/>
-                                    <a:ea typeface="Cambria Math" panose="02040503050406030204" pitchFamily="18" charset="0"/>
-                                  </a:rPr>
-                                  <m:t>𝑁</m:t>
-                                </m:r>
-                              </m:sup>
-                              <m:e>
-                                <m:sSub>
-                                  <m:sSubPr>
-                                    <m:ctrlPr>
-                                      <a:rPr lang="en-US" altLang="zh-CN" sz="1258" i="1">
-                                        <a:latin typeface="Cambria Math" panose="02040503050406030204" pitchFamily="18" charset="0"/>
-                                        <a:ea typeface="Cambria Math" panose="02040503050406030204" pitchFamily="18" charset="0"/>
-                                      </a:rPr>
-                                    </m:ctrlPr>
-                                  </m:sSubPr>
-                                  <m:e>
-                                    <m:r>
-                                      <a:rPr lang="en-US" altLang="zh-CN" sz="1258" i="1">
-                                        <a:latin typeface="Cambria Math" panose="02040503050406030204" pitchFamily="18" charset="0"/>
-                                        <a:ea typeface="Cambria Math" panose="02040503050406030204" pitchFamily="18" charset="0"/>
-                                      </a:rPr>
-                                      <m:t>𝛼</m:t>
-                                    </m:r>
-                                  </m:e>
-                                  <m:sub>
-                                    <m:r>
-                                      <a:rPr lang="en-US" altLang="zh-CN" sz="1258" i="1">
-                                        <a:latin typeface="Cambria Math" panose="02040503050406030204" pitchFamily="18" charset="0"/>
-                                        <a:ea typeface="Cambria Math" panose="02040503050406030204" pitchFamily="18" charset="0"/>
-                                      </a:rPr>
-                                      <m:t>𝑖</m:t>
-                                    </m:r>
-                                    <m:r>
-                                      <a:rPr lang="en-US" altLang="zh-CN" sz="1258" i="1">
-                                        <a:latin typeface="Cambria Math" panose="02040503050406030204" pitchFamily="18" charset="0"/>
-                                        <a:ea typeface="Cambria Math" panose="02040503050406030204" pitchFamily="18" charset="0"/>
-                                      </a:rPr>
-                                      <m:t>,</m:t>
-                                    </m:r>
-                                    <m:r>
-                                      <a:rPr lang="en-US" altLang="zh-CN" sz="1258" i="1">
-                                        <a:latin typeface="Cambria Math" panose="02040503050406030204" pitchFamily="18" charset="0"/>
-                                        <a:ea typeface="Cambria Math" panose="02040503050406030204" pitchFamily="18" charset="0"/>
-                                      </a:rPr>
-                                      <m:t>𝑚</m:t>
-                                    </m:r>
-                                  </m:sub>
-                                </m:sSub>
-                              </m:e>
-                            </m:nary>
-                          </m:den>
-                        </m:f>
-                      </m:oMath>
-                    </m:oMathPara>
-                  </a14:m>
-                  <a:endParaRPr lang="zh-CN" altLang="en-US" sz="1258" dirty="0">
-                    <a:latin typeface="宋体" panose="02010600030101010101" pitchFamily="2" charset="-122"/>
-                    <a:ea typeface="宋体" panose="02010600030101010101" pitchFamily="2" charset="-122"/>
-                  </a:endParaRPr>
-                </a:p>
-              </p:txBody>
-            </p:sp>
-          </mc:Choice>
-          <mc:Fallback xmlns="">
-            <p:sp>
-              <p:nvSpPr>
-                <p:cNvPr id="164" name="文本框 163">
-                  <a:extLst>
-                    <a:ext uri="{FF2B5EF4-FFF2-40B4-BE49-F238E27FC236}">
-                      <a16:creationId xmlns:a16="http://schemas.microsoft.com/office/drawing/2014/main" id="{94C85D1E-E9CF-40B8-8FA0-78E9C04C3A26}"/>
-                    </a:ext>
-                  </a:extLst>
-                </p:cNvPr>
-                <p:cNvSpPr txBox="1">
-                  <a:spLocks noRot="1" noChangeAspect="1" noMove="1" noResize="1" noEditPoints="1" noAdjustHandles="1" noChangeArrowheads="1" noChangeShapeType="1" noTextEdit="1"/>
-                </p:cNvSpPr>
-                <p:nvPr/>
-              </p:nvSpPr>
-              <p:spPr>
-                <a:xfrm>
-                  <a:off x="4289258" y="3771053"/>
-                  <a:ext cx="1409937" cy="590594"/>
-                </a:xfrm>
-                <a:prstGeom prst="rect">
-                  <a:avLst/>
-                </a:prstGeom>
-                <a:blipFill>
-                  <a:blip r:embed="rId35"/>
-                  <a:stretch>
-                    <a:fillRect t="-47253" b="-72527"/>
-                  </a:stretch>
-                </a:blipFill>
-              </p:spPr>
-              <p:txBody>
-                <a:bodyPr/>
-                <a:lstStyle/>
-                <a:p>
-                  <a:r>
-                    <a:rPr lang="zh-CN" altLang="en-US">
-                      <a:noFill/>
-                    </a:rPr>
-                    <a:t> </a:t>
-                  </a:r>
-                </a:p>
-              </p:txBody>
-            </p:sp>
-          </mc:Fallback>
-        </mc:AlternateContent>
-      </p:grpSp>
+                </a:endParaRPr>
+              </a:p>
+            </p:txBody>
+          </p:sp>
+        </mc:Choice>
+        <mc:Fallback xmlns="">
+          <p:sp>
+            <p:nvSpPr>
+              <p:cNvPr id="164" name="文本框 163">
+                <a:extLst>
+                  <a:ext uri="{FF2B5EF4-FFF2-40B4-BE49-F238E27FC236}">
+                    <a16:creationId xmlns:a16="http://schemas.microsoft.com/office/drawing/2014/main" id="{94C85D1E-E9CF-40B8-8FA0-78E9C04C3A26}"/>
+                  </a:ext>
+                </a:extLst>
+              </p:cNvPr>
+              <p:cNvSpPr txBox="1">
+                <a:spLocks noRot="1" noChangeAspect="1" noMove="1" noResize="1" noEditPoints="1" noAdjustHandles="1" noChangeArrowheads="1" noChangeShapeType="1" noTextEdit="1"/>
+              </p:cNvSpPr>
+              <p:nvPr/>
+            </p:nvSpPr>
+            <p:spPr>
+              <a:xfrm>
+                <a:off x="2320056" y="3865994"/>
+                <a:ext cx="1477934" cy="553092"/>
+              </a:xfrm>
+              <a:prstGeom prst="rect">
+                <a:avLst/>
+              </a:prstGeom>
+              <a:blipFill>
+                <a:blip r:embed="rId4"/>
+                <a:stretch>
+                  <a:fillRect t="-47253" b="-72527"/>
+                </a:stretch>
+              </a:blipFill>
+            </p:spPr>
+            <p:txBody>
+              <a:bodyPr/>
+              <a:lstStyle/>
+              <a:p>
+                <a:r>
+                  <a:rPr lang="zh-CN" altLang="en-US">
+                    <a:noFill/>
+                  </a:rPr>
+                  <a:t> </a:t>
+                </a:r>
+              </a:p>
+            </p:txBody>
+          </p:sp>
+        </mc:Fallback>
+      </mc:AlternateContent>
       <p:sp>
         <p:nvSpPr>
           <p:cNvPr id="166" name="文本框 165">
@@ -5215,8 +4572,8 @@
         </p:nvSpPr>
         <p:spPr>
           <a:xfrm>
-            <a:off x="3613795" y="4483442"/>
-            <a:ext cx="1835687" cy="292262"/>
+            <a:off x="3007864" y="4609938"/>
+            <a:ext cx="2528256" cy="285912"/>
           </a:xfrm>
           <a:prstGeom prst="rect">
             <a:avLst/>
@@ -5229,6 +4586,34 @@
           </a:bodyPr>
           <a:lstStyle/>
           <a:p>
+            <a:r>
+              <a:rPr lang="zh-CN" altLang="en-US" sz="1258" dirty="0">
+                <a:latin typeface="宋体" panose="02010600030101010101" pitchFamily="2" charset="-122"/>
+                <a:ea typeface="宋体" panose="02010600030101010101" pitchFamily="2" charset="-122"/>
+              </a:rPr>
+              <a:t>（</a:t>
+            </a:r>
+            <a:r>
+              <a:rPr lang="en-US" altLang="zh-CN" sz="1258" dirty="0">
+                <a:latin typeface="宋体" panose="02010600030101010101" pitchFamily="2" charset="-122"/>
+                <a:ea typeface="宋体" panose="02010600030101010101" pitchFamily="2" charset="-122"/>
+              </a:rPr>
+              <a:t>c</a:t>
+            </a:r>
+            <a:r>
+              <a:rPr lang="zh-CN" altLang="en-US" sz="1258" dirty="0">
+                <a:latin typeface="宋体" panose="02010600030101010101" pitchFamily="2" charset="-122"/>
+                <a:ea typeface="宋体" panose="02010600030101010101" pitchFamily="2" charset="-122"/>
+              </a:rPr>
+              <a:t>）</a:t>
+            </a:r>
+            <a:r>
+              <a:rPr lang="en-US" altLang="zh-CN" sz="1258" dirty="0">
+                <a:latin typeface="宋体" panose="02010600030101010101" pitchFamily="2" charset="-122"/>
+                <a:ea typeface="宋体" panose="02010600030101010101" pitchFamily="2" charset="-122"/>
+              </a:rPr>
+              <a:t>MCUC</a:t>
+            </a:r>
             <a:r>
               <a:rPr lang="zh-CN" altLang="en-US" sz="1258" dirty="0">
                 <a:latin typeface="宋体" panose="02010600030101010101" pitchFamily="2" charset="-122"/>
@@ -5256,7 +4641,7 @@
         </p:nvCxnSpPr>
         <p:spPr>
           <a:xfrm>
-            <a:off x="4053886" y="2570918"/>
+            <a:off x="3988236" y="2731545"/>
             <a:ext cx="578437" cy="7191"/>
           </a:xfrm>
           <a:prstGeom prst="straightConnector1">
@@ -5300,7 +4685,7 @@
         </p:nvCxnSpPr>
         <p:spPr>
           <a:xfrm flipH="1" flipV="1">
-            <a:off x="3976771" y="3903939"/>
+            <a:off x="3911121" y="4064566"/>
             <a:ext cx="723140" cy="1"/>
           </a:xfrm>
           <a:prstGeom prst="straightConnector1">
@@ -5344,9 +4729,9 @@
           <p:nvPr/>
         </p:nvCxnSpPr>
         <p:spPr>
-          <a:xfrm flipH="1">
-            <a:off x="2967451" y="919648"/>
-            <a:ext cx="1520" cy="1115635"/>
+          <a:xfrm>
+            <a:off x="2990859" y="1080275"/>
+            <a:ext cx="8160" cy="1115635"/>
           </a:xfrm>
           <a:prstGeom prst="straightConnector1">
             <a:avLst/>
@@ -5373,8 +4758,8 @@
           </a:fontRef>
         </p:style>
       </p:cxnSp>
-      <mc:AlternateContent xmlns:mc="http://schemas.openxmlformats.org/markup-compatibility/2006">
-        <mc:Choice xmlns:a14="http://schemas.microsoft.com/office/drawing/2010/main" Requires="a14">
+      <mc:AlternateContent xmlns:mc="http://schemas.openxmlformats.org/markup-compatibility/2006" xmlns:a14="http://schemas.microsoft.com/office/drawing/2010/main">
+        <mc:Choice Requires="a14">
           <p:sp>
             <p:nvSpPr>
               <p:cNvPr id="189" name="文本框 188">
@@ -5389,7 +4774,7 @@
             </p:nvSpPr>
             <p:spPr>
               <a:xfrm>
-                <a:off x="2984746" y="1602576"/>
+                <a:off x="2919096" y="1763203"/>
                 <a:ext cx="918841" cy="285912"/>
               </a:xfrm>
               <a:prstGeom prst="rect">
@@ -5432,7 +4817,7 @@
             </p:txBody>
           </p:sp>
         </mc:Choice>
-        <mc:Fallback>
+        <mc:Fallback xmlns="">
           <p:sp>
             <p:nvSpPr>
               <p:cNvPr id="189" name="文本框 188">
@@ -5449,16 +4834,16 @@
             </p:nvSpPr>
             <p:spPr>
               <a:xfrm>
-                <a:off x="2984746" y="1602576"/>
+                <a:off x="2919096" y="1763203"/>
                 <a:ext cx="918841" cy="285912"/>
               </a:xfrm>
               <a:prstGeom prst="rect">
                 <a:avLst/>
               </a:prstGeom>
               <a:blipFill>
-                <a:blip r:embed="rId36"/>
+                <a:blip r:embed="rId5"/>
                 <a:stretch>
-                  <a:fillRect l="-667" t="-2128" b="-14894"/>
+                  <a:fillRect l="-662" t="-2128" b="-17021"/>
                 </a:stretch>
               </a:blipFill>
             </p:spPr>
@@ -5491,21 +4876,19 @@
         </p:nvSpPr>
         <p:spPr>
           <a:xfrm>
-            <a:off x="4425944" y="82720"/>
+            <a:off x="4360294" y="243347"/>
             <a:ext cx="1806670" cy="1423181"/>
           </a:xfrm>
           <a:prstGeom prst="roundRect">
             <a:avLst>
-              <a:gd name="adj" fmla="val 24586"/>
+              <a:gd name="adj" fmla="val 6135"/>
             </a:avLst>
           </a:prstGeom>
           <a:solidFill>
-            <a:srgbClr val="E29C9E"/>
+            <a:srgbClr val="F2D2D3"/>
           </a:solidFill>
           <a:ln>
-            <a:solidFill>
-              <a:srgbClr val="C09090"/>
-            </a:solidFill>
+            <a:noFill/>
           </a:ln>
         </p:spPr>
         <p:style>
@@ -5547,7 +4930,7 @@
         </p:nvSpPr>
         <p:spPr>
           <a:xfrm>
-            <a:off x="4587254" y="419096"/>
+            <a:off x="4521604" y="579723"/>
             <a:ext cx="1506818" cy="292262"/>
           </a:xfrm>
           <a:prstGeom prst="rect">
@@ -5587,7 +4970,7 @@
             </p:nvSpPr>
             <p:spPr>
               <a:xfrm>
-                <a:off x="4632323" y="709636"/>
+                <a:off x="4566673" y="870263"/>
                 <a:ext cx="1551263" cy="644970"/>
               </a:xfrm>
               <a:prstGeom prst="rect">
@@ -5787,14 +5170,14 @@
             </p:nvSpPr>
             <p:spPr>
               <a:xfrm>
-                <a:off x="4632323" y="709636"/>
+                <a:off x="4566673" y="870263"/>
                 <a:ext cx="1551263" cy="644970"/>
               </a:xfrm>
               <a:prstGeom prst="rect">
                 <a:avLst/>
               </a:prstGeom>
               <a:blipFill>
-                <a:blip r:embed="rId37"/>
+                <a:blip r:embed="rId6"/>
                 <a:stretch>
                   <a:fillRect/>
                 </a:stretch>
@@ -5831,7 +5214,7 @@
         </p:nvCxnSpPr>
         <p:spPr>
           <a:xfrm>
-            <a:off x="3189994" y="3034056"/>
+            <a:off x="3124344" y="3194683"/>
             <a:ext cx="0" cy="373114"/>
           </a:xfrm>
           <a:prstGeom prst="straightConnector1">
@@ -5874,16 +5257,16 @@
         </p:nvSpPr>
         <p:spPr>
           <a:xfrm>
-            <a:off x="4653167" y="2115414"/>
+            <a:off x="4587517" y="2276041"/>
             <a:ext cx="1659344" cy="981129"/>
           </a:xfrm>
           <a:prstGeom prst="roundRect">
             <a:avLst>
-              <a:gd name="adj" fmla="val 24586"/>
+              <a:gd name="adj" fmla="val 6902"/>
             </a:avLst>
           </a:prstGeom>
           <a:solidFill>
-            <a:srgbClr val="F3CCF9"/>
+            <a:srgbClr val="DBCAE0"/>
           </a:solidFill>
           <a:ln>
             <a:noFill/>
@@ -5928,7 +5311,7 @@
         </p:nvSpPr>
         <p:spPr>
           <a:xfrm>
-            <a:off x="5075558" y="2280475"/>
+            <a:off x="5009908" y="2441102"/>
             <a:ext cx="849080" cy="292262"/>
           </a:xfrm>
           <a:prstGeom prst="rect">
@@ -5968,7 +5351,7 @@
             </p:nvSpPr>
             <p:spPr>
               <a:xfrm>
-                <a:off x="4670602" y="2639782"/>
+                <a:off x="4604952" y="2800409"/>
                 <a:ext cx="1584684" cy="301165"/>
               </a:xfrm>
               <a:prstGeom prst="rect">
@@ -6164,16 +5547,16 @@
             </p:nvSpPr>
             <p:spPr>
               <a:xfrm>
-                <a:off x="4670602" y="2639782"/>
+                <a:off x="4604952" y="2800409"/>
                 <a:ext cx="1584684" cy="301165"/>
               </a:xfrm>
               <a:prstGeom prst="rect">
                 <a:avLst/>
               </a:prstGeom>
               <a:blipFill>
-                <a:blip r:embed="rId38"/>
+                <a:blip r:embed="rId7"/>
                 <a:stretch>
-                  <a:fillRect b="-2041"/>
+                  <a:fillRect/>
                 </a:stretch>
               </a:blipFill>
             </p:spPr>
@@ -6208,7 +5591,7 @@
         </p:nvCxnSpPr>
         <p:spPr>
           <a:xfrm>
-            <a:off x="5506766" y="3086076"/>
+            <a:off x="5441116" y="3246703"/>
             <a:ext cx="7679" cy="358496"/>
           </a:xfrm>
           <a:prstGeom prst="straightConnector1">
@@ -6252,7 +5635,7 @@
         </p:nvCxnSpPr>
         <p:spPr>
           <a:xfrm flipV="1">
-            <a:off x="5322063" y="1498523"/>
+            <a:off x="5256413" y="1659150"/>
             <a:ext cx="0" cy="536760"/>
           </a:xfrm>
           <a:prstGeom prst="straightConnector1">
@@ -6291,61 +5674,17 @@
           </p:cNvPr>
           <p:cNvCxnSpPr>
             <a:cxnSpLocks/>
-            <a:stCxn id="8" idx="1"/>
+            <a:stCxn id="3" idx="0"/>
             <a:endCxn id="26" idx="1"/>
           </p:cNvCxnSpPr>
           <p:nvPr/>
         </p:nvCxnSpPr>
         <p:spPr>
           <a:xfrm rot="5400000" flipH="1" flipV="1">
-            <a:off x="1110696" y="386967"/>
-            <a:ext cx="586487" cy="1126632"/>
+            <a:off x="1113194" y="736008"/>
+            <a:ext cx="706753" cy="870070"/>
           </a:xfrm>
           <a:prstGeom prst="bentConnector2">
-            <a:avLst/>
-          </a:prstGeom>
-          <a:ln w="19050">
-            <a:solidFill>
-              <a:schemeClr val="tx1"/>
-            </a:solidFill>
-            <a:tailEnd type="triangle"/>
-          </a:ln>
-        </p:spPr>
-        <p:style>
-          <a:lnRef idx="1">
-            <a:schemeClr val="accent1"/>
-          </a:lnRef>
-          <a:fillRef idx="0">
-            <a:schemeClr val="accent1"/>
-          </a:fillRef>
-          <a:effectRef idx="0">
-            <a:schemeClr val="accent1"/>
-          </a:effectRef>
-          <a:fontRef idx="minor">
-            <a:schemeClr val="tx1"/>
-          </a:fontRef>
-        </p:style>
-      </p:cxnSp>
-      <p:cxnSp>
-        <p:nvCxnSpPr>
-          <p:cNvPr id="220" name="直接箭头连接符 219">
-            <a:extLst>
-              <a:ext uri="{FF2B5EF4-FFF2-40B4-BE49-F238E27FC236}">
-                <a16:creationId xmlns:a16="http://schemas.microsoft.com/office/drawing/2014/main" id="{BE95F5BB-C78F-42CF-BB39-CB945FCCA8BC}"/>
-              </a:ext>
-            </a:extLst>
-          </p:cNvPr>
-          <p:cNvCxnSpPr>
-            <a:cxnSpLocks/>
-          </p:cNvCxnSpPr>
-          <p:nvPr/>
-        </p:nvCxnSpPr>
-        <p:spPr>
-          <a:xfrm flipV="1">
-            <a:off x="1625887" y="2578110"/>
-            <a:ext cx="597454" cy="4272"/>
-          </a:xfrm>
-          <a:prstGeom prst="straightConnector1">
             <a:avLst/>
           </a:prstGeom>
           <a:ln w="19050">
@@ -6386,8 +5725,8 @@
         </p:nvCxnSpPr>
         <p:spPr>
           <a:xfrm>
-            <a:off x="6237651" y="805857"/>
-            <a:ext cx="782911" cy="0"/>
+            <a:off x="6172001" y="966484"/>
+            <a:ext cx="716479" cy="0"/>
           </a:xfrm>
           <a:prstGeom prst="straightConnector1">
             <a:avLst/>
@@ -6414,370 +5753,349 @@
           </a:fontRef>
         </p:style>
       </p:cxnSp>
-      <p:grpSp>
-        <p:nvGrpSpPr>
-          <p:cNvPr id="244" name="组合 243">
+      <p:sp>
+        <p:nvSpPr>
+          <p:cNvPr id="230" name="圆角矩形 77">
             <a:extLst>
               <a:ext uri="{FF2B5EF4-FFF2-40B4-BE49-F238E27FC236}">
-                <a16:creationId xmlns:a16="http://schemas.microsoft.com/office/drawing/2014/main" id="{7440683A-377F-42C4-9544-F2E711FF90D0}"/>
+                <a16:creationId xmlns:a16="http://schemas.microsoft.com/office/drawing/2014/main" id="{38A8B244-08CE-43B9-9009-86CF92B27AD3}"/>
               </a:ext>
             </a:extLst>
           </p:cNvPr>
-          <p:cNvGrpSpPr/>
+          <p:cNvSpPr/>
           <p:nvPr/>
-        </p:nvGrpSpPr>
-        <p:grpSpPr>
+        </p:nvSpPr>
+        <p:spPr>
           <a:xfrm>
-            <a:off x="7020561" y="315293"/>
-            <a:ext cx="2129386" cy="981129"/>
-            <a:chOff x="7161560" y="1347682"/>
-            <a:chExt cx="2031417" cy="935990"/>
+            <a:off x="6888480" y="464372"/>
+            <a:ext cx="2110128" cy="981129"/>
           </a:xfrm>
-        </p:grpSpPr>
-        <p:sp>
-          <p:nvSpPr>
-            <p:cNvPr id="230" name="圆角矩形 77">
-              <a:extLst>
-                <a:ext uri="{FF2B5EF4-FFF2-40B4-BE49-F238E27FC236}">
-                  <a16:creationId xmlns:a16="http://schemas.microsoft.com/office/drawing/2014/main" id="{38A8B244-08CE-43B9-9009-86CF92B27AD3}"/>
-                </a:ext>
-              </a:extLst>
-            </p:cNvPr>
-            <p:cNvSpPr/>
-            <p:nvPr/>
-          </p:nvSpPr>
-          <p:spPr>
-            <a:xfrm>
-              <a:off x="7161560" y="1347682"/>
-              <a:ext cx="2013045" cy="935990"/>
-            </a:xfrm>
-            <a:prstGeom prst="roundRect">
-              <a:avLst>
-                <a:gd name="adj" fmla="val 24586"/>
-              </a:avLst>
-            </a:prstGeom>
-            <a:solidFill>
-              <a:srgbClr val="D3E8ED"/>
-            </a:solidFill>
-            <a:ln>
+          <a:prstGeom prst="roundRect">
+            <a:avLst>
+              <a:gd name="adj" fmla="val 5468"/>
+            </a:avLst>
+          </a:prstGeom>
+          <a:solidFill>
+            <a:srgbClr val="B5D9E1"/>
+          </a:solidFill>
+          <a:ln>
+            <a:noFill/>
+          </a:ln>
+        </p:spPr>
+        <p:style>
+          <a:lnRef idx="2">
+            <a:schemeClr val="accent1">
+              <a:lumMod val="75000"/>
+            </a:schemeClr>
+          </a:lnRef>
+          <a:fillRef idx="1">
+            <a:schemeClr val="accent1"/>
+          </a:fillRef>
+          <a:effectRef idx="0">
+            <a:srgbClr val="FFFFFF"/>
+          </a:effectRef>
+          <a:fontRef idx="minor">
+            <a:schemeClr val="lt1"/>
+          </a:fontRef>
+        </p:style>
+        <p:txBody>
+          <a:bodyPr rtlCol="0" anchor="ctr"/>
+          <a:lstStyle/>
+          <a:p>
+            <a:pPr algn="ctr"/>
+            <a:endParaRPr lang="zh-CN" altLang="en-US" sz="1894" b="1"/>
+          </a:p>
+        </p:txBody>
+      </p:sp>
+      <p:sp>
+        <p:nvSpPr>
+          <p:cNvPr id="229" name="文本框 228">
+            <a:extLst>
+              <a:ext uri="{FF2B5EF4-FFF2-40B4-BE49-F238E27FC236}">
+                <a16:creationId xmlns:a16="http://schemas.microsoft.com/office/drawing/2014/main" id="{0357E31D-4194-4F03-817F-2AEE675740EC}"/>
+              </a:ext>
+            </a:extLst>
+          </p:cNvPr>
+          <p:cNvSpPr txBox="1"/>
+          <p:nvPr/>
+        </p:nvSpPr>
+        <p:spPr>
+          <a:xfrm>
+            <a:off x="7310048" y="579723"/>
+            <a:ext cx="1177949" cy="292262"/>
+          </a:xfrm>
+          <a:prstGeom prst="rect">
+            <a:avLst/>
+          </a:prstGeom>
+          <a:noFill/>
+        </p:spPr>
+        <p:txBody>
+          <a:bodyPr wrap="none" rtlCol="0">
+            <a:spAutoFit/>
+          </a:bodyPr>
+          <a:lstStyle/>
+          <a:p>
+            <a:pPr algn="ctr"/>
+            <a:r>
+              <a:rPr lang="zh-CN" altLang="en-US" sz="1258" dirty="0">
+                <a:latin typeface="宋体" panose="02010600030101010101" pitchFamily="2" charset="-122"/>
+                <a:ea typeface="宋体" panose="02010600030101010101" pitchFamily="2" charset="-122"/>
+              </a:rPr>
+              <a:t>异常判别模块</a:t>
+            </a:r>
+            <a:endParaRPr lang="en-US" altLang="zh-CN" sz="1258" dirty="0">
+              <a:latin typeface="宋体" panose="02010600030101010101" pitchFamily="2" charset="-122"/>
+              <a:ea typeface="宋体" panose="02010600030101010101" pitchFamily="2" charset="-122"/>
+            </a:endParaRPr>
+          </a:p>
+        </p:txBody>
+      </p:sp>
+      <mc:AlternateContent xmlns:mc="http://schemas.openxmlformats.org/markup-compatibility/2006" xmlns:a14="http://schemas.microsoft.com/office/drawing/2010/main">
+        <mc:Choice Requires="a14">
+          <p:sp>
+            <p:nvSpPr>
+              <p:cNvPr id="234" name="文本框 233">
+                <a:extLst>
+                  <a:ext uri="{FF2B5EF4-FFF2-40B4-BE49-F238E27FC236}">
+                    <a16:creationId xmlns:a16="http://schemas.microsoft.com/office/drawing/2014/main" id="{1121D48C-7396-4F16-8A25-2B095CFDB28A}"/>
+                  </a:ext>
+                </a:extLst>
+              </p:cNvPr>
+              <p:cNvSpPr txBox="1"/>
+              <p:nvPr/>
+            </p:nvSpPr>
+            <p:spPr>
+              <a:xfrm>
+                <a:off x="6916691" y="850944"/>
+                <a:ext cx="2077124" cy="534295"/>
+              </a:xfrm>
+              <a:prstGeom prst="rect">
+                <a:avLst/>
+              </a:prstGeom>
               <a:noFill/>
-            </a:ln>
-          </p:spPr>
-          <p:style>
-            <a:lnRef idx="2">
-              <a:schemeClr val="accent1">
-                <a:lumMod val="75000"/>
-              </a:schemeClr>
-            </a:lnRef>
-            <a:fillRef idx="1">
-              <a:schemeClr val="accent1"/>
-            </a:fillRef>
-            <a:effectRef idx="0">
-              <a:srgbClr val="FFFFFF"/>
-            </a:effectRef>
-            <a:fontRef idx="minor">
-              <a:schemeClr val="lt1"/>
-            </a:fontRef>
-          </p:style>
-          <p:txBody>
-            <a:bodyPr rtlCol="0" anchor="ctr"/>
-            <a:lstStyle/>
-            <a:p>
-              <a:pPr algn="ctr"/>
-              <a:endParaRPr lang="zh-CN" altLang="en-US" sz="1894" b="1"/>
-            </a:p>
-          </p:txBody>
-        </p:sp>
-        <p:sp>
-          <p:nvSpPr>
-            <p:cNvPr id="229" name="文本框 228">
-              <a:extLst>
-                <a:ext uri="{FF2B5EF4-FFF2-40B4-BE49-F238E27FC236}">
-                  <a16:creationId xmlns:a16="http://schemas.microsoft.com/office/drawing/2014/main" id="{0357E31D-4194-4F03-817F-2AEE675740EC}"/>
-                </a:ext>
-              </a:extLst>
-            </p:cNvPr>
-            <p:cNvSpPr txBox="1"/>
-            <p:nvPr/>
-          </p:nvSpPr>
-          <p:spPr>
-            <a:xfrm>
-              <a:off x="7586677" y="1453201"/>
-              <a:ext cx="1123754" cy="278816"/>
-            </a:xfrm>
-            <a:prstGeom prst="rect">
-              <a:avLst/>
-            </a:prstGeom>
-            <a:noFill/>
-          </p:spPr>
-          <p:txBody>
-            <a:bodyPr wrap="none" rtlCol="0">
-              <a:spAutoFit/>
-            </a:bodyPr>
-            <a:lstStyle/>
-            <a:p>
-              <a:pPr algn="ctr"/>
-              <a:r>
-                <a:rPr lang="zh-CN" altLang="en-US" sz="1258" dirty="0">
+            </p:spPr>
+            <p:txBody>
+              <a:bodyPr wrap="none" rtlCol="0">
+                <a:spAutoFit/>
+              </a:bodyPr>
+              <a:lstStyle/>
+              <a:p>
+                <a:pPr algn="ctr"/>
+                <a14:m>
+                  <m:oMathPara xmlns:m="http://schemas.openxmlformats.org/officeDocument/2006/math">
+                    <m:oMathParaPr>
+                      <m:jc m:val="centerGroup"/>
+                    </m:oMathParaPr>
+                    <m:oMath xmlns:m="http://schemas.openxmlformats.org/officeDocument/2006/math">
+                      <m:sSub>
+                        <m:sSubPr>
+                          <m:ctrlPr>
+                            <a:rPr lang="en-US" altLang="zh-CN" sz="1258" i="1">
+                              <a:latin typeface="Cambria Math" panose="02040503050406030204" pitchFamily="18" charset="0"/>
+                              <a:ea typeface="宋体" panose="02010600030101010101" pitchFamily="2" charset="-122"/>
+                            </a:rPr>
+                          </m:ctrlPr>
+                        </m:sSubPr>
+                        <m:e>
+                          <m:acc>
+                            <m:accPr>
+                              <m:chr m:val="̂"/>
+                              <m:ctrlPr>
+                                <a:rPr lang="en-US" altLang="zh-CN" sz="1258" i="1">
+                                  <a:latin typeface="Cambria Math" panose="02040503050406030204" pitchFamily="18" charset="0"/>
+                                  <a:ea typeface="宋体" panose="02010600030101010101" pitchFamily="2" charset="-122"/>
+                                </a:rPr>
+                              </m:ctrlPr>
+                            </m:accPr>
+                            <m:e>
+                              <m:r>
+                                <a:rPr lang="en-US" altLang="zh-CN" sz="1258" i="1">
+                                  <a:latin typeface="Cambria Math" panose="02040503050406030204" pitchFamily="18" charset="0"/>
+                                  <a:ea typeface="宋体" panose="02010600030101010101" pitchFamily="2" charset="-122"/>
+                                </a:rPr>
+                                <m:t>𝑦</m:t>
+                              </m:r>
+                            </m:e>
+                          </m:acc>
+                        </m:e>
+                        <m:sub>
+                          <m:r>
+                            <a:rPr lang="en-US" altLang="zh-CN" sz="1258" i="1">
+                              <a:latin typeface="Cambria Math" panose="02040503050406030204" pitchFamily="18" charset="0"/>
+                              <a:ea typeface="宋体" panose="02010600030101010101" pitchFamily="2" charset="-122"/>
+                            </a:rPr>
+                            <m:t>𝑖</m:t>
+                          </m:r>
+                        </m:sub>
+                      </m:sSub>
+                      <m:r>
+                        <a:rPr lang="en-US" altLang="zh-CN" sz="1258" i="1">
+                          <a:latin typeface="Cambria Math" panose="02040503050406030204" pitchFamily="18" charset="0"/>
+                          <a:ea typeface="宋体" panose="02010600030101010101" pitchFamily="2" charset="-122"/>
+                        </a:rPr>
+                        <m:t>=</m:t>
+                      </m:r>
+                      <m:d>
+                        <m:dPr>
+                          <m:begChr m:val="{"/>
+                          <m:endChr m:val=""/>
+                          <m:ctrlPr>
+                            <a:rPr lang="en-US" altLang="zh-CN" sz="1258" i="1">
+                              <a:latin typeface="Cambria Math" panose="02040503050406030204" pitchFamily="18" charset="0"/>
+                              <a:ea typeface="宋体" panose="02010600030101010101" pitchFamily="2" charset="-122"/>
+                            </a:rPr>
+                          </m:ctrlPr>
+                        </m:dPr>
+                        <m:e>
+                          <m:eqArr>
+                            <m:eqArrPr>
+                              <m:ctrlPr>
+                                <a:rPr lang="en-US" altLang="zh-CN" sz="1258" i="1">
+                                  <a:latin typeface="Cambria Math" panose="02040503050406030204" pitchFamily="18" charset="0"/>
+                                  <a:ea typeface="宋体" panose="02010600030101010101" pitchFamily="2" charset="-122"/>
+                                </a:rPr>
+                              </m:ctrlPr>
+                            </m:eqArrPr>
+                            <m:e>
+                              <m:r>
+                                <a:rPr lang="en-US" altLang="zh-CN" sz="1258" i="1">
+                                  <a:latin typeface="Cambria Math" panose="02040503050406030204" pitchFamily="18" charset="0"/>
+                                  <a:ea typeface="宋体" panose="02010600030101010101" pitchFamily="2" charset="-122"/>
+                                </a:rPr>
+                                <m:t>𝐴𝑏𝑛𝑜𝑟𝑚𝑎𝑙</m:t>
+                              </m:r>
+                              <m:r>
+                                <a:rPr lang="en-US" altLang="zh-CN" sz="1258" i="1">
+                                  <a:latin typeface="Cambria Math" panose="02040503050406030204" pitchFamily="18" charset="0"/>
+                                  <a:ea typeface="宋体" panose="02010600030101010101" pitchFamily="2" charset="-122"/>
+                                </a:rPr>
+                                <m:t>, </m:t>
+                              </m:r>
+                              <m:sSub>
+                                <m:sSubPr>
+                                  <m:ctrlPr>
+                                    <a:rPr lang="en-US" altLang="zh-CN" sz="1258" i="1">
+                                      <a:latin typeface="Cambria Math" panose="02040503050406030204" pitchFamily="18" charset="0"/>
+                                      <a:ea typeface="宋体" panose="02010600030101010101" pitchFamily="2" charset="-122"/>
+                                    </a:rPr>
+                                  </m:ctrlPr>
+                                </m:sSubPr>
+                                <m:e>
+                                  <m:r>
+                                    <a:rPr lang="en-US" altLang="zh-CN" sz="1258" i="1">
+                                      <a:latin typeface="Cambria Math" panose="02040503050406030204" pitchFamily="18" charset="0"/>
+                                      <a:ea typeface="宋体" panose="02010600030101010101" pitchFamily="2" charset="-122"/>
+                                    </a:rPr>
+                                    <m:t>𝑠</m:t>
+                                  </m:r>
+                                </m:e>
+                                <m:sub>
+                                  <m:r>
+                                    <a:rPr lang="en-US" altLang="zh-CN" sz="1258" i="1">
+                                      <a:latin typeface="Cambria Math" panose="02040503050406030204" pitchFamily="18" charset="0"/>
+                                      <a:ea typeface="宋体" panose="02010600030101010101" pitchFamily="2" charset="-122"/>
+                                    </a:rPr>
+                                    <m:t>𝑖</m:t>
+                                  </m:r>
+                                </m:sub>
+                              </m:sSub>
+                              <m:r>
+                                <a:rPr lang="en-US" altLang="zh-CN" sz="1258" i="1">
+                                  <a:latin typeface="Cambria Math" panose="02040503050406030204" pitchFamily="18" charset="0"/>
+                                  <a:ea typeface="宋体" panose="02010600030101010101" pitchFamily="2" charset="-122"/>
+                                </a:rPr>
+                                <m:t>&gt;</m:t>
+                              </m:r>
+                              <m:r>
+                                <a:rPr lang="zh-CN" altLang="en-US" sz="1258" i="1">
+                                  <a:latin typeface="Cambria Math" panose="02040503050406030204" pitchFamily="18" charset="0"/>
+                                  <a:ea typeface="宋体" panose="02010600030101010101" pitchFamily="2" charset="-122"/>
+                                </a:rPr>
+                                <m:t>𝜏</m:t>
+                              </m:r>
+                            </m:e>
+                            <m:e>
+                              <m:r>
+                                <a:rPr lang="en-US" altLang="zh-CN" sz="1258" i="1">
+                                  <a:latin typeface="Cambria Math" panose="02040503050406030204" pitchFamily="18" charset="0"/>
+                                  <a:ea typeface="宋体" panose="02010600030101010101" pitchFamily="2" charset="-122"/>
+                                </a:rPr>
+                                <m:t>𝑁𝑜𝑟𝑚𝑎𝑙</m:t>
+                              </m:r>
+                              <m:r>
+                                <a:rPr lang="en-US" altLang="zh-CN" sz="1258" i="1">
+                                  <a:latin typeface="Cambria Math" panose="02040503050406030204" pitchFamily="18" charset="0"/>
+                                  <a:ea typeface="宋体" panose="02010600030101010101" pitchFamily="2" charset="-122"/>
+                                </a:rPr>
+                                <m:t>, </m:t>
+                              </m:r>
+                              <m:r>
+                                <a:rPr lang="en-US" altLang="zh-CN" sz="1258" i="1">
+                                  <a:latin typeface="Cambria Math" panose="02040503050406030204" pitchFamily="18" charset="0"/>
+                                  <a:ea typeface="宋体" panose="02010600030101010101" pitchFamily="2" charset="-122"/>
+                                </a:rPr>
+                                <m:t>𝑜𝑡h𝑒𝑟𝑤𝑖𝑠𝑒</m:t>
+                              </m:r>
+                            </m:e>
+                          </m:eqArr>
+                        </m:e>
+                      </m:d>
+                    </m:oMath>
+                  </m:oMathPara>
+                </a14:m>
+                <a:endParaRPr lang="en-US" altLang="zh-CN" sz="1258" dirty="0">
                   <a:latin typeface="宋体" panose="02010600030101010101" pitchFamily="2" charset="-122"/>
                   <a:ea typeface="宋体" panose="02010600030101010101" pitchFamily="2" charset="-122"/>
-                </a:rPr>
-                <a:t>异常判别模块</a:t>
-              </a:r>
-              <a:endParaRPr lang="en-US" altLang="zh-CN" sz="1258" dirty="0">
-                <a:latin typeface="宋体" panose="02010600030101010101" pitchFamily="2" charset="-122"/>
-                <a:ea typeface="宋体" panose="02010600030101010101" pitchFamily="2" charset="-122"/>
-              </a:endParaRPr>
-            </a:p>
-          </p:txBody>
-        </p:sp>
-        <mc:AlternateContent xmlns:mc="http://schemas.openxmlformats.org/markup-compatibility/2006" xmlns:a14="http://schemas.microsoft.com/office/drawing/2010/main">
-          <mc:Choice Requires="a14">
-            <p:sp>
-              <p:nvSpPr>
-                <p:cNvPr id="234" name="文本框 233">
-                  <a:extLst>
-                    <a:ext uri="{FF2B5EF4-FFF2-40B4-BE49-F238E27FC236}">
-                      <a16:creationId xmlns:a16="http://schemas.microsoft.com/office/drawing/2014/main" id="{1121D48C-7396-4F16-8A25-2B095CFDB28A}"/>
-                    </a:ext>
-                  </a:extLst>
-                </p:cNvPr>
-                <p:cNvSpPr txBox="1"/>
-                <p:nvPr/>
-              </p:nvSpPr>
-              <p:spPr>
-                <a:xfrm>
-                  <a:off x="7211418" y="1711944"/>
-                  <a:ext cx="1981559" cy="509714"/>
-                </a:xfrm>
-                <a:prstGeom prst="rect">
-                  <a:avLst/>
-                </a:prstGeom>
-                <a:noFill/>
-              </p:spPr>
-              <p:txBody>
-                <a:bodyPr wrap="none" rtlCol="0">
-                  <a:spAutoFit/>
-                </a:bodyPr>
-                <a:lstStyle/>
-                <a:p>
-                  <a:pPr algn="ctr"/>
-                  <a14:m>
-                    <m:oMathPara xmlns:m="http://schemas.openxmlformats.org/officeDocument/2006/math">
-                      <m:oMathParaPr>
-                        <m:jc m:val="centerGroup"/>
-                      </m:oMathParaPr>
-                      <m:oMath xmlns:m="http://schemas.openxmlformats.org/officeDocument/2006/math">
-                        <m:sSub>
-                          <m:sSubPr>
-                            <m:ctrlPr>
-                              <a:rPr lang="en-US" altLang="zh-CN" sz="1258" i="1">
-                                <a:latin typeface="Cambria Math" panose="02040503050406030204" pitchFamily="18" charset="0"/>
-                                <a:ea typeface="宋体" panose="02010600030101010101" pitchFamily="2" charset="-122"/>
-                              </a:rPr>
-                            </m:ctrlPr>
-                          </m:sSubPr>
-                          <m:e>
-                            <m:acc>
-                              <m:accPr>
-                                <m:chr m:val="̂"/>
-                                <m:ctrlPr>
-                                  <a:rPr lang="en-US" altLang="zh-CN" sz="1258" i="1">
-                                    <a:latin typeface="Cambria Math" panose="02040503050406030204" pitchFamily="18" charset="0"/>
-                                    <a:ea typeface="宋体" panose="02010600030101010101" pitchFamily="2" charset="-122"/>
-                                  </a:rPr>
-                                </m:ctrlPr>
-                              </m:accPr>
-                              <m:e>
-                                <m:r>
-                                  <a:rPr lang="en-US" altLang="zh-CN" sz="1258" i="1">
-                                    <a:latin typeface="Cambria Math" panose="02040503050406030204" pitchFamily="18" charset="0"/>
-                                    <a:ea typeface="宋体" panose="02010600030101010101" pitchFamily="2" charset="-122"/>
-                                  </a:rPr>
-                                  <m:t>𝑦</m:t>
-                                </m:r>
-                              </m:e>
-                            </m:acc>
-                          </m:e>
-                          <m:sub>
-                            <m:r>
-                              <a:rPr lang="en-US" altLang="zh-CN" sz="1258" i="1">
-                                <a:latin typeface="Cambria Math" panose="02040503050406030204" pitchFamily="18" charset="0"/>
-                                <a:ea typeface="宋体" panose="02010600030101010101" pitchFamily="2" charset="-122"/>
-                              </a:rPr>
-                              <m:t>𝑖</m:t>
-                            </m:r>
-                          </m:sub>
-                        </m:sSub>
-                        <m:r>
-                          <a:rPr lang="en-US" altLang="zh-CN" sz="1258" i="1">
-                            <a:latin typeface="Cambria Math" panose="02040503050406030204" pitchFamily="18" charset="0"/>
-                            <a:ea typeface="宋体" panose="02010600030101010101" pitchFamily="2" charset="-122"/>
-                          </a:rPr>
-                          <m:t>=</m:t>
-                        </m:r>
-                        <m:d>
-                          <m:dPr>
-                            <m:begChr m:val="{"/>
-                            <m:endChr m:val=""/>
-                            <m:ctrlPr>
-                              <a:rPr lang="en-US" altLang="zh-CN" sz="1258" i="1">
-                                <a:latin typeface="Cambria Math" panose="02040503050406030204" pitchFamily="18" charset="0"/>
-                                <a:ea typeface="宋体" panose="02010600030101010101" pitchFamily="2" charset="-122"/>
-                              </a:rPr>
-                            </m:ctrlPr>
-                          </m:dPr>
-                          <m:e>
-                            <m:eqArr>
-                              <m:eqArrPr>
-                                <m:ctrlPr>
-                                  <a:rPr lang="en-US" altLang="zh-CN" sz="1258" i="1">
-                                    <a:latin typeface="Cambria Math" panose="02040503050406030204" pitchFamily="18" charset="0"/>
-                                    <a:ea typeface="宋体" panose="02010600030101010101" pitchFamily="2" charset="-122"/>
-                                  </a:rPr>
-                                </m:ctrlPr>
-                              </m:eqArrPr>
-                              <m:e>
-                                <m:r>
-                                  <a:rPr lang="en-US" altLang="zh-CN" sz="1258" i="1">
-                                    <a:latin typeface="Cambria Math" panose="02040503050406030204" pitchFamily="18" charset="0"/>
-                                    <a:ea typeface="宋体" panose="02010600030101010101" pitchFamily="2" charset="-122"/>
-                                  </a:rPr>
-                                  <m:t>𝐴𝑏𝑛𝑜𝑟𝑚𝑎𝑙</m:t>
-                                </m:r>
-                                <m:r>
-                                  <a:rPr lang="en-US" altLang="zh-CN" sz="1258" i="1">
-                                    <a:latin typeface="Cambria Math" panose="02040503050406030204" pitchFamily="18" charset="0"/>
-                                    <a:ea typeface="宋体" panose="02010600030101010101" pitchFamily="2" charset="-122"/>
-                                  </a:rPr>
-                                  <m:t>, </m:t>
-                                </m:r>
-                                <m:sSub>
-                                  <m:sSubPr>
-                                    <m:ctrlPr>
-                                      <a:rPr lang="en-US" altLang="zh-CN" sz="1258" i="1">
-                                        <a:latin typeface="Cambria Math" panose="02040503050406030204" pitchFamily="18" charset="0"/>
-                                        <a:ea typeface="宋体" panose="02010600030101010101" pitchFamily="2" charset="-122"/>
-                                      </a:rPr>
-                                    </m:ctrlPr>
-                                  </m:sSubPr>
-                                  <m:e>
-                                    <m:r>
-                                      <a:rPr lang="en-US" altLang="zh-CN" sz="1258" i="1">
-                                        <a:latin typeface="Cambria Math" panose="02040503050406030204" pitchFamily="18" charset="0"/>
-                                        <a:ea typeface="宋体" panose="02010600030101010101" pitchFamily="2" charset="-122"/>
-                                      </a:rPr>
-                                      <m:t>𝑠</m:t>
-                                    </m:r>
-                                  </m:e>
-                                  <m:sub>
-                                    <m:r>
-                                      <a:rPr lang="en-US" altLang="zh-CN" sz="1258" i="1">
-                                        <a:latin typeface="Cambria Math" panose="02040503050406030204" pitchFamily="18" charset="0"/>
-                                        <a:ea typeface="宋体" panose="02010600030101010101" pitchFamily="2" charset="-122"/>
-                                      </a:rPr>
-                                      <m:t>𝑖</m:t>
-                                    </m:r>
-                                  </m:sub>
-                                </m:sSub>
-                                <m:r>
-                                  <a:rPr lang="en-US" altLang="zh-CN" sz="1258" i="1">
-                                    <a:latin typeface="Cambria Math" panose="02040503050406030204" pitchFamily="18" charset="0"/>
-                                    <a:ea typeface="宋体" panose="02010600030101010101" pitchFamily="2" charset="-122"/>
-                                  </a:rPr>
-                                  <m:t>&gt;</m:t>
-                                </m:r>
-                                <m:r>
-                                  <a:rPr lang="zh-CN" altLang="en-US" sz="1258" i="1">
-                                    <a:latin typeface="Cambria Math" panose="02040503050406030204" pitchFamily="18" charset="0"/>
-                                    <a:ea typeface="宋体" panose="02010600030101010101" pitchFamily="2" charset="-122"/>
-                                  </a:rPr>
-                                  <m:t>𝜏</m:t>
-                                </m:r>
-                              </m:e>
-                              <m:e>
-                                <m:r>
-                                  <a:rPr lang="en-US" altLang="zh-CN" sz="1258" i="1">
-                                    <a:latin typeface="Cambria Math" panose="02040503050406030204" pitchFamily="18" charset="0"/>
-                                    <a:ea typeface="宋体" panose="02010600030101010101" pitchFamily="2" charset="-122"/>
-                                  </a:rPr>
-                                  <m:t>𝑁𝑜𝑟𝑚𝑎𝑙</m:t>
-                                </m:r>
-                                <m:r>
-                                  <a:rPr lang="en-US" altLang="zh-CN" sz="1258" i="1">
-                                    <a:latin typeface="Cambria Math" panose="02040503050406030204" pitchFamily="18" charset="0"/>
-                                    <a:ea typeface="宋体" panose="02010600030101010101" pitchFamily="2" charset="-122"/>
-                                  </a:rPr>
-                                  <m:t>, </m:t>
-                                </m:r>
-                                <m:r>
-                                  <a:rPr lang="en-US" altLang="zh-CN" sz="1258" i="1">
-                                    <a:latin typeface="Cambria Math" panose="02040503050406030204" pitchFamily="18" charset="0"/>
-                                    <a:ea typeface="宋体" panose="02010600030101010101" pitchFamily="2" charset="-122"/>
-                                  </a:rPr>
-                                  <m:t>𝑜𝑡h𝑒𝑟𝑤𝑖𝑠𝑒</m:t>
-                                </m:r>
-                              </m:e>
-                            </m:eqArr>
-                          </m:e>
-                        </m:d>
-                      </m:oMath>
-                    </m:oMathPara>
-                  </a14:m>
-                  <a:endParaRPr lang="en-US" altLang="zh-CN" sz="1258" dirty="0">
-                    <a:latin typeface="宋体" panose="02010600030101010101" pitchFamily="2" charset="-122"/>
-                    <a:ea typeface="宋体" panose="02010600030101010101" pitchFamily="2" charset="-122"/>
-                  </a:endParaRPr>
-                </a:p>
-              </p:txBody>
-            </p:sp>
-          </mc:Choice>
-          <mc:Fallback xmlns="">
-            <p:sp>
-              <p:nvSpPr>
-                <p:cNvPr id="234" name="文本框 233">
-                  <a:extLst>
-                    <a:ext uri="{FF2B5EF4-FFF2-40B4-BE49-F238E27FC236}">
-                      <a16:creationId xmlns:a16="http://schemas.microsoft.com/office/drawing/2014/main" id="{1121D48C-7396-4F16-8A25-2B095CFDB28A}"/>
-                    </a:ext>
-                  </a:extLst>
-                </p:cNvPr>
-                <p:cNvSpPr txBox="1">
-                  <a:spLocks noRot="1" noChangeAspect="1" noMove="1" noResize="1" noEditPoints="1" noAdjustHandles="1" noChangeArrowheads="1" noChangeShapeType="1" noTextEdit="1"/>
-                </p:cNvSpPr>
-                <p:nvPr/>
-              </p:nvSpPr>
-              <p:spPr>
-                <a:xfrm>
-                  <a:off x="7211418" y="1711944"/>
-                  <a:ext cx="1981559" cy="509714"/>
-                </a:xfrm>
-                <a:prstGeom prst="rect">
-                  <a:avLst/>
-                </a:prstGeom>
-                <a:blipFill>
-                  <a:blip r:embed="rId39"/>
-                  <a:stretch>
-                    <a:fillRect l="-16129" t="-170455" b="-247727"/>
-                  </a:stretch>
-                </a:blipFill>
-              </p:spPr>
-              <p:txBody>
-                <a:bodyPr/>
-                <a:lstStyle/>
-                <a:p>
-                  <a:r>
-                    <a:rPr lang="zh-CN" altLang="en-US">
-                      <a:noFill/>
-                    </a:rPr>
-                    <a:t> </a:t>
-                  </a:r>
-                </a:p>
-              </p:txBody>
-            </p:sp>
-          </mc:Fallback>
-        </mc:AlternateContent>
-      </p:grpSp>
+                </a:endParaRPr>
+              </a:p>
+            </p:txBody>
+          </p:sp>
+        </mc:Choice>
+        <mc:Fallback xmlns="">
+          <p:sp>
+            <p:nvSpPr>
+              <p:cNvPr id="234" name="文本框 233">
+                <a:extLst>
+                  <a:ext uri="{FF2B5EF4-FFF2-40B4-BE49-F238E27FC236}">
+                    <a16:creationId xmlns:a16="http://schemas.microsoft.com/office/drawing/2014/main" id="{1121D48C-7396-4F16-8A25-2B095CFDB28A}"/>
+                  </a:ext>
+                </a:extLst>
+              </p:cNvPr>
+              <p:cNvSpPr txBox="1">
+                <a:spLocks noRot="1" noChangeAspect="1" noMove="1" noResize="1" noEditPoints="1" noAdjustHandles="1" noChangeArrowheads="1" noChangeShapeType="1" noTextEdit="1"/>
+              </p:cNvSpPr>
+              <p:nvPr/>
+            </p:nvSpPr>
+            <p:spPr>
+              <a:xfrm>
+                <a:off x="6916691" y="850944"/>
+                <a:ext cx="2077124" cy="534295"/>
+              </a:xfrm>
+              <a:prstGeom prst="rect">
+                <a:avLst/>
+              </a:prstGeom>
+              <a:blipFill>
+                <a:blip r:embed="rId8"/>
+                <a:stretch>
+                  <a:fillRect l="-16176" t="-172414" b="-251724"/>
+                </a:stretch>
+              </a:blipFill>
+            </p:spPr>
+            <p:txBody>
+              <a:bodyPr/>
+              <a:lstStyle/>
+              <a:p>
+                <a:r>
+                  <a:rPr lang="zh-CN" altLang="en-US">
+                    <a:noFill/>
+                  </a:rPr>
+                  <a:t> </a:t>
+                </a:r>
+              </a:p>
+            </p:txBody>
+          </p:sp>
+        </mc:Fallback>
+      </mc:AlternateContent>
       <p:cxnSp>
         <p:nvCxnSpPr>
           <p:cNvPr id="236" name="连接符: 肘形 235">
@@ -6796,8 +6114,8 @@
         </p:nvCxnSpPr>
         <p:spPr>
           <a:xfrm rot="5400000">
-            <a:off x="6221377" y="1583017"/>
-            <a:ext cx="2140844" cy="1567655"/>
+            <a:off x="6216291" y="1671532"/>
+            <a:ext cx="1953284" cy="1501222"/>
           </a:xfrm>
           <a:prstGeom prst="bentConnector2">
             <a:avLst/>
@@ -6839,7 +6157,7 @@
         </p:nvSpPr>
         <p:spPr>
           <a:xfrm>
-            <a:off x="6744768" y="3474075"/>
+            <a:off x="6679118" y="3634702"/>
             <a:ext cx="1177950" cy="292262"/>
           </a:xfrm>
           <a:prstGeom prst="rect">
@@ -6877,7 +6195,7 @@
         </p:nvSpPr>
         <p:spPr>
           <a:xfrm>
-            <a:off x="6207183" y="831890"/>
+            <a:off x="6102795" y="997203"/>
             <a:ext cx="849080" cy="292262"/>
           </a:xfrm>
           <a:prstGeom prst="rect">
@@ -6901,8 +6219,8 @@
           </a:p>
         </p:txBody>
       </p:sp>
-      <mc:AlternateContent xmlns:mc="http://schemas.openxmlformats.org/markup-compatibility/2006">
-        <mc:Choice xmlns:a14="http://schemas.microsoft.com/office/drawing/2010/main" Requires="a14">
+      <mc:AlternateContent xmlns:mc="http://schemas.openxmlformats.org/markup-compatibility/2006" xmlns:a14="http://schemas.microsoft.com/office/drawing/2010/main">
+        <mc:Choice Requires="a14">
           <p:sp>
             <p:nvSpPr>
               <p:cNvPr id="49" name="文本框 48">
@@ -6917,7 +6235,7 @@
             </p:nvSpPr>
             <p:spPr>
               <a:xfrm>
-                <a:off x="786849" y="565227"/>
+                <a:off x="520711" y="694124"/>
                 <a:ext cx="436978" cy="369332"/>
               </a:xfrm>
               <a:prstGeom prst="rect">
@@ -6931,6 +6249,7 @@
               </a:bodyPr>
               <a:lstStyle/>
               <a:p>
+                <a:pPr/>
                 <a14:m>
                   <m:oMathPara xmlns:m="http://schemas.openxmlformats.org/officeDocument/2006/math">
                     <m:oMathParaPr>
@@ -6955,7 +6274,7 @@
             </p:txBody>
           </p:sp>
         </mc:Choice>
-        <mc:Fallback>
+        <mc:Fallback xmlns="">
           <p:sp>
             <p:nvSpPr>
               <p:cNvPr id="49" name="文本框 48">
@@ -6972,18 +6291,595 @@
             </p:nvSpPr>
             <p:spPr>
               <a:xfrm>
-                <a:off x="786849" y="565227"/>
+                <a:off x="520711" y="694124"/>
                 <a:ext cx="436978" cy="369332"/>
               </a:xfrm>
               <a:prstGeom prst="rect">
                 <a:avLst/>
               </a:prstGeom>
               <a:blipFill>
-                <a:blip r:embed="rId40"/>
+                <a:blip r:embed="rId9"/>
                 <a:stretch>
                   <a:fillRect b="-8333"/>
                 </a:stretch>
               </a:blipFill>
+            </p:spPr>
+            <p:txBody>
+              <a:bodyPr/>
+              <a:lstStyle/>
+              <a:p>
+                <a:r>
+                  <a:rPr lang="zh-CN" altLang="en-US">
+                    <a:noFill/>
+                  </a:rPr>
+                  <a:t> </a:t>
+                </a:r>
+              </a:p>
+            </p:txBody>
+          </p:sp>
+        </mc:Fallback>
+      </mc:AlternateContent>
+      <p:sp>
+        <p:nvSpPr>
+          <p:cNvPr id="65" name="圆角矩形 83">
+            <a:extLst>
+              <a:ext uri="{FF2B5EF4-FFF2-40B4-BE49-F238E27FC236}">
+                <a16:creationId xmlns:a16="http://schemas.microsoft.com/office/drawing/2014/main" id="{1261B703-7A16-4B90-AF20-58719FB23C7E}"/>
+              </a:ext>
+            </a:extLst>
+          </p:cNvPr>
+          <p:cNvSpPr/>
+          <p:nvPr/>
+        </p:nvSpPr>
+        <p:spPr>
+          <a:xfrm>
+            <a:off x="2437598" y="2321343"/>
+            <a:ext cx="1547429" cy="875729"/>
+          </a:xfrm>
+          <a:prstGeom prst="roundRect">
+            <a:avLst>
+              <a:gd name="adj" fmla="val 6902"/>
+            </a:avLst>
+          </a:prstGeom>
+          <a:solidFill>
+            <a:srgbClr val="ECFFEB"/>
+          </a:solidFill>
+          <a:ln>
+            <a:noFill/>
+          </a:ln>
+        </p:spPr>
+        <p:style>
+          <a:lnRef idx="2">
+            <a:schemeClr val="accent1">
+              <a:lumMod val="75000"/>
+            </a:schemeClr>
+          </a:lnRef>
+          <a:fillRef idx="1">
+            <a:schemeClr val="accent1"/>
+          </a:fillRef>
+          <a:effectRef idx="0">
+            <a:srgbClr val="FFFFFF"/>
+          </a:effectRef>
+          <a:fontRef idx="minor">
+            <a:schemeClr val="lt1"/>
+          </a:fontRef>
+        </p:style>
+        <p:txBody>
+          <a:bodyPr rtlCol="0" anchor="ctr"/>
+          <a:lstStyle/>
+          <a:p>
+            <a:pPr algn="ctr"/>
+            <a:endParaRPr lang="zh-CN" altLang="en-US" sz="1894" b="1" dirty="0"/>
+          </a:p>
+        </p:txBody>
+      </p:sp>
+      <p:grpSp>
+        <p:nvGrpSpPr>
+          <p:cNvPr id="16" name="组合 15">
+            <a:extLst>
+              <a:ext uri="{FF2B5EF4-FFF2-40B4-BE49-F238E27FC236}">
+                <a16:creationId xmlns:a16="http://schemas.microsoft.com/office/drawing/2014/main" id="{27578A96-14F0-4638-9E26-1A5AD2AA445D}"/>
+              </a:ext>
+            </a:extLst>
+          </p:cNvPr>
+          <p:cNvGrpSpPr/>
+          <p:nvPr/>
+        </p:nvGrpSpPr>
+        <p:grpSpPr>
+          <a:xfrm>
+            <a:off x="-79321" y="1524419"/>
+            <a:ext cx="2068992" cy="1849700"/>
+            <a:chOff x="-73002" y="1298005"/>
+            <a:chExt cx="2068992" cy="1849700"/>
+          </a:xfrm>
+        </p:grpSpPr>
+        <p:sp>
+          <p:nvSpPr>
+            <p:cNvPr id="10" name="文本框 9">
+              <a:extLst>
+                <a:ext uri="{FF2B5EF4-FFF2-40B4-BE49-F238E27FC236}">
+                  <a16:creationId xmlns:a16="http://schemas.microsoft.com/office/drawing/2014/main" id="{E5E4BC9D-AAE7-4BAE-8877-1FC360EA3526}"/>
+                </a:ext>
+              </a:extLst>
+            </p:cNvPr>
+            <p:cNvSpPr txBox="1"/>
+            <p:nvPr/>
+          </p:nvSpPr>
+          <p:spPr>
+            <a:xfrm>
+              <a:off x="-73002" y="2861793"/>
+              <a:ext cx="2045753" cy="285912"/>
+            </a:xfrm>
+            <a:prstGeom prst="rect">
+              <a:avLst/>
+            </a:prstGeom>
+            <a:noFill/>
+          </p:spPr>
+          <p:txBody>
+            <a:bodyPr wrap="none" rtlCol="0">
+              <a:spAutoFit/>
+            </a:bodyPr>
+            <a:lstStyle/>
+            <a:p>
+              <a:r>
+                <a:rPr lang="zh-CN" altLang="en-US" sz="1258" dirty="0">
+                  <a:latin typeface="宋体" panose="02010600030101010101" pitchFamily="2" charset="-122"/>
+                  <a:ea typeface="宋体" panose="02010600030101010101" pitchFamily="2" charset="-122"/>
+                </a:rPr>
+                <a:t>（</a:t>
+              </a:r>
+              <a:r>
+                <a:rPr lang="en-US" altLang="zh-CN" sz="1258" dirty="0">
+                  <a:latin typeface="宋体" panose="02010600030101010101" pitchFamily="2" charset="-122"/>
+                  <a:ea typeface="宋体" panose="02010600030101010101" pitchFamily="2" charset="-122"/>
+                </a:rPr>
+                <a:t>a</a:t>
+              </a:r>
+              <a:r>
+                <a:rPr lang="zh-CN" altLang="en-US" sz="1258" dirty="0">
+                  <a:latin typeface="宋体" panose="02010600030101010101" pitchFamily="2" charset="-122"/>
+                  <a:ea typeface="宋体" panose="02010600030101010101" pitchFamily="2" charset="-122"/>
+                </a:rPr>
+                <a:t>）</a:t>
+              </a:r>
+              <a:r>
+                <a:rPr lang="zh-CN" altLang="en-US" sz="1258">
+                  <a:latin typeface="宋体" panose="02010600030101010101" pitchFamily="2" charset="-122"/>
+                  <a:ea typeface="宋体" panose="02010600030101010101" pitchFamily="2" charset="-122"/>
+                </a:rPr>
+                <a:t>网络流量数据预处理</a:t>
+              </a:r>
+              <a:endParaRPr lang="zh-CN" altLang="en-US" sz="1258" dirty="0">
+                <a:latin typeface="宋体" panose="02010600030101010101" pitchFamily="2" charset="-122"/>
+                <a:ea typeface="宋体" panose="02010600030101010101" pitchFamily="2" charset="-122"/>
+              </a:endParaRPr>
+            </a:p>
+          </p:txBody>
+        </p:sp>
+        <p:pic>
+          <p:nvPicPr>
+            <p:cNvPr id="50" name="图片 49">
+              <a:extLst>
+                <a:ext uri="{FF2B5EF4-FFF2-40B4-BE49-F238E27FC236}">
+                  <a16:creationId xmlns:a16="http://schemas.microsoft.com/office/drawing/2014/main" id="{E36A7447-4E8A-4F96-AD96-DB29797B5202}"/>
+                </a:ext>
+              </a:extLst>
+            </p:cNvPr>
+            <p:cNvPicPr>
+              <a:picLocks noChangeAspect="1"/>
+            </p:cNvPicPr>
+            <p:nvPr/>
+          </p:nvPicPr>
+          <p:blipFill>
+            <a:blip r:embed="rId10">
+              <a:extLst>
+                <a:ext uri="{28A0092B-C50C-407E-A947-70E740481C1C}">
+                  <a14:useLocalDpi xmlns:a14="http://schemas.microsoft.com/office/drawing/2010/main" val="0"/>
+                </a:ext>
+              </a:extLst>
+            </a:blip>
+            <a:srcRect l="48750" t="17917" r="17166" b="10675"/>
+            <a:stretch/>
+          </p:blipFill>
+          <p:spPr>
+            <a:xfrm>
+              <a:off x="161391" y="2469203"/>
+              <a:ext cx="1752925" cy="312299"/>
+            </a:xfrm>
+            <a:prstGeom prst="rect">
+              <a:avLst/>
+            </a:prstGeom>
+            <a:ln w="19050">
+              <a:solidFill>
+                <a:schemeClr val="tx1"/>
+              </a:solidFill>
+            </a:ln>
+          </p:spPr>
+        </p:pic>
+        <p:sp>
+          <p:nvSpPr>
+            <p:cNvPr id="3" name="矩形 2">
+              <a:extLst>
+                <a:ext uri="{FF2B5EF4-FFF2-40B4-BE49-F238E27FC236}">
+                  <a16:creationId xmlns:a16="http://schemas.microsoft.com/office/drawing/2014/main" id="{552B4AAE-DE5D-4B8C-A88C-74B971338B85}"/>
+                </a:ext>
+              </a:extLst>
+            </p:cNvPr>
+            <p:cNvSpPr/>
+            <p:nvPr/>
+          </p:nvSpPr>
+          <p:spPr>
+            <a:xfrm>
+              <a:off x="79718" y="1298005"/>
+              <a:ext cx="1916272" cy="1539031"/>
+            </a:xfrm>
+            <a:prstGeom prst="rect">
+              <a:avLst/>
+            </a:prstGeom>
+            <a:noFill/>
+          </p:spPr>
+          <p:style>
+            <a:lnRef idx="2">
+              <a:schemeClr val="accent1">
+                <a:shade val="50000"/>
+              </a:schemeClr>
+            </a:lnRef>
+            <a:fillRef idx="1">
+              <a:schemeClr val="accent1"/>
+            </a:fillRef>
+            <a:effectRef idx="0">
+              <a:schemeClr val="accent1"/>
+            </a:effectRef>
+            <a:fontRef idx="minor">
+              <a:schemeClr val="lt1"/>
+            </a:fontRef>
+          </p:style>
+          <p:txBody>
+            <a:bodyPr rtlCol="0" anchor="ctr"/>
+            <a:lstStyle/>
+            <a:p>
+              <a:pPr algn="ctr"/>
+              <a:endParaRPr lang="zh-CN" altLang="en-US"/>
+            </a:p>
+          </p:txBody>
+        </p:sp>
+        <p:pic>
+          <p:nvPicPr>
+            <p:cNvPr id="53" name="图片 52">
+              <a:extLst>
+                <a:ext uri="{FF2B5EF4-FFF2-40B4-BE49-F238E27FC236}">
+                  <a16:creationId xmlns:a16="http://schemas.microsoft.com/office/drawing/2014/main" id="{8A0CB60A-2804-4412-9522-B64FC841242A}"/>
+                </a:ext>
+              </a:extLst>
+            </p:cNvPr>
+            <p:cNvPicPr>
+              <a:picLocks noChangeAspect="1"/>
+            </p:cNvPicPr>
+            <p:nvPr/>
+          </p:nvPicPr>
+          <p:blipFill>
+            <a:blip r:embed="rId10">
+              <a:extLst>
+                <a:ext uri="{28A0092B-C50C-407E-A947-70E740481C1C}">
+                  <a14:useLocalDpi xmlns:a14="http://schemas.microsoft.com/office/drawing/2010/main" val="0"/>
+                </a:ext>
+              </a:extLst>
+            </a:blip>
+            <a:srcRect l="48750" t="17917" r="17166" b="10675"/>
+            <a:stretch/>
+          </p:blipFill>
+          <p:spPr>
+            <a:xfrm>
+              <a:off x="165398" y="2095481"/>
+              <a:ext cx="1752925" cy="312299"/>
+            </a:xfrm>
+            <a:prstGeom prst="rect">
+              <a:avLst/>
+            </a:prstGeom>
+            <a:ln w="19050">
+              <a:solidFill>
+                <a:schemeClr val="tx1"/>
+              </a:solidFill>
+            </a:ln>
+          </p:spPr>
+        </p:pic>
+        <p:pic>
+          <p:nvPicPr>
+            <p:cNvPr id="54" name="图片 53">
+              <a:extLst>
+                <a:ext uri="{FF2B5EF4-FFF2-40B4-BE49-F238E27FC236}">
+                  <a16:creationId xmlns:a16="http://schemas.microsoft.com/office/drawing/2014/main" id="{0ED97F87-3200-4602-951D-43D051E05F57}"/>
+                </a:ext>
+              </a:extLst>
+            </p:cNvPr>
+            <p:cNvPicPr>
+              <a:picLocks noChangeAspect="1"/>
+            </p:cNvPicPr>
+            <p:nvPr/>
+          </p:nvPicPr>
+          <p:blipFill>
+            <a:blip r:embed="rId10">
+              <a:extLst>
+                <a:ext uri="{28A0092B-C50C-407E-A947-70E740481C1C}">
+                  <a14:useLocalDpi xmlns:a14="http://schemas.microsoft.com/office/drawing/2010/main" val="0"/>
+                </a:ext>
+              </a:extLst>
+            </a:blip>
+            <a:srcRect l="48750" t="17917" r="17166" b="10675"/>
+            <a:stretch/>
+          </p:blipFill>
+          <p:spPr>
+            <a:xfrm>
+              <a:off x="169405" y="1721759"/>
+              <a:ext cx="1752925" cy="312299"/>
+            </a:xfrm>
+            <a:prstGeom prst="rect">
+              <a:avLst/>
+            </a:prstGeom>
+            <a:ln w="19050">
+              <a:solidFill>
+                <a:schemeClr val="tx1"/>
+              </a:solidFill>
+            </a:ln>
+          </p:spPr>
+        </p:pic>
+        <p:pic>
+          <p:nvPicPr>
+            <p:cNvPr id="55" name="图片 54">
+              <a:extLst>
+                <a:ext uri="{FF2B5EF4-FFF2-40B4-BE49-F238E27FC236}">
+                  <a16:creationId xmlns:a16="http://schemas.microsoft.com/office/drawing/2014/main" id="{144CE1AF-8DA1-4B54-9B3C-4FE665D0FC61}"/>
+                </a:ext>
+              </a:extLst>
+            </p:cNvPr>
+            <p:cNvPicPr>
+              <a:picLocks noChangeAspect="1"/>
+            </p:cNvPicPr>
+            <p:nvPr/>
+          </p:nvPicPr>
+          <p:blipFill>
+            <a:blip r:embed="rId10">
+              <a:extLst>
+                <a:ext uri="{28A0092B-C50C-407E-A947-70E740481C1C}">
+                  <a14:useLocalDpi xmlns:a14="http://schemas.microsoft.com/office/drawing/2010/main" val="0"/>
+                </a:ext>
+              </a:extLst>
+            </a:blip>
+            <a:srcRect l="48750" t="17917" r="17166" b="10675"/>
+            <a:stretch/>
+          </p:blipFill>
+          <p:spPr>
+            <a:xfrm>
+              <a:off x="161934" y="1353539"/>
+              <a:ext cx="1752925" cy="312299"/>
+            </a:xfrm>
+            <a:prstGeom prst="rect">
+              <a:avLst/>
+            </a:prstGeom>
+            <a:ln w="19050">
+              <a:solidFill>
+                <a:schemeClr val="tx1"/>
+              </a:solidFill>
+            </a:ln>
+          </p:spPr>
+        </p:pic>
+      </p:grpSp>
+      <mc:AlternateContent xmlns:mc="http://schemas.openxmlformats.org/markup-compatibility/2006" xmlns:a14="http://schemas.microsoft.com/office/drawing/2010/main">
+        <mc:Choice Requires="a14">
+          <p:sp>
+            <p:nvSpPr>
+              <p:cNvPr id="114" name="文本框 113">
+                <a:extLst>
+                  <a:ext uri="{FF2B5EF4-FFF2-40B4-BE49-F238E27FC236}">
+                    <a16:creationId xmlns:a16="http://schemas.microsoft.com/office/drawing/2014/main" id="{14D51799-6207-4003-B348-02637270E6C7}"/>
+                  </a:ext>
+                </a:extLst>
+              </p:cNvPr>
+              <p:cNvSpPr txBox="1"/>
+              <p:nvPr/>
+            </p:nvSpPr>
+            <p:spPr>
+              <a:xfrm>
+                <a:off x="2463810" y="2487119"/>
+                <a:ext cx="1524425" cy="488853"/>
+              </a:xfrm>
+              <a:prstGeom prst="rect">
+                <a:avLst/>
+              </a:prstGeom>
+              <a:noFill/>
+              <a:ln>
+                <a:noFill/>
+              </a:ln>
+            </p:spPr>
+            <p:txBody>
+              <a:bodyPr wrap="none" rtlCol="0">
+                <a:spAutoFit/>
+              </a:bodyPr>
+              <a:lstStyle/>
+              <a:p>
+                <a:pPr algn="ctr"/>
+                <a:r>
+                  <a:rPr lang="zh-CN" altLang="en-US" sz="1258" dirty="0">
+                    <a:latin typeface="宋体" panose="02010600030101010101" pitchFamily="2" charset="-122"/>
+                    <a:ea typeface="宋体" panose="02010600030101010101" pitchFamily="2" charset="-122"/>
+                  </a:rPr>
+                  <a:t>聚类中心</a:t>
+                </a:r>
+                <a:endParaRPr lang="en-US" altLang="zh-CN" sz="1258" dirty="0">
+                  <a:latin typeface="宋体" panose="02010600030101010101" pitchFamily="2" charset="-122"/>
+                  <a:ea typeface="宋体" panose="02010600030101010101" pitchFamily="2" charset="-122"/>
+                </a:endParaRPr>
+              </a:p>
+              <a:p>
+                <a:pPr algn="ctr"/>
+                <a14:m>
+                  <m:oMathPara xmlns:m="http://schemas.openxmlformats.org/officeDocument/2006/math">
+                    <m:oMathParaPr>
+                      <m:jc m:val="centerGroup"/>
+                    </m:oMathParaPr>
+                    <m:oMath xmlns:m="http://schemas.openxmlformats.org/officeDocument/2006/math">
+                      <m:r>
+                        <a:rPr lang="zh-CN" altLang="en-US" sz="1258" i="1">
+                          <a:latin typeface="Cambria Math" panose="02040503050406030204" pitchFamily="18" charset="0"/>
+                          <a:ea typeface="宋体" panose="02010600030101010101" pitchFamily="2" charset="-122"/>
+                        </a:rPr>
+                        <m:t>𝜀</m:t>
+                      </m:r>
+                      <m:r>
+                        <a:rPr lang="en-US" altLang="zh-CN" sz="1258" i="1">
+                          <a:latin typeface="Cambria Math" panose="02040503050406030204" pitchFamily="18" charset="0"/>
+                          <a:ea typeface="宋体" panose="02010600030101010101" pitchFamily="2" charset="-122"/>
+                        </a:rPr>
+                        <m:t>={</m:t>
+                      </m:r>
+                      <m:sSub>
+                        <m:sSubPr>
+                          <m:ctrlPr>
+                            <a:rPr lang="en-US" altLang="zh-CN" sz="1258" i="1">
+                              <a:latin typeface="Cambria Math" panose="02040503050406030204" pitchFamily="18" charset="0"/>
+                              <a:ea typeface="宋体" panose="02010600030101010101" pitchFamily="2" charset="-122"/>
+                            </a:rPr>
+                          </m:ctrlPr>
+                        </m:sSubPr>
+                        <m:e>
+                          <m:r>
+                            <a:rPr lang="en-US" altLang="zh-CN" sz="1258" i="1">
+                              <a:latin typeface="Cambria Math" panose="02040503050406030204" pitchFamily="18" charset="0"/>
+                              <a:ea typeface="宋体" panose="02010600030101010101" pitchFamily="2" charset="-122"/>
+                            </a:rPr>
+                            <m:t>𝑒</m:t>
+                          </m:r>
+                        </m:e>
+                        <m:sub>
+                          <m:r>
+                            <a:rPr lang="en-US" altLang="zh-CN" sz="1258" i="1">
+                              <a:latin typeface="Cambria Math" panose="02040503050406030204" pitchFamily="18" charset="0"/>
+                              <a:ea typeface="宋体" panose="02010600030101010101" pitchFamily="2" charset="-122"/>
+                            </a:rPr>
+                            <m:t>1</m:t>
+                          </m:r>
+                        </m:sub>
+                      </m:sSub>
+                      <m:r>
+                        <a:rPr lang="en-US" altLang="zh-CN" sz="1258" i="1">
+                          <a:latin typeface="Cambria Math" panose="02040503050406030204" pitchFamily="18" charset="0"/>
+                          <a:ea typeface="宋体" panose="02010600030101010101" pitchFamily="2" charset="-122"/>
+                        </a:rPr>
+                        <m:t>,</m:t>
+                      </m:r>
+                      <m:sSub>
+                        <m:sSubPr>
+                          <m:ctrlPr>
+                            <a:rPr lang="en-US" altLang="zh-CN" sz="1258" i="1">
+                              <a:latin typeface="Cambria Math" panose="02040503050406030204" pitchFamily="18" charset="0"/>
+                              <a:ea typeface="宋体" panose="02010600030101010101" pitchFamily="2" charset="-122"/>
+                            </a:rPr>
+                          </m:ctrlPr>
+                        </m:sSubPr>
+                        <m:e>
+                          <m:r>
+                            <a:rPr lang="en-US" altLang="zh-CN" sz="1258" i="1">
+                              <a:latin typeface="Cambria Math" panose="02040503050406030204" pitchFamily="18" charset="0"/>
+                              <a:ea typeface="宋体" panose="02010600030101010101" pitchFamily="2" charset="-122"/>
+                            </a:rPr>
+                            <m:t>𝑒</m:t>
+                          </m:r>
+                        </m:e>
+                        <m:sub>
+                          <m:r>
+                            <a:rPr lang="en-US" altLang="zh-CN" sz="1258" i="1">
+                              <a:latin typeface="Cambria Math" panose="02040503050406030204" pitchFamily="18" charset="0"/>
+                              <a:ea typeface="宋体" panose="02010600030101010101" pitchFamily="2" charset="-122"/>
+                            </a:rPr>
+                            <m:t>2</m:t>
+                          </m:r>
+                        </m:sub>
+                      </m:sSub>
+                      <m:r>
+                        <a:rPr lang="en-US" altLang="zh-CN" sz="1258" i="1">
+                          <a:latin typeface="Cambria Math" panose="02040503050406030204" pitchFamily="18" charset="0"/>
+                          <a:ea typeface="宋体" panose="02010600030101010101" pitchFamily="2" charset="-122"/>
+                        </a:rPr>
+                        <m:t>,…,</m:t>
+                      </m:r>
+                      <m:sSub>
+                        <m:sSubPr>
+                          <m:ctrlPr>
+                            <a:rPr lang="en-US" altLang="zh-CN" sz="1258" i="1">
+                              <a:latin typeface="Cambria Math" panose="02040503050406030204" pitchFamily="18" charset="0"/>
+                              <a:ea typeface="宋体" panose="02010600030101010101" pitchFamily="2" charset="-122"/>
+                            </a:rPr>
+                          </m:ctrlPr>
+                        </m:sSubPr>
+                        <m:e>
+                          <m:r>
+                            <a:rPr lang="en-US" altLang="zh-CN" sz="1258" i="1">
+                              <a:latin typeface="Cambria Math" panose="02040503050406030204" pitchFamily="18" charset="0"/>
+                              <a:ea typeface="宋体" panose="02010600030101010101" pitchFamily="2" charset="-122"/>
+                            </a:rPr>
+                            <m:t>𝑒</m:t>
+                          </m:r>
+                        </m:e>
+                        <m:sub>
+                          <m:r>
+                            <a:rPr lang="en-US" altLang="zh-CN" sz="1258" i="1">
+                              <a:latin typeface="Cambria Math" panose="02040503050406030204" pitchFamily="18" charset="0"/>
+                              <a:ea typeface="宋体" panose="02010600030101010101" pitchFamily="2" charset="-122"/>
+                            </a:rPr>
+                            <m:t>𝑚</m:t>
+                          </m:r>
+                        </m:sub>
+                      </m:sSub>
+                      <m:r>
+                        <a:rPr lang="en-US" altLang="zh-CN" sz="1258" i="1">
+                          <a:latin typeface="Cambria Math" panose="02040503050406030204" pitchFamily="18" charset="0"/>
+                          <a:ea typeface="宋体" panose="02010600030101010101" pitchFamily="2" charset="-122"/>
+                        </a:rPr>
+                        <m:t>}</m:t>
+                      </m:r>
+                    </m:oMath>
+                  </m:oMathPara>
+                </a14:m>
+                <a:endParaRPr lang="zh-CN" altLang="en-US" sz="1258" dirty="0">
+                  <a:latin typeface="宋体" panose="02010600030101010101" pitchFamily="2" charset="-122"/>
+                  <a:ea typeface="宋体" panose="02010600030101010101" pitchFamily="2" charset="-122"/>
+                </a:endParaRPr>
+              </a:p>
+            </p:txBody>
+          </p:sp>
+        </mc:Choice>
+        <mc:Fallback xmlns="">
+          <p:sp>
+            <p:nvSpPr>
+              <p:cNvPr id="114" name="文本框 113">
+                <a:extLst>
+                  <a:ext uri="{FF2B5EF4-FFF2-40B4-BE49-F238E27FC236}">
+                    <a16:creationId xmlns:a16="http://schemas.microsoft.com/office/drawing/2014/main" id="{14D51799-6207-4003-B348-02637270E6C7}"/>
+                  </a:ext>
+                </a:extLst>
+              </p:cNvPr>
+              <p:cNvSpPr txBox="1">
+                <a:spLocks noRot="1" noChangeAspect="1" noMove="1" noResize="1" noEditPoints="1" noAdjustHandles="1" noChangeArrowheads="1" noChangeShapeType="1" noTextEdit="1"/>
+              </p:cNvSpPr>
+              <p:nvPr/>
+            </p:nvSpPr>
+            <p:spPr>
+              <a:xfrm>
+                <a:off x="2463810" y="2487119"/>
+                <a:ext cx="1524425" cy="488853"/>
+              </a:xfrm>
+              <a:prstGeom prst="rect">
+                <a:avLst/>
+              </a:prstGeom>
+              <a:blipFill>
+                <a:blip r:embed="rId11"/>
+                <a:stretch>
+                  <a:fillRect b="-3750"/>
+                </a:stretch>
+              </a:blipFill>
+              <a:ln>
+                <a:noFill/>
+              </a:ln>
             </p:spPr>
             <p:txBody>
               <a:bodyPr/>
